--- a/docs/presentacion/EA2_VetPetConnect.pptx
+++ b/docs/presentacion/EA2_VetPetConnect.pptx
@@ -17,9 +17,10 @@
     <p:sldId id="265" r:id="rId11"/>
     <p:sldId id="266" r:id="rId12"/>
     <p:sldId id="267" r:id="rId13"/>
+    <p:sldId id="268" r:id="rId14"/>
   </p:sldIdLst>
   <p:notesMasterIdLst>
-    <p:notesMasterId r:id="rId14"/>
+    <p:notesMasterId r:id="rId15"/>
   </p:notesMasterIdLst>
   <p:sldSz cx="12192000" cy="6858000"/>
   <p:notesSz cx="6858000" cy="12192000"/>
@@ -689,7 +690,7 @@
           <a:p>
             <a:r>
               <a:rPr lang="en-US" dirty="0"/>
-              <a:t>Si el jurado pide demostración en vivo: la suite corre en siete segundos y el recorrido completo de compra se puede mostrar en el navegador.</a:t>
+              <a:t>Si preguntan si el chatbot usa IA: no, y es una decisión, no una carencia. Un motor de palabras clave con una configuración revisable es auditable, no inventa respuestas y no tiene costo por consulta. Para las preguntas frecuentes de una veterinaria es suficiente.</a:t>
             </a:r>
             <a:endParaRPr lang="en-US" dirty="0"/>
           </a:p>
@@ -777,7 +778,7 @@
           <a:p>
             <a:r>
               <a:rPr lang="en-US" dirty="0"/>
-              <a:t>Cierre. Si hay una sola idea que quede: las reglas del negocio están escritas en el sistema y se comprueban solas. Eso es lo que separa un prototipo de un producto.</a:t>
+              <a:t>Si el jurado pide demostración en vivo: la suite corre en siete segundos y el recorrido completo de compra se puede mostrar en el navegador.</a:t>
             </a:r>
             <a:endParaRPr lang="en-US" dirty="0"/>
           </a:p>
@@ -801,6 +802,94 @@
             <a:fld id="{F7021451-1387-4CA6-816F-3879F97B5CBC}" type="slidenum">
               <a:rPr lang="en-US"/>
               <a:t>12</a:t>
+            </a:fld>
+            <a:endParaRPr lang="en-US"/>
+          </a:p>
+        </p:txBody>
+      </p:sp>
+    </p:spTree>
+    <p:extLst>
+      <p:ext uri="{BB962C8B-B14F-4D97-AF65-F5344CB8AC3E}">
+        <p14:creationId xmlns:p14="http://schemas.microsoft.com/office/powerpoint/2010/main" val="1024086991"/>
+      </p:ext>
+    </p:extLst>
+  </p:cSld>
+  <p:clrMapOvr>
+    <a:masterClrMapping/>
+  </p:clrMapOvr>
+</p:notes>
+</file>
+
+<file path=ppt/notesSlides/notesSlide13.xml><?xml version="1.0" encoding="utf-8"?>
+<p:notes xmlns:a="http://schemas.openxmlformats.org/drawingml/2006/main" xmlns:r="http://schemas.openxmlformats.org/officeDocument/2006/relationships" xmlns:p="http://schemas.openxmlformats.org/presentationml/2006/main">
+  <p:cSld>
+    <p:spTree>
+      <p:nvGrpSpPr>
+        <p:cNvPr id="1" name=""/>
+        <p:cNvGrpSpPr/>
+        <p:nvPr/>
+      </p:nvGrpSpPr>
+      <p:grpSpPr>
+        <a:xfrm>
+          <a:off x="0" y="0"/>
+          <a:ext cx="0" cy="0"/>
+          <a:chOff x="0" y="0"/>
+          <a:chExt cx="0" cy="0"/>
+        </a:xfrm>
+      </p:grpSpPr>
+      <p:sp>
+        <p:nvSpPr>
+          <p:cNvPr id="2" name="Slide Image Placeholder 1"/>
+          <p:cNvSpPr>
+            <a:spLocks noGrp="1" noRot="1" noChangeAspect="1"/>
+          </p:cNvSpPr>
+          <p:nvPr>
+            <p:ph type="sldImg"/>
+          </p:nvPr>
+        </p:nvSpPr>
+        <p:spPr/>
+      </p:sp>
+      <p:sp>
+        <p:nvSpPr>
+          <p:cNvPr id="3" name="Notes Placeholder 2"/>
+          <p:cNvSpPr>
+            <a:spLocks noGrp="1"/>
+          </p:cNvSpPr>
+          <p:nvPr>
+            <p:ph type="body" idx="1"/>
+          </p:nvPr>
+        </p:nvSpPr>
+        <p:spPr/>
+        <p:txBody>
+          <a:bodyPr/>
+          <a:lstStyle/>
+          <a:p>
+            <a:r>
+              <a:rPr lang="en-US" dirty="0"/>
+              <a:t>Cierre. Si hay una sola idea que quede: las reglas del negocio están escritas en el sistema y se comprueban solas. Eso es lo que separa un prototipo de un producto.</a:t>
+            </a:r>
+            <a:endParaRPr lang="en-US" dirty="0"/>
+          </a:p>
+        </p:txBody>
+      </p:sp>
+      <p:sp>
+        <p:nvSpPr>
+          <p:cNvPr id="4" name="Slide Number Placeholder 3"/>
+          <p:cNvSpPr>
+            <a:spLocks noGrp="1"/>
+          </p:cNvSpPr>
+          <p:nvPr>
+            <p:ph type="sldNum" sz="quarter" idx="10"/>
+          </p:nvPr>
+        </p:nvSpPr>
+        <p:spPr/>
+        <p:txBody>
+          <a:bodyPr/>
+          <a:lstStyle/>
+          <a:p>
+            <a:fld id="{F7021451-1387-4CA6-816F-3879F97B5CBC}" type="slidenum">
+              <a:rPr lang="en-US"/>
+              <a:t>13</a:t>
             </a:fld>
             <a:endParaRPr lang="en-US"/>
           </a:p>
@@ -2391,7 +2480,7 @@
                 <a:ea typeface="Cambria" pitchFamily="34" charset="-122"/>
                 <a:cs typeface="Cambria" pitchFamily="34" charset="-120"/>
               </a:rPr>
-              <a:t>12</a:t>
+              <a:t>14</a:t>
             </a:r>
             <a:endParaRPr lang="en-US" sz="3000" dirty="0"/>
           </a:p>
@@ -2496,7 +2585,7 @@
                 <a:ea typeface="Cambria" pitchFamily="34" charset="-122"/>
                 <a:cs typeface="Cambria" pitchFamily="34" charset="-120"/>
               </a:rPr>
-              <a:t>28</a:t>
+              <a:t>32</a:t>
             </a:r>
             <a:endParaRPr lang="en-US" sz="3000" dirty="0"/>
           </a:p>
@@ -3123,7 +3212,7 @@
                 <a:ea typeface="Cambria" pitchFamily="34" charset="-122"/>
                 <a:cs typeface="Cambria" pitchFamily="34" charset="-120"/>
               </a:rPr>
-              <a:t>Lo que se puede comprobar hoy</a:t>
+              <a:t>Atender al cliente sin sumar personal</a:t>
             </a:r>
             <a:endParaRPr lang="en-US" sz="3200" dirty="0"/>
           </a:p>
@@ -3162,7 +3251,7 @@
                 <a:ea typeface="Calibri" pitchFamily="34" charset="-122"/>
                 <a:cs typeface="Calibri" pitchFamily="34" charset="-120"/>
               </a:rPr>
-              <a:t>No es una maqueta: es una aplicación que se ejecuta y se prueba</a:t>
+              <a:t>Tres piezas que incorporó el último incremento</a:t>
             </a:r>
             <a:endParaRPr lang="en-US" sz="1400" dirty="0"/>
           </a:p>
@@ -3176,12 +3265,453 @@
         </p:nvSpPr>
         <p:spPr>
           <a:xfrm>
-            <a:off x="640080" y="1682496"/>
-            <a:ext cx="5336896" cy="1828800"/>
+            <a:off x="640080" y="1719072"/>
+            <a:ext cx="3503066" cy="2432304"/>
           </a:xfrm>
           <a:prstGeom prst="roundRect">
             <a:avLst>
-              <a:gd name="adj" fmla="val 2500"/>
+              <a:gd name="adj" fmla="val 1880"/>
+            </a:avLst>
+          </a:prstGeom>
+          <a:solidFill>
+            <a:srgbClr val="EEF5F1"/>
+          </a:solidFill>
+          <a:ln w="12700">
+            <a:solidFill>
+              <a:srgbClr val="D9E5DF"/>
+            </a:solidFill>
+            <a:prstDash val="solid"/>
+          </a:ln>
+        </p:spPr>
+      </p:sp>
+      <p:sp>
+        <p:nvSpPr>
+          <p:cNvPr id="5" name="Text 3"/>
+          <p:cNvSpPr txBox="1"/>
+          <p:nvPr/>
+        </p:nvSpPr>
+        <p:spPr>
+          <a:xfrm>
+            <a:off x="896112" y="1920240"/>
+            <a:ext cx="2991002" cy="274320"/>
+          </a:xfrm>
+          <a:prstGeom prst="rect">
+            <a:avLst/>
+          </a:prstGeom>
+          <a:noFill/>
+          <a:ln/>
+        </p:spPr>
+        <p:txBody>
+          <a:bodyPr wrap="square" lIns="0" tIns="0" rIns="0" bIns="0" rtlCol="0" anchor="ctr"/>
+          <a:lstStyle/>
+          <a:p>
+            <a:pPr indent="0" marL="0">
+              <a:buNone/>
+            </a:pPr>
+            <a:r>
+              <a:rPr lang="en-US" sz="1050" b="1" dirty="0">
+                <a:solidFill>
+                  <a:srgbClr val="2C7A6B"/>
+                </a:solidFill>
+                <a:latin typeface="Calibri" pitchFamily="34" charset="0"/>
+                <a:ea typeface="Calibri" pitchFamily="34" charset="-122"/>
+                <a:cs typeface="Calibri" pitchFamily="34" charset="-120"/>
+              </a:rPr>
+              <a:t>ASISTENTE DEL SITIO</a:t>
+            </a:r>
+            <a:endParaRPr lang="en-US" sz="1050" dirty="0"/>
+          </a:p>
+        </p:txBody>
+      </p:sp>
+      <p:sp>
+        <p:nvSpPr>
+          <p:cNvPr id="6" name="Text 4"/>
+          <p:cNvSpPr txBox="1"/>
+          <p:nvPr/>
+        </p:nvSpPr>
+        <p:spPr>
+          <a:xfrm>
+            <a:off x="896112" y="2212848"/>
+            <a:ext cx="2991002" cy="365760"/>
+          </a:xfrm>
+          <a:prstGeom prst="rect">
+            <a:avLst/>
+          </a:prstGeom>
+          <a:noFill/>
+          <a:ln/>
+        </p:spPr>
+        <p:txBody>
+          <a:bodyPr wrap="square" lIns="0" tIns="0" rIns="0" bIns="0" rtlCol="0" anchor="ctr"/>
+          <a:lstStyle/>
+          <a:p>
+            <a:pPr indent="0" marL="0">
+              <a:buNone/>
+            </a:pPr>
+            <a:r>
+              <a:rPr lang="en-US" sz="1600" b="1" dirty="0">
+                <a:solidFill>
+                  <a:srgbClr val="14524A"/>
+                </a:solidFill>
+                <a:latin typeface="Cambria" pitchFamily="34" charset="0"/>
+                <a:ea typeface="Cambria" pitchFamily="34" charset="-122"/>
+                <a:cs typeface="Cambria" pitchFamily="34" charset="-120"/>
+              </a:rPr>
+              <a:t>Pelusa responde sola</a:t>
+            </a:r>
+            <a:endParaRPr lang="en-US" sz="1600" dirty="0"/>
+          </a:p>
+        </p:txBody>
+      </p:sp>
+      <p:sp>
+        <p:nvSpPr>
+          <p:cNvPr id="7" name="Text 5"/>
+          <p:cNvSpPr txBox="1"/>
+          <p:nvPr/>
+        </p:nvSpPr>
+        <p:spPr>
+          <a:xfrm>
+            <a:off x="896112" y="2651760"/>
+            <a:ext cx="2991002" cy="1298448"/>
+          </a:xfrm>
+          <a:prstGeom prst="rect">
+            <a:avLst/>
+          </a:prstGeom>
+          <a:noFill/>
+          <a:ln/>
+        </p:spPr>
+        <p:txBody>
+          <a:bodyPr wrap="square" lIns="0" tIns="0" rIns="0" bIns="0" rtlCol="0" anchor="t"/>
+          <a:lstStyle/>
+          <a:p>
+            <a:pPr indent="0" marL="0">
+              <a:lnSpc>
+                <a:spcPts val="1740"/>
+              </a:lnSpc>
+              <a:buNone/>
+            </a:pPr>
+            <a:r>
+              <a:rPr lang="en-US" sz="1200" dirty="0">
+                <a:solidFill>
+                  <a:srgbClr val="1C2321"/>
+                </a:solidFill>
+                <a:latin typeface="Calibri" pitchFamily="34" charset="0"/>
+                <a:ea typeface="Calibri" pitchFamily="34" charset="-122"/>
+                <a:cs typeface="Calibri" pitchFamily="34" charset="-120"/>
+              </a:rPr>
+              <a:t>Entiende 14 tipos de pregunta en español y contesta con los datos de la propia cuenta: en qué va el pedido, cuándo llega el despacho, qué vacuna toca. Ocho temas de menú para quien prefiere no escribir.</a:t>
+            </a:r>
+            <a:endParaRPr lang="en-US" sz="1200" dirty="0"/>
+          </a:p>
+        </p:txBody>
+      </p:sp>
+      <p:sp>
+        <p:nvSpPr>
+          <p:cNvPr id="8" name="Shape 6"/>
+          <p:cNvSpPr/>
+          <p:nvPr/>
+        </p:nvSpPr>
+        <p:spPr>
+          <a:xfrm>
+            <a:off x="4344314" y="1719072"/>
+            <a:ext cx="3503066" cy="2432304"/>
+          </a:xfrm>
+          <a:prstGeom prst="roundRect">
+            <a:avLst>
+              <a:gd name="adj" fmla="val 1880"/>
+            </a:avLst>
+          </a:prstGeom>
+          <a:solidFill>
+            <a:srgbClr val="EEF5F1"/>
+          </a:solidFill>
+          <a:ln w="12700">
+            <a:solidFill>
+              <a:srgbClr val="D9E5DF"/>
+            </a:solidFill>
+            <a:prstDash val="solid"/>
+          </a:ln>
+        </p:spPr>
+      </p:sp>
+      <p:sp>
+        <p:nvSpPr>
+          <p:cNvPr id="9" name="Text 7"/>
+          <p:cNvSpPr txBox="1"/>
+          <p:nvPr/>
+        </p:nvSpPr>
+        <p:spPr>
+          <a:xfrm>
+            <a:off x="4600346" y="1920240"/>
+            <a:ext cx="2991002" cy="274320"/>
+          </a:xfrm>
+          <a:prstGeom prst="rect">
+            <a:avLst/>
+          </a:prstGeom>
+          <a:noFill/>
+          <a:ln/>
+        </p:spPr>
+        <p:txBody>
+          <a:bodyPr wrap="square" lIns="0" tIns="0" rIns="0" bIns="0" rtlCol="0" anchor="ctr"/>
+          <a:lstStyle/>
+          <a:p>
+            <a:pPr indent="0" marL="0">
+              <a:buNone/>
+            </a:pPr>
+            <a:r>
+              <a:rPr lang="en-US" sz="1050" b="1" dirty="0">
+                <a:solidFill>
+                  <a:srgbClr val="E8A33D"/>
+                </a:solidFill>
+                <a:latin typeface="Calibri" pitchFamily="34" charset="0"/>
+                <a:ea typeface="Calibri" pitchFamily="34" charset="-122"/>
+                <a:cs typeface="Calibri" pitchFamily="34" charset="-120"/>
+              </a:rPr>
+              <a:t>CORREOS</a:t>
+            </a:r>
+            <a:endParaRPr lang="en-US" sz="1050" dirty="0"/>
+          </a:p>
+        </p:txBody>
+      </p:sp>
+      <p:sp>
+        <p:nvSpPr>
+          <p:cNvPr id="10" name="Text 8"/>
+          <p:cNvSpPr txBox="1"/>
+          <p:nvPr/>
+        </p:nvSpPr>
+        <p:spPr>
+          <a:xfrm>
+            <a:off x="4600346" y="2212848"/>
+            <a:ext cx="2991002" cy="365760"/>
+          </a:xfrm>
+          <a:prstGeom prst="rect">
+            <a:avLst/>
+          </a:prstGeom>
+          <a:noFill/>
+          <a:ln/>
+        </p:spPr>
+        <p:txBody>
+          <a:bodyPr wrap="square" lIns="0" tIns="0" rIns="0" bIns="0" rtlCol="0" anchor="ctr"/>
+          <a:lstStyle/>
+          <a:p>
+            <a:pPr indent="0" marL="0">
+              <a:buNone/>
+            </a:pPr>
+            <a:r>
+              <a:rPr lang="en-US" sz="1600" b="1" dirty="0">
+                <a:solidFill>
+                  <a:srgbClr val="14524A"/>
+                </a:solidFill>
+                <a:latin typeface="Cambria" pitchFamily="34" charset="0"/>
+                <a:ea typeface="Cambria" pitchFamily="34" charset="-122"/>
+                <a:cs typeface="Cambria" pitchFamily="34" charset="-120"/>
+              </a:rPr>
+              <a:t>Ocho avisos automáticos</a:t>
+            </a:r>
+            <a:endParaRPr lang="en-US" sz="1600" dirty="0"/>
+          </a:p>
+        </p:txBody>
+      </p:sp>
+      <p:sp>
+        <p:nvSpPr>
+          <p:cNvPr id="11" name="Text 9"/>
+          <p:cNvSpPr txBox="1"/>
+          <p:nvPr/>
+        </p:nvSpPr>
+        <p:spPr>
+          <a:xfrm>
+            <a:off x="4600346" y="2651760"/>
+            <a:ext cx="2991002" cy="1298448"/>
+          </a:xfrm>
+          <a:prstGeom prst="rect">
+            <a:avLst/>
+          </a:prstGeom>
+          <a:noFill/>
+          <a:ln/>
+        </p:spPr>
+        <p:txBody>
+          <a:bodyPr wrap="square" lIns="0" tIns="0" rIns="0" bIns="0" rtlCol="0" anchor="t"/>
+          <a:lstStyle/>
+          <a:p>
+            <a:pPr indent="0" marL="0">
+              <a:lnSpc>
+                <a:spcPts val="1740"/>
+              </a:lnSpc>
+              <a:buNone/>
+            </a:pPr>
+            <a:r>
+              <a:rPr lang="en-US" sz="1200" dirty="0">
+                <a:solidFill>
+                  <a:srgbClr val="1C2321"/>
+                </a:solidFill>
+                <a:latin typeface="Calibri" pitchFamily="34" charset="0"/>
+                <a:ea typeface="Calibri" pitchFamily="34" charset="-122"/>
+                <a:cs typeface="Calibri" pitchFamily="34" charset="-120"/>
+              </a:rPr>
+              <a:t>Bienvenida, pedido, factura, cita, despacho, cambio de plan, recordatorio de vacuna y mensaje de contacto. El recordatorio sale cada mañana a las 8:00 sin que nadie lo dispare (RN-20).</a:t>
+            </a:r>
+            <a:endParaRPr lang="en-US" sz="1200" dirty="0"/>
+          </a:p>
+        </p:txBody>
+      </p:sp>
+      <p:sp>
+        <p:nvSpPr>
+          <p:cNvPr id="12" name="Shape 10"/>
+          <p:cNvSpPr/>
+          <p:nvPr/>
+        </p:nvSpPr>
+        <p:spPr>
+          <a:xfrm>
+            <a:off x="8048549" y="1719072"/>
+            <a:ext cx="3503066" cy="2432304"/>
+          </a:xfrm>
+          <a:prstGeom prst="roundRect">
+            <a:avLst>
+              <a:gd name="adj" fmla="val 1880"/>
+            </a:avLst>
+          </a:prstGeom>
+          <a:solidFill>
+            <a:srgbClr val="EEF5F1"/>
+          </a:solidFill>
+          <a:ln w="12700">
+            <a:solidFill>
+              <a:srgbClr val="D9E5DF"/>
+            </a:solidFill>
+            <a:prstDash val="solid"/>
+          </a:ln>
+        </p:spPr>
+      </p:sp>
+      <p:sp>
+        <p:nvSpPr>
+          <p:cNvPr id="13" name="Text 11"/>
+          <p:cNvSpPr txBox="1"/>
+          <p:nvPr/>
+        </p:nvSpPr>
+        <p:spPr>
+          <a:xfrm>
+            <a:off x="8304581" y="1920240"/>
+            <a:ext cx="2991002" cy="274320"/>
+          </a:xfrm>
+          <a:prstGeom prst="rect">
+            <a:avLst/>
+          </a:prstGeom>
+          <a:noFill/>
+          <a:ln/>
+        </p:spPr>
+        <p:txBody>
+          <a:bodyPr wrap="square" lIns="0" tIns="0" rIns="0" bIns="0" rtlCol="0" anchor="ctr"/>
+          <a:lstStyle/>
+          <a:p>
+            <a:pPr indent="0" marL="0">
+              <a:buNone/>
+            </a:pPr>
+            <a:r>
+              <a:rPr lang="en-US" sz="1050" b="1" dirty="0">
+                <a:solidFill>
+                  <a:srgbClr val="E8A33D"/>
+                </a:solidFill>
+                <a:latin typeface="Calibri" pitchFamily="34" charset="0"/>
+                <a:ea typeface="Calibri" pitchFamily="34" charset="-122"/>
+                <a:cs typeface="Calibri" pitchFamily="34" charset="-120"/>
+              </a:rPr>
+              <a:t>ACCESIBILIDAD</a:t>
+            </a:r>
+            <a:endParaRPr lang="en-US" sz="1050" dirty="0"/>
+          </a:p>
+        </p:txBody>
+      </p:sp>
+      <p:sp>
+        <p:nvSpPr>
+          <p:cNvPr id="14" name="Text 12"/>
+          <p:cNvSpPr txBox="1"/>
+          <p:nvPr/>
+        </p:nvSpPr>
+        <p:spPr>
+          <a:xfrm>
+            <a:off x="8304581" y="2212848"/>
+            <a:ext cx="2991002" cy="365760"/>
+          </a:xfrm>
+          <a:prstGeom prst="rect">
+            <a:avLst/>
+          </a:prstGeom>
+          <a:noFill/>
+          <a:ln/>
+        </p:spPr>
+        <p:txBody>
+          <a:bodyPr wrap="square" lIns="0" tIns="0" rIns="0" bIns="0" rtlCol="0" anchor="ctr"/>
+          <a:lstStyle/>
+          <a:p>
+            <a:pPr indent="0" marL="0">
+              <a:buNone/>
+            </a:pPr>
+            <a:r>
+              <a:rPr lang="en-US" sz="1600" b="1" dirty="0">
+                <a:solidFill>
+                  <a:srgbClr val="14524A"/>
+                </a:solidFill>
+                <a:latin typeface="Cambria" pitchFamily="34" charset="0"/>
+                <a:ea typeface="Cambria" pitchFamily="34" charset="-122"/>
+                <a:cs typeface="Cambria" pitchFamily="34" charset="-120"/>
+              </a:rPr>
+              <a:t>Usable en el celular</a:t>
+            </a:r>
+            <a:endParaRPr lang="en-US" sz="1600" dirty="0"/>
+          </a:p>
+        </p:txBody>
+      </p:sp>
+      <p:sp>
+        <p:nvSpPr>
+          <p:cNvPr id="15" name="Text 13"/>
+          <p:cNvSpPr txBox="1"/>
+          <p:nvPr/>
+        </p:nvSpPr>
+        <p:spPr>
+          <a:xfrm>
+            <a:off x="8304581" y="2651760"/>
+            <a:ext cx="2991002" cy="1298448"/>
+          </a:xfrm>
+          <a:prstGeom prst="rect">
+            <a:avLst/>
+          </a:prstGeom>
+          <a:noFill/>
+          <a:ln/>
+        </p:spPr>
+        <p:txBody>
+          <a:bodyPr wrap="square" lIns="0" tIns="0" rIns="0" bIns="0" rtlCol="0" anchor="t"/>
+          <a:lstStyle/>
+          <a:p>
+            <a:pPr indent="0" marL="0">
+              <a:lnSpc>
+                <a:spcPts val="1740"/>
+              </a:lnSpc>
+              <a:buNone/>
+            </a:pPr>
+            <a:r>
+              <a:rPr lang="en-US" sz="1200" dirty="0">
+                <a:solidFill>
+                  <a:srgbClr val="1C2321"/>
+                </a:solidFill>
+                <a:latin typeface="Calibri" pitchFamily="34" charset="0"/>
+                <a:ea typeface="Calibri" pitchFamily="34" charset="-122"/>
+                <a:cs typeface="Calibri" pitchFamily="34" charset="-120"/>
+              </a:rPr>
+              <a:t>Las tablas se reordenan en tarjetas en pantalla chica y cada dato conserva su etiqueta para el lector de pantalla. El chat anuncia su estado con atributos ARIA (RNF-01 y RNF-06).</a:t>
+            </a:r>
+            <a:endParaRPr lang="en-US" sz="1200" dirty="0"/>
+          </a:p>
+        </p:txBody>
+      </p:sp>
+      <p:sp>
+        <p:nvSpPr>
+          <p:cNvPr id="16" name="Shape 14"/>
+          <p:cNvSpPr/>
+          <p:nvPr/>
+        </p:nvSpPr>
+        <p:spPr>
+          <a:xfrm>
+            <a:off x="640080" y="4480560"/>
+            <a:ext cx="10911535" cy="1188720"/>
+          </a:xfrm>
+          <a:prstGeom prst="roundRect">
+            <a:avLst>
+              <a:gd name="adj" fmla="val 3846"/>
             </a:avLst>
           </a:prstGeom>
           <a:solidFill>
@@ -3197,353 +3727,60 @@
       </p:sp>
       <p:sp>
         <p:nvSpPr>
-          <p:cNvPr id="5" name="Text 3"/>
-          <p:cNvSpPr txBox="1"/>
-          <p:nvPr/>
-        </p:nvSpPr>
-        <p:spPr>
-          <a:xfrm>
-            <a:off x="914400" y="1792224"/>
-            <a:ext cx="1828800" cy="877824"/>
-          </a:xfrm>
-          <a:prstGeom prst="rect">
-            <a:avLst/>
-          </a:prstGeom>
-          <a:noFill/>
-          <a:ln/>
-        </p:spPr>
-        <p:txBody>
-          <a:bodyPr wrap="square" lIns="0" tIns="0" rIns="0" bIns="0" rtlCol="0" anchor="ctr"/>
-          <a:lstStyle/>
-          <a:p>
-            <a:pPr indent="0" marL="0">
-              <a:buNone/>
-            </a:pPr>
-            <a:r>
-              <a:rPr lang="en-US" sz="5200" b="1" dirty="0">
+          <p:cNvPr id="17" name="Text 15"/>
+          <p:cNvSpPr txBox="1"/>
+          <p:nvPr/>
+        </p:nvSpPr>
+        <p:spPr>
+          <a:xfrm>
+            <a:off x="950976" y="4480560"/>
+            <a:ext cx="10289743" cy="1188720"/>
+          </a:xfrm>
+          <a:prstGeom prst="rect">
+            <a:avLst/>
+          </a:prstGeom>
+          <a:noFill/>
+          <a:ln/>
+        </p:spPr>
+        <p:txBody>
+          <a:bodyPr wrap="square" lIns="0" tIns="0" rIns="0" bIns="0" rtlCol="0" anchor="ctr"/>
+          <a:lstStyle/>
+          <a:p>
+            <a:pPr indent="0" marL="0">
+              <a:lnSpc>
+                <a:spcPts val="1700"/>
+              </a:lnSpc>
+              <a:buNone/>
+            </a:pPr>
+            <a:r>
+              <a:rPr lang="en-US" sz="1200" b="1" dirty="0">
                 <a:solidFill>
                   <a:srgbClr val="E8A33D"/>
                 </a:solidFill>
-                <a:latin typeface="Cambria" pitchFamily="34" charset="0"/>
-                <a:ea typeface="Cambria" pitchFamily="34" charset="-122"/>
-                <a:cs typeface="Cambria" pitchFamily="34" charset="-120"/>
-              </a:rPr>
-              <a:t>133</a:t>
-            </a:r>
-            <a:endParaRPr lang="en-US" sz="5200" dirty="0"/>
-          </a:p>
-        </p:txBody>
-      </p:sp>
-      <p:sp>
-        <p:nvSpPr>
-          <p:cNvPr id="6" name="Text 4"/>
-          <p:cNvSpPr txBox="1"/>
-          <p:nvPr/>
-        </p:nvSpPr>
-        <p:spPr>
-          <a:xfrm>
-            <a:off x="2743200" y="1792224"/>
-            <a:ext cx="2959456" cy="877824"/>
-          </a:xfrm>
-          <a:prstGeom prst="rect">
-            <a:avLst/>
-          </a:prstGeom>
-          <a:noFill/>
-          <a:ln/>
-        </p:spPr>
-        <p:txBody>
-          <a:bodyPr wrap="square" lIns="0" tIns="0" rIns="0" bIns="0" rtlCol="0" anchor="ctr"/>
-          <a:lstStyle/>
-          <a:p>
-            <a:pPr indent="0" marL="0">
-              <a:buNone/>
-            </a:pPr>
-            <a:r>
-              <a:rPr lang="en-US" sz="1500" b="1" dirty="0">
+                <a:latin typeface="Calibri" pitchFamily="34" charset="0"/>
+                <a:ea typeface="Calibri" pitchFamily="34" charset="-122"/>
+                <a:cs typeface="Calibri" pitchFamily="34" charset="-120"/>
+              </a:rPr>
+              <a:t xml:space="preserve">El asistente no es una caja negra.  </a:t>
+            </a:r>
+            <a:pPr indent="0" marL="0">
+              <a:lnSpc>
+                <a:spcPts val="1700"/>
+              </a:lnSpc>
+              <a:buNone/>
+            </a:pPr>
+            <a:r>
+              <a:rPr lang="en-US" sz="1200" dirty="0">
                 <a:solidFill>
                   <a:srgbClr val="FFFFFF"/>
                 </a:solidFill>
-                <a:latin typeface="Cambria" pitchFamily="34" charset="0"/>
-                <a:ea typeface="Cambria" pitchFamily="34" charset="-122"/>
-                <a:cs typeface="Cambria" pitchFamily="34" charset="-120"/>
-              </a:rPr>
-              <a:t>pruebas automatizadas</a:t>
-            </a:r>
-            <a:endParaRPr lang="en-US" sz="1500" dirty="0"/>
-          </a:p>
-        </p:txBody>
-      </p:sp>
-      <p:sp>
-        <p:nvSpPr>
-          <p:cNvPr id="7" name="Text 5"/>
-          <p:cNvSpPr txBox="1"/>
-          <p:nvPr/>
-        </p:nvSpPr>
-        <p:spPr>
-          <a:xfrm>
-            <a:off x="914400" y="2706624"/>
-            <a:ext cx="4788256" cy="676656"/>
-          </a:xfrm>
-          <a:prstGeom prst="rect">
-            <a:avLst/>
-          </a:prstGeom>
-          <a:noFill/>
-          <a:ln/>
-        </p:spPr>
-        <p:txBody>
-          <a:bodyPr wrap="square" lIns="0" tIns="0" rIns="0" bIns="0" rtlCol="0" anchor="t"/>
-          <a:lstStyle/>
-          <a:p>
-            <a:pPr indent="0" marL="0">
-              <a:lnSpc>
-                <a:spcPts val="1600"/>
-              </a:lnSpc>
-              <a:buNone/>
-            </a:pPr>
-            <a:r>
-              <a:rPr lang="en-US" sz="1150" dirty="0">
-                <a:solidFill>
-                  <a:srgbClr val="CFE3DC"/>
-                </a:solidFill>
-                <a:latin typeface="Calibri" pitchFamily="34" charset="0"/>
-                <a:ea typeface="Calibri" pitchFamily="34" charset="-122"/>
-                <a:cs typeface="Calibri" pitchFamily="34" charset="-120"/>
-              </a:rPr>
-              <a:t>336 aserciones, ejecutadas contra base de datos real y no contra una simulación. Al menos una prueba por cada una de las 22 reglas de negocio.</a:t>
-            </a:r>
-            <a:endParaRPr lang="en-US" sz="1150" dirty="0"/>
-          </a:p>
-        </p:txBody>
-      </p:sp>
-      <p:sp>
-        <p:nvSpPr>
-          <p:cNvPr id="8" name="Shape 6"/>
-          <p:cNvSpPr/>
-          <p:nvPr/>
-        </p:nvSpPr>
-        <p:spPr>
-          <a:xfrm>
-            <a:off x="6214720" y="1682496"/>
-            <a:ext cx="5336896" cy="1828800"/>
-          </a:xfrm>
-          <a:prstGeom prst="roundRect">
-            <a:avLst>
-              <a:gd name="adj" fmla="val 2500"/>
-            </a:avLst>
-          </a:prstGeom>
-          <a:solidFill>
-            <a:srgbClr val="EEF5F1"/>
-          </a:solidFill>
-          <a:ln w="12700">
-            <a:solidFill>
-              <a:srgbClr val="D9E5DF"/>
-            </a:solidFill>
-            <a:prstDash val="solid"/>
-          </a:ln>
-        </p:spPr>
-      </p:sp>
-      <p:sp>
-        <p:nvSpPr>
-          <p:cNvPr id="9" name="Text 7"/>
-          <p:cNvSpPr txBox="1"/>
-          <p:nvPr/>
-        </p:nvSpPr>
-        <p:spPr>
-          <a:xfrm>
-            <a:off x="6470752" y="1883664"/>
-            <a:ext cx="4824832" cy="274320"/>
-          </a:xfrm>
-          <a:prstGeom prst="rect">
-            <a:avLst/>
-          </a:prstGeom>
-          <a:noFill/>
-          <a:ln/>
-        </p:spPr>
-        <p:txBody>
-          <a:bodyPr wrap="square" lIns="0" tIns="0" rIns="0" bIns="0" rtlCol="0" anchor="ctr"/>
-          <a:lstStyle/>
-          <a:p>
-            <a:pPr indent="0" marL="0">
-              <a:buNone/>
-            </a:pPr>
-            <a:r>
-              <a:rPr lang="en-US" sz="1050" b="1" dirty="0">
-                <a:solidFill>
-                  <a:srgbClr val="E8A33D"/>
-                </a:solidFill>
-                <a:latin typeface="Calibri" pitchFamily="34" charset="0"/>
-                <a:ea typeface="Calibri" pitchFamily="34" charset="-122"/>
-                <a:cs typeface="Calibri" pitchFamily="34" charset="-120"/>
-              </a:rPr>
-              <a:t>POR QUÉ IMPORTA</a:t>
-            </a:r>
-            <a:endParaRPr lang="en-US" sz="1050" dirty="0"/>
-          </a:p>
-        </p:txBody>
-      </p:sp>
-      <p:sp>
-        <p:nvSpPr>
-          <p:cNvPr id="10" name="Text 8"/>
-          <p:cNvSpPr txBox="1"/>
-          <p:nvPr/>
-        </p:nvSpPr>
-        <p:spPr>
-          <a:xfrm>
-            <a:off x="6470752" y="2176272"/>
-            <a:ext cx="4824832" cy="365760"/>
-          </a:xfrm>
-          <a:prstGeom prst="rect">
-            <a:avLst/>
-          </a:prstGeom>
-          <a:noFill/>
-          <a:ln/>
-        </p:spPr>
-        <p:txBody>
-          <a:bodyPr wrap="square" lIns="0" tIns="0" rIns="0" bIns="0" rtlCol="0" anchor="ctr"/>
-          <a:lstStyle/>
-          <a:p>
-            <a:pPr indent="0" marL="0">
-              <a:buNone/>
-            </a:pPr>
-            <a:r>
-              <a:rPr lang="en-US" sz="1600" b="1" dirty="0">
-                <a:solidFill>
-                  <a:srgbClr val="14524A"/>
-                </a:solidFill>
-                <a:latin typeface="Cambria" pitchFamily="34" charset="0"/>
-                <a:ea typeface="Cambria" pitchFamily="34" charset="-122"/>
-                <a:cs typeface="Cambria" pitchFamily="34" charset="-120"/>
-              </a:rPr>
-              <a:t>La regla se vuelve a comprobar sola</a:t>
-            </a:r>
-            <a:endParaRPr lang="en-US" sz="1600" dirty="0"/>
-          </a:p>
-        </p:txBody>
-      </p:sp>
-      <p:sp>
-        <p:nvSpPr>
-          <p:cNvPr id="11" name="Text 9"/>
-          <p:cNvSpPr txBox="1"/>
-          <p:nvPr/>
-        </p:nvSpPr>
-        <p:spPr>
-          <a:xfrm>
-            <a:off x="6470752" y="2615184"/>
-            <a:ext cx="4824832" cy="694944"/>
-          </a:xfrm>
-          <a:prstGeom prst="rect">
-            <a:avLst/>
-          </a:prstGeom>
-          <a:noFill/>
-          <a:ln/>
-        </p:spPr>
-        <p:txBody>
-          <a:bodyPr wrap="square" lIns="0" tIns="0" rIns="0" bIns="0" rtlCol="0" anchor="t"/>
-          <a:lstStyle/>
-          <a:p>
-            <a:pPr indent="0" marL="0">
-              <a:lnSpc>
-                <a:spcPts val="1740"/>
-              </a:lnSpc>
-              <a:buNone/>
-            </a:pPr>
-            <a:r>
-              <a:rPr lang="en-US" sz="1200" dirty="0">
-                <a:solidFill>
-                  <a:srgbClr val="1C2321"/>
-                </a:solidFill>
-                <a:latin typeface="Calibri" pitchFamily="34" charset="0"/>
-                <a:ea typeface="Calibri" pitchFamily="34" charset="-122"/>
-                <a:cs typeface="Calibri" pitchFamily="34" charset="-120"/>
-              </a:rPr>
-              <a:t>Antes de cada entrega se ejecuta la suite completa. Si un cambio rompe una regla del negocio, se sabe en el momento y no en el reclamo del cliente.</a:t>
+                <a:latin typeface="Calibri" pitchFamily="34" charset="0"/>
+                <a:ea typeface="Calibri" pitchFamily="34" charset="-122"/>
+                <a:cs typeface="Calibri" pitchFamily="34" charset="-120"/>
+              </a:rPr>
+              <a:t>No usa inteligencia artificial externa ni servicios pagados: clasifica la pregunta con palabras clave y responde desde un único archivo de configuración. Y solo consulta los datos del cliente que está conectado, nunca los de otro (RN-01 y RN-04).</a:t>
             </a:r>
             <a:endParaRPr lang="en-US" sz="1200" dirty="0"/>
-          </a:p>
-        </p:txBody>
-      </p:sp>
-      <p:pic>
-        <p:nvPicPr>
-          <p:cNvPr id="12" name="Image 0" descr="/home/user/VetPetSurco/docs/capturas-reglas/05-carrito-bloqueado.png">    </p:cNvPr>
-          <p:cNvPicPr>
-            <a:picLocks noChangeAspect="1"/>
-          </p:cNvPicPr>
-          <p:nvPr/>
-        </p:nvPicPr>
-        <p:blipFill>
-          <a:blip r:embed="rId1"/>
-          <a:srcRect l="0" r="0" t="0" b="0"/>
-          <a:stretch/>
-        </p:blipFill>
-        <p:spPr>
-          <a:xfrm>
-            <a:off x="640080" y="3694176"/>
-            <a:ext cx="5336896" cy="2048256"/>
-          </a:xfrm>
-          <a:prstGeom prst="rect">
-            <a:avLst/>
-          </a:prstGeom>
-        </p:spPr>
-      </p:pic>
-      <p:pic>
-        <p:nvPicPr>
-          <p:cNvPr id="13" name="Image 1" descr="/home/user/VetPetSurco/docs/capturas-reglas/09-inventario.png">    </p:cNvPr>
-          <p:cNvPicPr>
-            <a:picLocks noChangeAspect="1"/>
-          </p:cNvPicPr>
-          <p:nvPr/>
-        </p:nvPicPr>
-        <p:blipFill>
-          <a:blip r:embed="rId2"/>
-          <a:srcRect l="0" r="0" t="0" b="0"/>
-          <a:stretch/>
-        </p:blipFill>
-        <p:spPr>
-          <a:xfrm>
-            <a:off x="6214720" y="3694176"/>
-            <a:ext cx="5336896" cy="2048256"/>
-          </a:xfrm>
-          <a:prstGeom prst="rect">
-            <a:avLst/>
-          </a:prstGeom>
-        </p:spPr>
-      </p:pic>
-      <p:sp>
-        <p:nvSpPr>
-          <p:cNvPr id="14" name="Text 10"/>
-          <p:cNvSpPr txBox="1"/>
-          <p:nvPr/>
-        </p:nvSpPr>
-        <p:spPr>
-          <a:xfrm>
-            <a:off x="640080" y="6327648"/>
-            <a:ext cx="10911535" cy="292608"/>
-          </a:xfrm>
-          <a:prstGeom prst="rect">
-            <a:avLst/>
-          </a:prstGeom>
-          <a:noFill/>
-          <a:ln/>
-        </p:spPr>
-        <p:txBody>
-          <a:bodyPr wrap="square" lIns="0" tIns="0" rIns="0" bIns="0" rtlCol="0" anchor="ctr"/>
-          <a:lstStyle/>
-          <a:p>
-            <a:pPr indent="0" marL="0">
-              <a:buNone/>
-            </a:pPr>
-            <a:r>
-              <a:rPr lang="en-US" sz="1000" i="1" dirty="0">
-                <a:solidFill>
-                  <a:srgbClr val="5D6B66"/>
-                </a:solidFill>
-                <a:latin typeface="Calibri" pitchFamily="34" charset="0"/>
-                <a:ea typeface="Calibri" pitchFamily="34" charset="-122"/>
-                <a:cs typeface="Calibri" pitchFamily="34" charset="-120"/>
-              </a:rPr>
-              <a:t>Capturas del sistema con la regla señalada sobre el control que la aplica: a la izquierda RN-12 bloqueando la compra sin stock, a la derecha el semáforo de reposición (RN-08).</a:t>
-            </a:r>
-            <a:endParaRPr lang="en-US" sz="1000" dirty="0"/>
           </a:p>
         </p:txBody>
       </p:sp>
@@ -3605,7 +3842,7 @@
                 <a:ea typeface="Cambria" pitchFamily="34" charset="-122"/>
                 <a:cs typeface="Cambria" pitchFamily="34" charset="-120"/>
               </a:rPr>
-              <a:t>Estado del proyecto y lo que sigue</a:t>
+              <a:t>Lo que se puede comprobar hoy</a:t>
             </a:r>
             <a:endParaRPr lang="en-US" sz="3200" dirty="0"/>
           </a:p>
@@ -3644,7 +3881,7 @@
                 <a:ea typeface="Calibri" pitchFamily="34" charset="-122"/>
                 <a:cs typeface="Calibri" pitchFamily="34" charset="-120"/>
               </a:rPr>
-              <a:t>Dónde estamos parados al cerrar este avance</a:t>
+              <a:t>No es una maqueta: es una aplicación que se ejecuta y se prueba</a:t>
             </a:r>
             <a:endParaRPr lang="en-US" sz="1400" dirty="0"/>
           </a:p>
@@ -3658,12 +3895,159 @@
         </p:nvSpPr>
         <p:spPr>
           <a:xfrm>
-            <a:off x="640080" y="1719072"/>
-            <a:ext cx="3503066" cy="2432304"/>
+            <a:off x="640080" y="1682496"/>
+            <a:ext cx="5336896" cy="1828800"/>
           </a:xfrm>
           <a:prstGeom prst="roundRect">
             <a:avLst>
-              <a:gd name="adj" fmla="val 1880"/>
+              <a:gd name="adj" fmla="val 2500"/>
+            </a:avLst>
+          </a:prstGeom>
+          <a:solidFill>
+            <a:srgbClr val="14524A"/>
+          </a:solidFill>
+          <a:ln w="12700">
+            <a:solidFill>
+              <a:srgbClr val="14524A"/>
+            </a:solidFill>
+            <a:prstDash val="solid"/>
+          </a:ln>
+        </p:spPr>
+      </p:sp>
+      <p:sp>
+        <p:nvSpPr>
+          <p:cNvPr id="5" name="Text 3"/>
+          <p:cNvSpPr txBox="1"/>
+          <p:nvPr/>
+        </p:nvSpPr>
+        <p:spPr>
+          <a:xfrm>
+            <a:off x="914400" y="1792224"/>
+            <a:ext cx="1828800" cy="877824"/>
+          </a:xfrm>
+          <a:prstGeom prst="rect">
+            <a:avLst/>
+          </a:prstGeom>
+          <a:noFill/>
+          <a:ln/>
+        </p:spPr>
+        <p:txBody>
+          <a:bodyPr wrap="square" lIns="0" tIns="0" rIns="0" bIns="0" rtlCol="0" anchor="ctr"/>
+          <a:lstStyle/>
+          <a:p>
+            <a:pPr indent="0" marL="0">
+              <a:buNone/>
+            </a:pPr>
+            <a:r>
+              <a:rPr lang="en-US" sz="5200" b="1" dirty="0">
+                <a:solidFill>
+                  <a:srgbClr val="E8A33D"/>
+                </a:solidFill>
+                <a:latin typeface="Cambria" pitchFamily="34" charset="0"/>
+                <a:ea typeface="Cambria" pitchFamily="34" charset="-122"/>
+                <a:cs typeface="Cambria" pitchFamily="34" charset="-120"/>
+              </a:rPr>
+              <a:t>137</a:t>
+            </a:r>
+            <a:endParaRPr lang="en-US" sz="5200" dirty="0"/>
+          </a:p>
+        </p:txBody>
+      </p:sp>
+      <p:sp>
+        <p:nvSpPr>
+          <p:cNvPr id="6" name="Text 4"/>
+          <p:cNvSpPr txBox="1"/>
+          <p:nvPr/>
+        </p:nvSpPr>
+        <p:spPr>
+          <a:xfrm>
+            <a:off x="2743200" y="1792224"/>
+            <a:ext cx="2959456" cy="877824"/>
+          </a:xfrm>
+          <a:prstGeom prst="rect">
+            <a:avLst/>
+          </a:prstGeom>
+          <a:noFill/>
+          <a:ln/>
+        </p:spPr>
+        <p:txBody>
+          <a:bodyPr wrap="square" lIns="0" tIns="0" rIns="0" bIns="0" rtlCol="0" anchor="ctr"/>
+          <a:lstStyle/>
+          <a:p>
+            <a:pPr indent="0" marL="0">
+              <a:buNone/>
+            </a:pPr>
+            <a:r>
+              <a:rPr lang="en-US" sz="1500" b="1" dirty="0">
+                <a:solidFill>
+                  <a:srgbClr val="FFFFFF"/>
+                </a:solidFill>
+                <a:latin typeface="Cambria" pitchFamily="34" charset="0"/>
+                <a:ea typeface="Cambria" pitchFamily="34" charset="-122"/>
+                <a:cs typeface="Cambria" pitchFamily="34" charset="-120"/>
+              </a:rPr>
+              <a:t>pruebas automatizadas</a:t>
+            </a:r>
+            <a:endParaRPr lang="en-US" sz="1500" dirty="0"/>
+          </a:p>
+        </p:txBody>
+      </p:sp>
+      <p:sp>
+        <p:nvSpPr>
+          <p:cNvPr id="7" name="Text 5"/>
+          <p:cNvSpPr txBox="1"/>
+          <p:nvPr/>
+        </p:nvSpPr>
+        <p:spPr>
+          <a:xfrm>
+            <a:off x="914400" y="2706624"/>
+            <a:ext cx="4788256" cy="676656"/>
+          </a:xfrm>
+          <a:prstGeom prst="rect">
+            <a:avLst/>
+          </a:prstGeom>
+          <a:noFill/>
+          <a:ln/>
+        </p:spPr>
+        <p:txBody>
+          <a:bodyPr wrap="square" lIns="0" tIns="0" rIns="0" bIns="0" rtlCol="0" anchor="t"/>
+          <a:lstStyle/>
+          <a:p>
+            <a:pPr indent="0" marL="0">
+              <a:lnSpc>
+                <a:spcPts val="1600"/>
+              </a:lnSpc>
+              <a:buNone/>
+            </a:pPr>
+            <a:r>
+              <a:rPr lang="en-US" sz="1150" dirty="0">
+                <a:solidFill>
+                  <a:srgbClr val="CFE3DC"/>
+                </a:solidFill>
+                <a:latin typeface="Calibri" pitchFamily="34" charset="0"/>
+                <a:ea typeface="Calibri" pitchFamily="34" charset="-122"/>
+                <a:cs typeface="Calibri" pitchFamily="34" charset="-120"/>
+              </a:rPr>
+              <a:t>346 aserciones, ejecutadas contra base de datos real y no contra una simulación. Al menos una prueba por cada una de las 22 reglas de negocio.</a:t>
+            </a:r>
+            <a:endParaRPr lang="en-US" sz="1150" dirty="0"/>
+          </a:p>
+        </p:txBody>
+      </p:sp>
+      <p:sp>
+        <p:nvSpPr>
+          <p:cNvPr id="8" name="Shape 6"/>
+          <p:cNvSpPr/>
+          <p:nvPr/>
+        </p:nvSpPr>
+        <p:spPr>
+          <a:xfrm>
+            <a:off x="6214720" y="1682496"/>
+            <a:ext cx="5336896" cy="1828800"/>
+          </a:xfrm>
+          <a:prstGeom prst="roundRect">
+            <a:avLst>
+              <a:gd name="adj" fmla="val 2500"/>
             </a:avLst>
           </a:prstGeom>
           <a:solidFill>
@@ -3679,14 +4063,14 @@
       </p:sp>
       <p:sp>
         <p:nvSpPr>
-          <p:cNvPr id="5" name="Text 3"/>
-          <p:cNvSpPr txBox="1"/>
-          <p:nvPr/>
-        </p:nvSpPr>
-        <p:spPr>
-          <a:xfrm>
-            <a:off x="896112" y="1920240"/>
-            <a:ext cx="2991002" cy="274320"/>
+          <p:cNvPr id="9" name="Text 7"/>
+          <p:cNvSpPr txBox="1"/>
+          <p:nvPr/>
+        </p:nvSpPr>
+        <p:spPr>
+          <a:xfrm>
+            <a:off x="6470752" y="1883664"/>
+            <a:ext cx="4824832" cy="274320"/>
           </a:xfrm>
           <a:prstGeom prst="rect">
             <a:avLst/>
@@ -3704,13 +4088,13 @@
             <a:r>
               <a:rPr lang="en-US" sz="1050" b="1" dirty="0">
                 <a:solidFill>
-                  <a:srgbClr val="2C7A6B"/>
-                </a:solidFill>
-                <a:latin typeface="Calibri" pitchFamily="34" charset="0"/>
-                <a:ea typeface="Calibri" pitchFamily="34" charset="-122"/>
-                <a:cs typeface="Calibri" pitchFamily="34" charset="-120"/>
-              </a:rPr>
-              <a:t>TERMINADO</a:t>
+                  <a:srgbClr val="E8A33D"/>
+                </a:solidFill>
+                <a:latin typeface="Calibri" pitchFamily="34" charset="0"/>
+                <a:ea typeface="Calibri" pitchFamily="34" charset="-122"/>
+                <a:cs typeface="Calibri" pitchFamily="34" charset="-120"/>
+              </a:rPr>
+              <a:t>POR QUÉ IMPORTA</a:t>
             </a:r>
             <a:endParaRPr lang="en-US" sz="1050" dirty="0"/>
           </a:p>
@@ -3718,14 +4102,14 @@
       </p:sp>
       <p:sp>
         <p:nvSpPr>
-          <p:cNvPr id="6" name="Text 4"/>
-          <p:cNvSpPr txBox="1"/>
-          <p:nvPr/>
-        </p:nvSpPr>
-        <p:spPr>
-          <a:xfrm>
-            <a:off x="896112" y="2212848"/>
-            <a:ext cx="2991002" cy="365760"/>
+          <p:cNvPr id="10" name="Text 8"/>
+          <p:cNvSpPr txBox="1"/>
+          <p:nvPr/>
+        </p:nvSpPr>
+        <p:spPr>
+          <a:xfrm>
+            <a:off x="6470752" y="2176272"/>
+            <a:ext cx="4824832" cy="365760"/>
           </a:xfrm>
           <a:prstGeom prst="rect">
             <a:avLst/>
@@ -3749,7 +4133,7 @@
                 <a:ea typeface="Cambria" pitchFamily="34" charset="-122"/>
                 <a:cs typeface="Cambria" pitchFamily="34" charset="-120"/>
               </a:rPr>
-              <a:t>El núcleo funciona</a:t>
+              <a:t>La regla se vuelve a comprobar sola</a:t>
             </a:r>
             <a:endParaRPr lang="en-US" sz="1600" dirty="0"/>
           </a:p>
@@ -3757,14 +4141,14 @@
       </p:sp>
       <p:sp>
         <p:nvSpPr>
-          <p:cNvPr id="7" name="Text 5"/>
-          <p:cNvSpPr txBox="1"/>
-          <p:nvPr/>
-        </p:nvSpPr>
-        <p:spPr>
-          <a:xfrm>
-            <a:off x="896112" y="2651760"/>
-            <a:ext cx="2991002" cy="1298448"/>
+          <p:cNvPr id="11" name="Text 9"/>
+          <p:cNvSpPr txBox="1"/>
+          <p:nvPr/>
+        </p:nvSpPr>
+        <p:spPr>
+          <a:xfrm>
+            <a:off x="6470752" y="2615184"/>
+            <a:ext cx="4824832" cy="694944"/>
           </a:xfrm>
           <a:prstGeom prst="rect">
             <a:avLst/>
@@ -3791,7 +4175,342 @@
                 <a:ea typeface="Calibri" pitchFamily="34" charset="-122"/>
                 <a:cs typeface="Calibri" pitchFamily="34" charset="-120"/>
               </a:rPr>
-              <a:t>Los tres perfiles, la venta con descuento de inventario, el cobro en línea, la suscripción con despacho automático, la agenda sin cruce y la historia clínica con alertas.</a:t>
+              <a:t>Antes de cada entrega se ejecuta la suite completa. Si un cambio rompe una regla del negocio, se sabe en el momento y no en el reclamo del cliente.</a:t>
+            </a:r>
+            <a:endParaRPr lang="en-US" sz="1200" dirty="0"/>
+          </a:p>
+        </p:txBody>
+      </p:sp>
+      <p:pic>
+        <p:nvPicPr>
+          <p:cNvPr id="12" name="Image 0" descr="/home/user/VetPetSurco/docs/capturas-reglas/05-carrito-bloqueado.png">    </p:cNvPr>
+          <p:cNvPicPr>
+            <a:picLocks noChangeAspect="1"/>
+          </p:cNvPicPr>
+          <p:nvPr/>
+        </p:nvPicPr>
+        <p:blipFill>
+          <a:blip r:embed="rId1"/>
+          <a:srcRect l="0" r="0" t="0" b="0"/>
+          <a:stretch/>
+        </p:blipFill>
+        <p:spPr>
+          <a:xfrm>
+            <a:off x="640080" y="3694176"/>
+            <a:ext cx="5336896" cy="2048256"/>
+          </a:xfrm>
+          <a:prstGeom prst="rect">
+            <a:avLst/>
+          </a:prstGeom>
+        </p:spPr>
+      </p:pic>
+      <p:pic>
+        <p:nvPicPr>
+          <p:cNvPr id="13" name="Image 1" descr="/home/user/VetPetSurco/docs/capturas-reglas/09-inventario.png">    </p:cNvPr>
+          <p:cNvPicPr>
+            <a:picLocks noChangeAspect="1"/>
+          </p:cNvPicPr>
+          <p:nvPr/>
+        </p:nvPicPr>
+        <p:blipFill>
+          <a:blip r:embed="rId2"/>
+          <a:srcRect l="0" r="0" t="0" b="0"/>
+          <a:stretch/>
+        </p:blipFill>
+        <p:spPr>
+          <a:xfrm>
+            <a:off x="6214720" y="3694176"/>
+            <a:ext cx="5336896" cy="2048256"/>
+          </a:xfrm>
+          <a:prstGeom prst="rect">
+            <a:avLst/>
+          </a:prstGeom>
+        </p:spPr>
+      </p:pic>
+      <p:sp>
+        <p:nvSpPr>
+          <p:cNvPr id="14" name="Text 10"/>
+          <p:cNvSpPr txBox="1"/>
+          <p:nvPr/>
+        </p:nvSpPr>
+        <p:spPr>
+          <a:xfrm>
+            <a:off x="640080" y="6327648"/>
+            <a:ext cx="10911535" cy="292608"/>
+          </a:xfrm>
+          <a:prstGeom prst="rect">
+            <a:avLst/>
+          </a:prstGeom>
+          <a:noFill/>
+          <a:ln/>
+        </p:spPr>
+        <p:txBody>
+          <a:bodyPr wrap="square" lIns="0" tIns="0" rIns="0" bIns="0" rtlCol="0" anchor="ctr"/>
+          <a:lstStyle/>
+          <a:p>
+            <a:pPr indent="0" marL="0">
+              <a:buNone/>
+            </a:pPr>
+            <a:r>
+              <a:rPr lang="en-US" sz="1000" i="1" dirty="0">
+                <a:solidFill>
+                  <a:srgbClr val="5D6B66"/>
+                </a:solidFill>
+                <a:latin typeface="Calibri" pitchFamily="34" charset="0"/>
+                <a:ea typeface="Calibri" pitchFamily="34" charset="-122"/>
+                <a:cs typeface="Calibri" pitchFamily="34" charset="-120"/>
+              </a:rPr>
+              <a:t>Capturas del sistema con la regla señalada sobre el control que la aplica: a la izquierda RN-12 bloqueando la compra sin stock, a la derecha el semáforo de reposición (RN-08).</a:t>
+            </a:r>
+            <a:endParaRPr lang="en-US" sz="1000" dirty="0"/>
+          </a:p>
+        </p:txBody>
+      </p:sp>
+    </p:spTree>
+  </p:cSld>
+  <p:clrMapOvr>
+    <a:masterClrMapping/>
+  </p:clrMapOvr>
+</p:sld>
+</file>
+
+<file path=ppt/slides/slide13.xml><?xml version="1.0" encoding="utf-8"?>
+<p:sld xmlns:a="http://schemas.openxmlformats.org/drawingml/2006/main" xmlns:r="http://schemas.openxmlformats.org/officeDocument/2006/relationships" xmlns:p="http://schemas.openxmlformats.org/presentationml/2006/main">
+  <p:cSld name="Slide 13">
+    <p:spTree>
+      <p:nvGrpSpPr>
+        <p:cNvPr id="1" name=""/>
+        <p:cNvGrpSpPr/>
+        <p:nvPr/>
+      </p:nvGrpSpPr>
+      <p:grpSpPr>
+        <a:xfrm>
+          <a:off x="0" y="0"/>
+          <a:ext cx="0" cy="0"/>
+          <a:chOff x="0" y="0"/>
+          <a:chExt cx="0" cy="0"/>
+        </a:xfrm>
+      </p:grpSpPr>
+      <p:sp>
+        <p:nvSpPr>
+          <p:cNvPr id="2" name="Text 0"/>
+          <p:cNvSpPr txBox="1"/>
+          <p:nvPr/>
+        </p:nvSpPr>
+        <p:spPr>
+          <a:xfrm>
+            <a:off x="640080" y="384048"/>
+            <a:ext cx="10911535" cy="658368"/>
+          </a:xfrm>
+          <a:prstGeom prst="rect">
+            <a:avLst/>
+          </a:prstGeom>
+          <a:noFill/>
+          <a:ln/>
+        </p:spPr>
+        <p:txBody>
+          <a:bodyPr wrap="square" lIns="0" tIns="0" rIns="0" bIns="0" rtlCol="0" anchor="ctr"/>
+          <a:lstStyle/>
+          <a:p>
+            <a:pPr indent="0" marL="0">
+              <a:buNone/>
+            </a:pPr>
+            <a:r>
+              <a:rPr lang="en-US" sz="3200" b="1" dirty="0">
+                <a:solidFill>
+                  <a:srgbClr val="14524A"/>
+                </a:solidFill>
+                <a:latin typeface="Cambria" pitchFamily="34" charset="0"/>
+                <a:ea typeface="Cambria" pitchFamily="34" charset="-122"/>
+                <a:cs typeface="Cambria" pitchFamily="34" charset="-120"/>
+              </a:rPr>
+              <a:t>Estado del proyecto y lo que sigue</a:t>
+            </a:r>
+            <a:endParaRPr lang="en-US" sz="3200" dirty="0"/>
+          </a:p>
+        </p:txBody>
+      </p:sp>
+      <p:sp>
+        <p:nvSpPr>
+          <p:cNvPr id="3" name="Text 1"/>
+          <p:cNvSpPr txBox="1"/>
+          <p:nvPr/>
+        </p:nvSpPr>
+        <p:spPr>
+          <a:xfrm>
+            <a:off x="640080" y="1042416"/>
+            <a:ext cx="10911535" cy="384048"/>
+          </a:xfrm>
+          <a:prstGeom prst="rect">
+            <a:avLst/>
+          </a:prstGeom>
+          <a:noFill/>
+          <a:ln/>
+        </p:spPr>
+        <p:txBody>
+          <a:bodyPr wrap="square" lIns="0" tIns="0" rIns="0" bIns="0" rtlCol="0" anchor="ctr"/>
+          <a:lstStyle/>
+          <a:p>
+            <a:pPr indent="0" marL="0">
+              <a:buNone/>
+            </a:pPr>
+            <a:r>
+              <a:rPr lang="en-US" sz="1400" dirty="0">
+                <a:solidFill>
+                  <a:srgbClr val="5D6B66"/>
+                </a:solidFill>
+                <a:latin typeface="Calibri" pitchFamily="34" charset="0"/>
+                <a:ea typeface="Calibri" pitchFamily="34" charset="-122"/>
+                <a:cs typeface="Calibri" pitchFamily="34" charset="-120"/>
+              </a:rPr>
+              <a:t>Dónde estamos parados al cerrar este avance</a:t>
+            </a:r>
+            <a:endParaRPr lang="en-US" sz="1400" dirty="0"/>
+          </a:p>
+        </p:txBody>
+      </p:sp>
+      <p:sp>
+        <p:nvSpPr>
+          <p:cNvPr id="4" name="Shape 2"/>
+          <p:cNvSpPr/>
+          <p:nvPr/>
+        </p:nvSpPr>
+        <p:spPr>
+          <a:xfrm>
+            <a:off x="640080" y="1719072"/>
+            <a:ext cx="3503066" cy="2432304"/>
+          </a:xfrm>
+          <a:prstGeom prst="roundRect">
+            <a:avLst>
+              <a:gd name="adj" fmla="val 1880"/>
+            </a:avLst>
+          </a:prstGeom>
+          <a:solidFill>
+            <a:srgbClr val="EEF5F1"/>
+          </a:solidFill>
+          <a:ln w="12700">
+            <a:solidFill>
+              <a:srgbClr val="D9E5DF"/>
+            </a:solidFill>
+            <a:prstDash val="solid"/>
+          </a:ln>
+        </p:spPr>
+      </p:sp>
+      <p:sp>
+        <p:nvSpPr>
+          <p:cNvPr id="5" name="Text 3"/>
+          <p:cNvSpPr txBox="1"/>
+          <p:nvPr/>
+        </p:nvSpPr>
+        <p:spPr>
+          <a:xfrm>
+            <a:off x="896112" y="1920240"/>
+            <a:ext cx="2991002" cy="274320"/>
+          </a:xfrm>
+          <a:prstGeom prst="rect">
+            <a:avLst/>
+          </a:prstGeom>
+          <a:noFill/>
+          <a:ln/>
+        </p:spPr>
+        <p:txBody>
+          <a:bodyPr wrap="square" lIns="0" tIns="0" rIns="0" bIns="0" rtlCol="0" anchor="ctr"/>
+          <a:lstStyle/>
+          <a:p>
+            <a:pPr indent="0" marL="0">
+              <a:buNone/>
+            </a:pPr>
+            <a:r>
+              <a:rPr lang="en-US" sz="1050" b="1" dirty="0">
+                <a:solidFill>
+                  <a:srgbClr val="2C7A6B"/>
+                </a:solidFill>
+                <a:latin typeface="Calibri" pitchFamily="34" charset="0"/>
+                <a:ea typeface="Calibri" pitchFamily="34" charset="-122"/>
+                <a:cs typeface="Calibri" pitchFamily="34" charset="-120"/>
+              </a:rPr>
+              <a:t>TERMINADO</a:t>
+            </a:r>
+            <a:endParaRPr lang="en-US" sz="1050" dirty="0"/>
+          </a:p>
+        </p:txBody>
+      </p:sp>
+      <p:sp>
+        <p:nvSpPr>
+          <p:cNvPr id="6" name="Text 4"/>
+          <p:cNvSpPr txBox="1"/>
+          <p:nvPr/>
+        </p:nvSpPr>
+        <p:spPr>
+          <a:xfrm>
+            <a:off x="896112" y="2212848"/>
+            <a:ext cx="2991002" cy="365760"/>
+          </a:xfrm>
+          <a:prstGeom prst="rect">
+            <a:avLst/>
+          </a:prstGeom>
+          <a:noFill/>
+          <a:ln/>
+        </p:spPr>
+        <p:txBody>
+          <a:bodyPr wrap="square" lIns="0" tIns="0" rIns="0" bIns="0" rtlCol="0" anchor="ctr"/>
+          <a:lstStyle/>
+          <a:p>
+            <a:pPr indent="0" marL="0">
+              <a:buNone/>
+            </a:pPr>
+            <a:r>
+              <a:rPr lang="en-US" sz="1600" b="1" dirty="0">
+                <a:solidFill>
+                  <a:srgbClr val="14524A"/>
+                </a:solidFill>
+                <a:latin typeface="Cambria" pitchFamily="34" charset="0"/>
+                <a:ea typeface="Cambria" pitchFamily="34" charset="-122"/>
+                <a:cs typeface="Cambria" pitchFamily="34" charset="-120"/>
+              </a:rPr>
+              <a:t>El núcleo funciona</a:t>
+            </a:r>
+            <a:endParaRPr lang="en-US" sz="1600" dirty="0"/>
+          </a:p>
+        </p:txBody>
+      </p:sp>
+      <p:sp>
+        <p:nvSpPr>
+          <p:cNvPr id="7" name="Text 5"/>
+          <p:cNvSpPr txBox="1"/>
+          <p:nvPr/>
+        </p:nvSpPr>
+        <p:spPr>
+          <a:xfrm>
+            <a:off x="896112" y="2651760"/>
+            <a:ext cx="2991002" cy="1298448"/>
+          </a:xfrm>
+          <a:prstGeom prst="rect">
+            <a:avLst/>
+          </a:prstGeom>
+          <a:noFill/>
+          <a:ln/>
+        </p:spPr>
+        <p:txBody>
+          <a:bodyPr wrap="square" lIns="0" tIns="0" rIns="0" bIns="0" rtlCol="0" anchor="t"/>
+          <a:lstStyle/>
+          <a:p>
+            <a:pPr indent="0" marL="0">
+              <a:lnSpc>
+                <a:spcPts val="1740"/>
+              </a:lnSpc>
+              <a:buNone/>
+            </a:pPr>
+            <a:r>
+              <a:rPr lang="en-US" sz="1200" dirty="0">
+                <a:solidFill>
+                  <a:srgbClr val="1C2321"/>
+                </a:solidFill>
+                <a:latin typeface="Calibri" pitchFamily="34" charset="0"/>
+                <a:ea typeface="Calibri" pitchFamily="34" charset="-122"/>
+                <a:cs typeface="Calibri" pitchFamily="34" charset="-120"/>
+              </a:rPr>
+              <a:t>Los tres perfiles, la venta con descuento de inventario, el cobro en línea, la suscripción con despacho automático, la agenda sin cruce, la historia clínica con alertas, el asistente del sitio y los correos automáticos.</a:t>
             </a:r>
             <a:endParaRPr lang="en-US" sz="1200" dirty="0"/>
           </a:p>
@@ -5141,7 +5860,7 @@
                 <a:ea typeface="Calibri" pitchFamily="34" charset="-122"/>
                 <a:cs typeface="Calibri" pitchFamily="34" charset="-120"/>
               </a:rPr>
-              <a:t>133 pruebas ejecutadas y lo que falta para producción</a:t>
+              <a:t>137 pruebas ejecutadas y lo que falta para producción</a:t>
             </a:r>
             <a:endParaRPr lang="en-US" sz="1150" dirty="0"/>
           </a:p>
@@ -10378,7 +11097,7 @@
                 <a:ea typeface="Calibri" pitchFamily="34" charset="-122"/>
                 <a:cs typeface="Calibri" pitchFamily="34" charset="-120"/>
               </a:rPr>
-              <a:t>Documento de requerimientos con 17 funcionales, 12 no funcionales y 22 reglas, más la trazabilidad a los problemas del diagnóstico.</a:t>
+              <a:t>Documento de requerimientos con 19 funcionales, 12 no funcionales y 22 reglas, más la trazabilidad a los problemas del diagnóstico.</a:t>
             </a:r>
             <a:endParaRPr lang="en-US" sz="1150" dirty="0"/>
           </a:p>
@@ -10628,7 +11347,7 @@
                 <a:ea typeface="Cambria" pitchFamily="34" charset="-122"/>
                 <a:cs typeface="Cambria" pitchFamily="34" charset="-120"/>
               </a:rPr>
-              <a:t>17</a:t>
+              <a:t>19</a:t>
             </a:r>
             <a:endParaRPr lang="en-US" sz="4200" dirty="0"/>
           </a:p>

--- a/docs/presentacion/EA2_VetPetConnect.pptx
+++ b/docs/presentacion/EA2_VetPetConnect.pptx
@@ -18,9 +18,11 @@
     <p:sldId id="266" r:id="rId12"/>
     <p:sldId id="267" r:id="rId13"/>
     <p:sldId id="268" r:id="rId14"/>
+    <p:sldId id="269" r:id="rId15"/>
+    <p:sldId id="270" r:id="rId16"/>
   </p:sldIdLst>
   <p:notesMasterIdLst>
-    <p:notesMasterId r:id="rId15"/>
+    <p:notesMasterId r:id="rId17"/>
   </p:notesMasterIdLst>
   <p:sldSz cx="12192000" cy="6858000"/>
   <p:notesSz cx="6858000" cy="12192000"/>
@@ -602,7 +604,7 @@
           <a:p>
             <a:r>
               <a:rPr lang="en-US" dirty="0"/>
-              <a:t>Esta es la lámina técnica que más pesa: las reglas de negocio no viven en la pantalla, donde cualquier cambio las rompe, sino en el servicio y en el motor de datos. Es lo que exige el RNF-08 del documento de requerimientos.</a:t>
+              <a:t>PHP 8.2 y no 8.3 o superior porque Laravel 12 es la última versión que lo admite, y 8.2 es lo que ofrecen los hostings peruanos económicos. Culqi entra detrás de una interfaz, así que cambiar de pasarela no toca el resto del sistema.</a:t>
             </a:r>
             <a:endParaRPr lang="en-US" dirty="0"/>
           </a:p>
@@ -690,7 +692,7 @@
           <a:p>
             <a:r>
               <a:rPr lang="en-US" dirty="0"/>
-              <a:t>Si preguntan si el chatbot usa IA: no, y es una decisión, no una carencia. Un motor de palabras clave con una configuración revisable es auditable, no inventa respuestas y no tiene costo por consulta. Para las preguntas frecuentes de una veterinaria es suficiente.</a:t>
+              <a:t>MailHog es la pieza que permite demostrar el correo en vivo: se dispara un pedido o un recordatorio y el mensaje aparece en el buzón del navegador, con su diseño y sus datos, sin enviar nada a una casilla real.</a:t>
             </a:r>
             <a:endParaRPr lang="en-US" dirty="0"/>
           </a:p>
@@ -778,7 +780,7 @@
           <a:p>
             <a:r>
               <a:rPr lang="en-US" dirty="0"/>
-              <a:t>Si el jurado pide demostración en vivo: la suite corre en siete segundos y el recorrido completo de compra se puede mostrar en el navegador.</a:t>
+              <a:t>Esta es la lámina técnica que más pesa: las reglas de negocio no viven en la pantalla, donde cualquier cambio las rompe, sino en el servicio y en el motor de datos. Es lo que exige el RNF-08 del documento de requerimientos.</a:t>
             </a:r>
             <a:endParaRPr lang="en-US" dirty="0"/>
           </a:p>
@@ -866,7 +868,7 @@
           <a:p>
             <a:r>
               <a:rPr lang="en-US" dirty="0"/>
-              <a:t>Cierre. Si hay una sola idea que quede: las reglas del negocio están escritas en el sistema y se comprueban solas. Eso es lo que separa un prototipo de un producto.</a:t>
+              <a:t>Si preguntan si el chatbot usa IA: no, y es una decisión, no una carencia. Un motor de palabras clave con una configuración revisable es auditable, no inventa respuestas y no tiene costo por consulta. Para las preguntas frecuentes de una veterinaria es suficiente.</a:t>
             </a:r>
             <a:endParaRPr lang="en-US" dirty="0"/>
           </a:p>
@@ -890,6 +892,182 @@
             <a:fld id="{F7021451-1387-4CA6-816F-3879F97B5CBC}" type="slidenum">
               <a:rPr lang="en-US"/>
               <a:t>13</a:t>
+            </a:fld>
+            <a:endParaRPr lang="en-US"/>
+          </a:p>
+        </p:txBody>
+      </p:sp>
+    </p:spTree>
+    <p:extLst>
+      <p:ext uri="{BB962C8B-B14F-4D97-AF65-F5344CB8AC3E}">
+        <p14:creationId xmlns:p14="http://schemas.microsoft.com/office/powerpoint/2010/main" val="1024086991"/>
+      </p:ext>
+    </p:extLst>
+  </p:cSld>
+  <p:clrMapOvr>
+    <a:masterClrMapping/>
+  </p:clrMapOvr>
+</p:notes>
+</file>
+
+<file path=ppt/notesSlides/notesSlide14.xml><?xml version="1.0" encoding="utf-8"?>
+<p:notes xmlns:a="http://schemas.openxmlformats.org/drawingml/2006/main" xmlns:r="http://schemas.openxmlformats.org/officeDocument/2006/relationships" xmlns:p="http://schemas.openxmlformats.org/presentationml/2006/main">
+  <p:cSld>
+    <p:spTree>
+      <p:nvGrpSpPr>
+        <p:cNvPr id="1" name=""/>
+        <p:cNvGrpSpPr/>
+        <p:nvPr/>
+      </p:nvGrpSpPr>
+      <p:grpSpPr>
+        <a:xfrm>
+          <a:off x="0" y="0"/>
+          <a:ext cx="0" cy="0"/>
+          <a:chOff x="0" y="0"/>
+          <a:chExt cx="0" cy="0"/>
+        </a:xfrm>
+      </p:grpSpPr>
+      <p:sp>
+        <p:nvSpPr>
+          <p:cNvPr id="2" name="Slide Image Placeholder 1"/>
+          <p:cNvSpPr>
+            <a:spLocks noGrp="1" noRot="1" noChangeAspect="1"/>
+          </p:cNvSpPr>
+          <p:nvPr>
+            <p:ph type="sldImg"/>
+          </p:nvPr>
+        </p:nvSpPr>
+        <p:spPr/>
+      </p:sp>
+      <p:sp>
+        <p:nvSpPr>
+          <p:cNvPr id="3" name="Notes Placeholder 2"/>
+          <p:cNvSpPr>
+            <a:spLocks noGrp="1"/>
+          </p:cNvSpPr>
+          <p:nvPr>
+            <p:ph type="body" idx="1"/>
+          </p:nvPr>
+        </p:nvSpPr>
+        <p:spPr/>
+        <p:txBody>
+          <a:bodyPr/>
+          <a:lstStyle/>
+          <a:p>
+            <a:r>
+              <a:rPr lang="en-US" dirty="0"/>
+              <a:t>Si el jurado pide demostración en vivo: la suite corre en siete segundos y el recorrido completo de compra se puede mostrar en el navegador.</a:t>
+            </a:r>
+            <a:endParaRPr lang="en-US" dirty="0"/>
+          </a:p>
+        </p:txBody>
+      </p:sp>
+      <p:sp>
+        <p:nvSpPr>
+          <p:cNvPr id="4" name="Slide Number Placeholder 3"/>
+          <p:cNvSpPr>
+            <a:spLocks noGrp="1"/>
+          </p:cNvSpPr>
+          <p:nvPr>
+            <p:ph type="sldNum" sz="quarter" idx="10"/>
+          </p:nvPr>
+        </p:nvSpPr>
+        <p:spPr/>
+        <p:txBody>
+          <a:bodyPr/>
+          <a:lstStyle/>
+          <a:p>
+            <a:fld id="{F7021451-1387-4CA6-816F-3879F97B5CBC}" type="slidenum">
+              <a:rPr lang="en-US"/>
+              <a:t>14</a:t>
+            </a:fld>
+            <a:endParaRPr lang="en-US"/>
+          </a:p>
+        </p:txBody>
+      </p:sp>
+    </p:spTree>
+    <p:extLst>
+      <p:ext uri="{BB962C8B-B14F-4D97-AF65-F5344CB8AC3E}">
+        <p14:creationId xmlns:p14="http://schemas.microsoft.com/office/powerpoint/2010/main" val="1024086991"/>
+      </p:ext>
+    </p:extLst>
+  </p:cSld>
+  <p:clrMapOvr>
+    <a:masterClrMapping/>
+  </p:clrMapOvr>
+</p:notes>
+</file>
+
+<file path=ppt/notesSlides/notesSlide15.xml><?xml version="1.0" encoding="utf-8"?>
+<p:notes xmlns:a="http://schemas.openxmlformats.org/drawingml/2006/main" xmlns:r="http://schemas.openxmlformats.org/officeDocument/2006/relationships" xmlns:p="http://schemas.openxmlformats.org/presentationml/2006/main">
+  <p:cSld>
+    <p:spTree>
+      <p:nvGrpSpPr>
+        <p:cNvPr id="1" name=""/>
+        <p:cNvGrpSpPr/>
+        <p:nvPr/>
+      </p:nvGrpSpPr>
+      <p:grpSpPr>
+        <a:xfrm>
+          <a:off x="0" y="0"/>
+          <a:ext cx="0" cy="0"/>
+          <a:chOff x="0" y="0"/>
+          <a:chExt cx="0" cy="0"/>
+        </a:xfrm>
+      </p:grpSpPr>
+      <p:sp>
+        <p:nvSpPr>
+          <p:cNvPr id="2" name="Slide Image Placeholder 1"/>
+          <p:cNvSpPr>
+            <a:spLocks noGrp="1" noRot="1" noChangeAspect="1"/>
+          </p:cNvSpPr>
+          <p:nvPr>
+            <p:ph type="sldImg"/>
+          </p:nvPr>
+        </p:nvSpPr>
+        <p:spPr/>
+      </p:sp>
+      <p:sp>
+        <p:nvSpPr>
+          <p:cNvPr id="3" name="Notes Placeholder 2"/>
+          <p:cNvSpPr>
+            <a:spLocks noGrp="1"/>
+          </p:cNvSpPr>
+          <p:nvPr>
+            <p:ph type="body" idx="1"/>
+          </p:nvPr>
+        </p:nvSpPr>
+        <p:spPr/>
+        <p:txBody>
+          <a:bodyPr/>
+          <a:lstStyle/>
+          <a:p>
+            <a:r>
+              <a:rPr lang="en-US" dirty="0"/>
+              <a:t>Cierre. Si hay una sola idea que quede: las reglas del negocio están escritas en el sistema y se comprueban solas. Eso es lo que separa un prototipo de un producto.</a:t>
+            </a:r>
+            <a:endParaRPr lang="en-US" dirty="0"/>
+          </a:p>
+        </p:txBody>
+      </p:sp>
+      <p:sp>
+        <p:nvSpPr>
+          <p:cNvPr id="4" name="Slide Number Placeholder 3"/>
+          <p:cNvSpPr>
+            <a:spLocks noGrp="1"/>
+          </p:cNvSpPr>
+          <p:nvPr>
+            <p:ph type="sldNum" sz="quarter" idx="10"/>
+          </p:nvPr>
+        </p:nvSpPr>
+        <p:spPr/>
+        <p:txBody>
+          <a:bodyPr/>
+          <a:lstStyle/>
+          <a:p>
+            <a:fld id="{F7021451-1387-4CA6-816F-3879F97B5CBC}" type="slidenum">
+              <a:rPr lang="en-US"/>
+              <a:t>15</a:t>
             </a:fld>
             <a:endParaRPr lang="en-US"/>
           </a:p>
@@ -2270,7 +2448,7 @@
                 <a:ea typeface="Cambria" pitchFamily="34" charset="-122"/>
                 <a:cs typeface="Cambria" pitchFamily="34" charset="-120"/>
               </a:rPr>
-              <a:t>Cómo se hacen cumplir las reglas</a:t>
+              <a:t>Con qué está construido</a:t>
             </a:r>
             <a:endParaRPr lang="en-US" sz="3200" dirty="0"/>
           </a:p>
@@ -2309,7 +2487,7 @@
                 <a:ea typeface="Calibri" pitchFamily="34" charset="-122"/>
                 <a:cs typeface="Calibri" pitchFamily="34" charset="-120"/>
               </a:rPr>
-              <a:t>La decisión técnica que sostiene todo el modelo de negocio</a:t>
+              <a:t>Todo estándar, gratuito y sostenible por cualquier programador</a:t>
             </a:r>
             <a:endParaRPr lang="en-US" sz="1400" dirty="0"/>
           </a:p>
@@ -2323,12 +2501,12 @@
         </p:nvSpPr>
         <p:spPr>
           <a:xfrm>
-            <a:off x="640080" y="1682496"/>
-            <a:ext cx="2590724" cy="1060704"/>
+            <a:off x="640080" y="1719072"/>
+            <a:ext cx="2577008" cy="2395728"/>
           </a:xfrm>
           <a:prstGeom prst="roundRect">
             <a:avLst>
-              <a:gd name="adj" fmla="val 4310"/>
+              <a:gd name="adj" fmla="val 1908"/>
             </a:avLst>
           </a:prstGeom>
           <a:solidFill>
@@ -2350,24 +2528,63 @@
         </p:nvSpPr>
         <p:spPr>
           <a:xfrm>
-            <a:off x="640080" y="1773936"/>
-            <a:ext cx="2590724" cy="512064"/>
-          </a:xfrm>
-          <a:prstGeom prst="rect">
-            <a:avLst/>
-          </a:prstGeom>
-          <a:noFill/>
-          <a:ln/>
-        </p:spPr>
-        <p:txBody>
-          <a:bodyPr wrap="square" lIns="0" tIns="0" rIns="0" bIns="0" rtlCol="0" anchor="ctr"/>
-          <a:lstStyle/>
-          <a:p>
-            <a:pPr algn="ctr" indent="0" marL="0">
-              <a:buNone/>
-            </a:pPr>
-            <a:r>
-              <a:rPr lang="en-US" sz="3000" b="1" dirty="0">
+            <a:off x="859536" y="1901952"/>
+            <a:ext cx="2138096" cy="256032"/>
+          </a:xfrm>
+          <a:prstGeom prst="rect">
+            <a:avLst/>
+          </a:prstGeom>
+          <a:noFill/>
+          <a:ln/>
+        </p:spPr>
+        <p:txBody>
+          <a:bodyPr wrap="square" lIns="0" tIns="0" rIns="0" bIns="0" rtlCol="0" anchor="ctr"/>
+          <a:lstStyle/>
+          <a:p>
+            <a:pPr indent="0" marL="0">
+              <a:buNone/>
+            </a:pPr>
+            <a:r>
+              <a:rPr lang="en-US" sz="950" b="1" dirty="0">
+                <a:solidFill>
+                  <a:srgbClr val="2C7A6B"/>
+                </a:solidFill>
+                <a:latin typeface="Calibri" pitchFamily="34" charset="0"/>
+                <a:ea typeface="Calibri" pitchFamily="34" charset="-122"/>
+                <a:cs typeface="Calibri" pitchFamily="34" charset="-120"/>
+              </a:rPr>
+              <a:t>APLICACIÓN</a:t>
+            </a:r>
+            <a:endParaRPr lang="en-US" sz="950" dirty="0"/>
+          </a:p>
+        </p:txBody>
+      </p:sp>
+      <p:sp>
+        <p:nvSpPr>
+          <p:cNvPr id="6" name="Text 4"/>
+          <p:cNvSpPr txBox="1"/>
+          <p:nvPr/>
+        </p:nvSpPr>
+        <p:spPr>
+          <a:xfrm>
+            <a:off x="859536" y="2176272"/>
+            <a:ext cx="2138096" cy="402336"/>
+          </a:xfrm>
+          <a:prstGeom prst="rect">
+            <a:avLst/>
+          </a:prstGeom>
+          <a:noFill/>
+          <a:ln/>
+        </p:spPr>
+        <p:txBody>
+          <a:bodyPr wrap="square" lIns="0" tIns="0" rIns="0" bIns="0" rtlCol="0" anchor="ctr"/>
+          <a:lstStyle/>
+          <a:p>
+            <a:pPr indent="0" marL="0">
+              <a:buNone/>
+            </a:pPr>
+            <a:r>
+              <a:rPr lang="en-US" sz="1700" b="1" dirty="0">
                 <a:solidFill>
                   <a:srgbClr val="14524A"/>
                 </a:solidFill>
@@ -2375,65 +2592,128 @@
                 <a:ea typeface="Cambria" pitchFamily="34" charset="-122"/>
                 <a:cs typeface="Cambria" pitchFamily="34" charset="-120"/>
               </a:rPr>
-              <a:t>9</a:t>
-            </a:r>
-            <a:endParaRPr lang="en-US" sz="3000" dirty="0"/>
-          </a:p>
-        </p:txBody>
-      </p:sp>
-      <p:sp>
-        <p:nvSpPr>
-          <p:cNvPr id="6" name="Text 4"/>
-          <p:cNvSpPr txBox="1"/>
-          <p:nvPr/>
-        </p:nvSpPr>
-        <p:spPr>
-          <a:xfrm>
-            <a:off x="640080" y="2286000"/>
-            <a:ext cx="2590724" cy="347472"/>
-          </a:xfrm>
-          <a:prstGeom prst="rect">
-            <a:avLst/>
-          </a:prstGeom>
-          <a:noFill/>
-          <a:ln/>
-        </p:spPr>
-        <p:txBody>
-          <a:bodyPr wrap="square" lIns="0" tIns="0" rIns="0" bIns="0" rtlCol="0" anchor="ctr"/>
-          <a:lstStyle/>
-          <a:p>
-            <a:pPr algn="ctr" indent="0" marL="0">
-              <a:buNone/>
-            </a:pPr>
-            <a:r>
-              <a:rPr lang="en-US" sz="1150" dirty="0">
-                <a:solidFill>
-                  <a:srgbClr val="5D6B66"/>
-                </a:solidFill>
-                <a:latin typeface="Calibri" pitchFamily="34" charset="0"/>
-                <a:ea typeface="Calibri" pitchFamily="34" charset="-122"/>
-                <a:cs typeface="Calibri" pitchFamily="34" charset="-120"/>
-              </a:rPr>
-              <a:t>tablas</a:t>
-            </a:r>
-            <a:endParaRPr lang="en-US" sz="1150" dirty="0"/>
-          </a:p>
-        </p:txBody>
-      </p:sp>
-      <p:sp>
-        <p:nvSpPr>
-          <p:cNvPr id="7" name="Shape 5"/>
+              <a:t>PHP 8.2</a:t>
+            </a:r>
+            <a:endParaRPr lang="en-US" sz="1700" dirty="0"/>
+          </a:p>
+        </p:txBody>
+      </p:sp>
+      <p:sp>
+        <p:nvSpPr>
+          <p:cNvPr id="7" name="Text 5"/>
+          <p:cNvSpPr txBox="1"/>
+          <p:nvPr/>
+        </p:nvSpPr>
+        <p:spPr>
+          <a:xfrm>
+            <a:off x="859536" y="2688336"/>
+            <a:ext cx="2138096" cy="1920240"/>
+          </a:xfrm>
+          <a:prstGeom prst="rect">
+            <a:avLst/>
+          </a:prstGeom>
+          <a:noFill/>
+          <a:ln/>
+        </p:spPr>
+        <p:txBody>
+          <a:bodyPr wrap="square" lIns="0" tIns="0" rIns="0" bIns="0" rtlCol="0" anchor="t"/>
+          <a:lstStyle/>
+          <a:p>
+            <a:pPr indent="0" marL="0">
+              <a:lnSpc>
+                <a:spcPts val="1900"/>
+              </a:lnSpc>
+              <a:buNone/>
+            </a:pPr>
+            <a:r>
+              <a:rPr lang="en-US" sz="1100" dirty="0">
+                <a:solidFill>
+                  <a:srgbClr val="1C2321"/>
+                </a:solidFill>
+                <a:latin typeface="Calibri" pitchFamily="34" charset="0"/>
+                <a:ea typeface="Calibri" pitchFamily="34" charset="-122"/>
+                <a:cs typeface="Calibri" pitchFamily="34" charset="-120"/>
+              </a:rPr>
+              <a:t>Laravel 12.69</a:t>
+            </a:r>
+            <a:endParaRPr lang="en-US" sz="1100" dirty="0"/>
+          </a:p>
+          <a:p>
+            <a:pPr indent="0" marL="0">
+              <a:lnSpc>
+                <a:spcPts val="1900"/>
+              </a:lnSpc>
+              <a:buNone/>
+            </a:pPr>
+            <a:r>
+              <a:rPr lang="en-US" sz="1100" dirty="0">
+                <a:solidFill>
+                  <a:srgbClr val="1C2321"/>
+                </a:solidFill>
+                <a:latin typeface="Calibri" pitchFamily="34" charset="0"/>
+                <a:ea typeface="Calibri" pitchFamily="34" charset="-122"/>
+                <a:cs typeface="Calibri" pitchFamily="34" charset="-120"/>
+              </a:rPr>
+              <a:t>Plantillas Blade</a:t>
+            </a:r>
+            <a:endParaRPr lang="en-US" sz="1100" dirty="0"/>
+          </a:p>
+          <a:p>
+            <a:pPr indent="0" marL="0">
+              <a:lnSpc>
+                <a:spcPts val="1900"/>
+              </a:lnSpc>
+              <a:buNone/>
+            </a:pPr>
+            <a:r>
+              <a:rPr lang="en-US" sz="1100" dirty="0">
+                <a:solidFill>
+                  <a:srgbClr val="1C2321"/>
+                </a:solidFill>
+                <a:latin typeface="Calibri" pitchFamily="34" charset="0"/>
+                <a:ea typeface="Calibri" pitchFamily="34" charset="-122"/>
+                <a:cs typeface="Calibri" pitchFamily="34" charset="-120"/>
+              </a:rPr>
+              <a:t>Composer</a:t>
+            </a:r>
+            <a:endParaRPr lang="en-US" sz="1100" dirty="0"/>
+          </a:p>
+          <a:p>
+            <a:pPr indent="0" marL="0">
+              <a:lnSpc>
+                <a:spcPts val="1900"/>
+              </a:lnSpc>
+              <a:buNone/>
+            </a:pPr>
+            <a:r>
+              <a:rPr lang="en-US" sz="1100" dirty="0">
+                <a:solidFill>
+                  <a:srgbClr val="1C2321"/>
+                </a:solidFill>
+                <a:latin typeface="Calibri" pitchFamily="34" charset="0"/>
+                <a:ea typeface="Calibri" pitchFamily="34" charset="-122"/>
+                <a:cs typeface="Calibri" pitchFamily="34" charset="-120"/>
+              </a:rPr>
+              <a:t>Servicios de dominio</a:t>
+            </a:r>
+            <a:endParaRPr lang="en-US" sz="1100" dirty="0"/>
+          </a:p>
+        </p:txBody>
+      </p:sp>
+      <p:sp>
+        <p:nvSpPr>
+          <p:cNvPr id="8" name="Shape 6"/>
           <p:cNvSpPr/>
           <p:nvPr/>
         </p:nvSpPr>
         <p:spPr>
           <a:xfrm>
-            <a:off x="3413684" y="1682496"/>
-            <a:ext cx="2590724" cy="1060704"/>
+            <a:off x="3418027" y="1719072"/>
+            <a:ext cx="2577008" cy="2395728"/>
           </a:xfrm>
           <a:prstGeom prst="roundRect">
             <a:avLst>
-              <a:gd name="adj" fmla="val 4310"/>
+              <a:gd name="adj" fmla="val 1908"/>
             </a:avLst>
           </a:prstGeom>
           <a:solidFill>
@@ -2449,30 +2729,69 @@
       </p:sp>
       <p:sp>
         <p:nvSpPr>
-          <p:cNvPr id="8" name="Text 6"/>
-          <p:cNvSpPr txBox="1"/>
-          <p:nvPr/>
-        </p:nvSpPr>
-        <p:spPr>
-          <a:xfrm>
-            <a:off x="3413684" y="1773936"/>
-            <a:ext cx="2590724" cy="512064"/>
-          </a:xfrm>
-          <a:prstGeom prst="rect">
-            <a:avLst/>
-          </a:prstGeom>
-          <a:noFill/>
-          <a:ln/>
-        </p:spPr>
-        <p:txBody>
-          <a:bodyPr wrap="square" lIns="0" tIns="0" rIns="0" bIns="0" rtlCol="0" anchor="ctr"/>
-          <a:lstStyle/>
-          <a:p>
-            <a:pPr algn="ctr" indent="0" marL="0">
-              <a:buNone/>
-            </a:pPr>
-            <a:r>
-              <a:rPr lang="en-US" sz="3000" b="1" dirty="0">
+          <p:cNvPr id="9" name="Text 7"/>
+          <p:cNvSpPr txBox="1"/>
+          <p:nvPr/>
+        </p:nvSpPr>
+        <p:spPr>
+          <a:xfrm>
+            <a:off x="3637483" y="1901952"/>
+            <a:ext cx="2138096" cy="256032"/>
+          </a:xfrm>
+          <a:prstGeom prst="rect">
+            <a:avLst/>
+          </a:prstGeom>
+          <a:noFill/>
+          <a:ln/>
+        </p:spPr>
+        <p:txBody>
+          <a:bodyPr wrap="square" lIns="0" tIns="0" rIns="0" bIns="0" rtlCol="0" anchor="ctr"/>
+          <a:lstStyle/>
+          <a:p>
+            <a:pPr indent="0" marL="0">
+              <a:buNone/>
+            </a:pPr>
+            <a:r>
+              <a:rPr lang="en-US" sz="950" b="1" dirty="0">
+                <a:solidFill>
+                  <a:srgbClr val="2C7A6B"/>
+                </a:solidFill>
+                <a:latin typeface="Calibri" pitchFamily="34" charset="0"/>
+                <a:ea typeface="Calibri" pitchFamily="34" charset="-122"/>
+                <a:cs typeface="Calibri" pitchFamily="34" charset="-120"/>
+              </a:rPr>
+              <a:t>DATOS</a:t>
+            </a:r>
+            <a:endParaRPr lang="en-US" sz="950" dirty="0"/>
+          </a:p>
+        </p:txBody>
+      </p:sp>
+      <p:sp>
+        <p:nvSpPr>
+          <p:cNvPr id="10" name="Text 8"/>
+          <p:cNvSpPr txBox="1"/>
+          <p:nvPr/>
+        </p:nvSpPr>
+        <p:spPr>
+          <a:xfrm>
+            <a:off x="3637483" y="2176272"/>
+            <a:ext cx="2138096" cy="402336"/>
+          </a:xfrm>
+          <a:prstGeom prst="rect">
+            <a:avLst/>
+          </a:prstGeom>
+          <a:noFill/>
+          <a:ln/>
+        </p:spPr>
+        <p:txBody>
+          <a:bodyPr wrap="square" lIns="0" tIns="0" rIns="0" bIns="0" rtlCol="0" anchor="ctr"/>
+          <a:lstStyle/>
+          <a:p>
+            <a:pPr indent="0" marL="0">
+              <a:buNone/>
+            </a:pPr>
+            <a:r>
+              <a:rPr lang="en-US" sz="1700" b="1" dirty="0">
                 <a:solidFill>
                   <a:srgbClr val="14524A"/>
                 </a:solidFill>
@@ -2480,65 +2799,335 @@
                 <a:ea typeface="Cambria" pitchFamily="34" charset="-122"/>
                 <a:cs typeface="Cambria" pitchFamily="34" charset="-120"/>
               </a:rPr>
-              <a:t>14</a:t>
-            </a:r>
-            <a:endParaRPr lang="en-US" sz="3000" dirty="0"/>
-          </a:p>
-        </p:txBody>
-      </p:sp>
-      <p:sp>
-        <p:nvSpPr>
-          <p:cNvPr id="9" name="Text 7"/>
-          <p:cNvSpPr txBox="1"/>
-          <p:nvPr/>
-        </p:nvSpPr>
-        <p:spPr>
-          <a:xfrm>
-            <a:off x="3413684" y="2286000"/>
-            <a:ext cx="2590724" cy="347472"/>
-          </a:xfrm>
-          <a:prstGeom prst="rect">
-            <a:avLst/>
-          </a:prstGeom>
-          <a:noFill/>
-          <a:ln/>
-        </p:spPr>
-        <p:txBody>
-          <a:bodyPr wrap="square" lIns="0" tIns="0" rIns="0" bIns="0" rtlCol="0" anchor="ctr"/>
-          <a:lstStyle/>
-          <a:p>
-            <a:pPr algn="ctr" indent="0" marL="0">
-              <a:buNone/>
-            </a:pPr>
-            <a:r>
-              <a:rPr lang="en-US" sz="1150" dirty="0">
-                <a:solidFill>
-                  <a:srgbClr val="5D6B66"/>
-                </a:solidFill>
-                <a:latin typeface="Calibri" pitchFamily="34" charset="0"/>
-                <a:ea typeface="Calibri" pitchFamily="34" charset="-122"/>
-                <a:cs typeface="Calibri" pitchFamily="34" charset="-120"/>
-              </a:rPr>
-              <a:t>servicios de dominio</a:t>
-            </a:r>
-            <a:endParaRPr lang="en-US" sz="1150" dirty="0"/>
-          </a:p>
-        </p:txBody>
-      </p:sp>
-      <p:sp>
-        <p:nvSpPr>
-          <p:cNvPr id="10" name="Shape 8"/>
+              <a:t>MySQL 8.0</a:t>
+            </a:r>
+            <a:endParaRPr lang="en-US" sz="1700" dirty="0"/>
+          </a:p>
+        </p:txBody>
+      </p:sp>
+      <p:sp>
+        <p:nvSpPr>
+          <p:cNvPr id="11" name="Text 9"/>
+          <p:cNvSpPr txBox="1"/>
+          <p:nvPr/>
+        </p:nvSpPr>
+        <p:spPr>
+          <a:xfrm>
+            <a:off x="3637483" y="2688336"/>
+            <a:ext cx="2138096" cy="1920240"/>
+          </a:xfrm>
+          <a:prstGeom prst="rect">
+            <a:avLst/>
+          </a:prstGeom>
+          <a:noFill/>
+          <a:ln/>
+        </p:spPr>
+        <p:txBody>
+          <a:bodyPr wrap="square" lIns="0" tIns="0" rIns="0" bIns="0" rtlCol="0" anchor="t"/>
+          <a:lstStyle/>
+          <a:p>
+            <a:pPr indent="0" marL="0">
+              <a:lnSpc>
+                <a:spcPts val="1900"/>
+              </a:lnSpc>
+              <a:buNone/>
+            </a:pPr>
+            <a:r>
+              <a:rPr lang="en-US" sz="1100" dirty="0">
+                <a:solidFill>
+                  <a:srgbClr val="1C2321"/>
+                </a:solidFill>
+                <a:latin typeface="Calibri" pitchFamily="34" charset="0"/>
+                <a:ea typeface="Calibri" pitchFamily="34" charset="-122"/>
+                <a:cs typeface="Calibri" pitchFamily="34" charset="-120"/>
+              </a:rPr>
+              <a:t>Migraciones versionadas</a:t>
+            </a:r>
+            <a:endParaRPr lang="en-US" sz="1100" dirty="0"/>
+          </a:p>
+          <a:p>
+            <a:pPr indent="0" marL="0">
+              <a:lnSpc>
+                <a:spcPts val="1900"/>
+              </a:lnSpc>
+              <a:buNone/>
+            </a:pPr>
+            <a:r>
+              <a:rPr lang="en-US" sz="1100" dirty="0">
+                <a:solidFill>
+                  <a:srgbClr val="1C2321"/>
+                </a:solidFill>
+                <a:latin typeface="Calibri" pitchFamily="34" charset="0"/>
+                <a:ea typeface="Calibri" pitchFamily="34" charset="-122"/>
+                <a:cs typeface="Calibri" pitchFamily="34" charset="-120"/>
+              </a:rPr>
+              <a:t>Restricciones en el motor</a:t>
+            </a:r>
+            <a:endParaRPr lang="en-US" sz="1100" dirty="0"/>
+          </a:p>
+          <a:p>
+            <a:pPr indent="0" marL="0">
+              <a:lnSpc>
+                <a:spcPts val="1900"/>
+              </a:lnSpc>
+              <a:buNone/>
+            </a:pPr>
+            <a:r>
+              <a:rPr lang="en-US" sz="1100" dirty="0">
+                <a:solidFill>
+                  <a:srgbClr val="1C2321"/>
+                </a:solidFill>
+                <a:latin typeface="Calibri" pitchFamily="34" charset="0"/>
+                <a:ea typeface="Calibri" pitchFamily="34" charset="-122"/>
+                <a:cs typeface="Calibri" pitchFamily="34" charset="-120"/>
+              </a:rPr>
+              <a:t>Procedimiento de compra</a:t>
+            </a:r>
+            <a:endParaRPr lang="en-US" sz="1100" dirty="0"/>
+          </a:p>
+          <a:p>
+            <a:pPr indent="0" marL="0">
+              <a:lnSpc>
+                <a:spcPts val="1900"/>
+              </a:lnSpc>
+              <a:buNone/>
+            </a:pPr>
+            <a:r>
+              <a:rPr lang="en-US" sz="1100" dirty="0">
+                <a:solidFill>
+                  <a:srgbClr val="1C2321"/>
+                </a:solidFill>
+                <a:latin typeface="Calibri" pitchFamily="34" charset="0"/>
+                <a:ea typeface="Calibri" pitchFamily="34" charset="-122"/>
+                <a:cs typeface="Calibri" pitchFamily="34" charset="-120"/>
+              </a:rPr>
+              <a:t>Vistas de reporte</a:t>
+            </a:r>
+            <a:endParaRPr lang="en-US" sz="1100" dirty="0"/>
+          </a:p>
+        </p:txBody>
+      </p:sp>
+      <p:sp>
+        <p:nvSpPr>
+          <p:cNvPr id="12" name="Shape 10"/>
           <p:cNvSpPr/>
           <p:nvPr/>
         </p:nvSpPr>
         <p:spPr>
           <a:xfrm>
-            <a:off x="6187288" y="1682496"/>
-            <a:ext cx="2590724" cy="1060704"/>
+            <a:off x="6195974" y="1719072"/>
+            <a:ext cx="2577008" cy="2395728"/>
           </a:xfrm>
           <a:prstGeom prst="roundRect">
             <a:avLst>
-              <a:gd name="adj" fmla="val 4310"/>
+              <a:gd name="adj" fmla="val 1908"/>
+            </a:avLst>
+          </a:prstGeom>
+          <a:solidFill>
+            <a:srgbClr val="14524A"/>
+          </a:solidFill>
+          <a:ln w="12700">
+            <a:solidFill>
+              <a:srgbClr val="14524A"/>
+            </a:solidFill>
+            <a:prstDash val="solid"/>
+          </a:ln>
+        </p:spPr>
+      </p:sp>
+      <p:sp>
+        <p:nvSpPr>
+          <p:cNvPr id="13" name="Text 11"/>
+          <p:cNvSpPr txBox="1"/>
+          <p:nvPr/>
+        </p:nvSpPr>
+        <p:spPr>
+          <a:xfrm>
+            <a:off x="6415430" y="1901952"/>
+            <a:ext cx="2138096" cy="256032"/>
+          </a:xfrm>
+          <a:prstGeom prst="rect">
+            <a:avLst/>
+          </a:prstGeom>
+          <a:noFill/>
+          <a:ln/>
+        </p:spPr>
+        <p:txBody>
+          <a:bodyPr wrap="square" lIns="0" tIns="0" rIns="0" bIns="0" rtlCol="0" anchor="ctr"/>
+          <a:lstStyle/>
+          <a:p>
+            <a:pPr indent="0" marL="0">
+              <a:buNone/>
+            </a:pPr>
+            <a:r>
+              <a:rPr lang="en-US" sz="950" b="1" dirty="0">
+                <a:solidFill>
+                  <a:srgbClr val="E8A33D"/>
+                </a:solidFill>
+                <a:latin typeface="Calibri" pitchFamily="34" charset="0"/>
+                <a:ea typeface="Calibri" pitchFamily="34" charset="-122"/>
+                <a:cs typeface="Calibri" pitchFamily="34" charset="-120"/>
+              </a:rPr>
+              <a:t>ENTORNO</a:t>
+            </a:r>
+            <a:endParaRPr lang="en-US" sz="950" dirty="0"/>
+          </a:p>
+        </p:txBody>
+      </p:sp>
+      <p:sp>
+        <p:nvSpPr>
+          <p:cNvPr id="14" name="Text 12"/>
+          <p:cNvSpPr txBox="1"/>
+          <p:nvPr/>
+        </p:nvSpPr>
+        <p:spPr>
+          <a:xfrm>
+            <a:off x="6415430" y="2176272"/>
+            <a:ext cx="2138096" cy="402336"/>
+          </a:xfrm>
+          <a:prstGeom prst="rect">
+            <a:avLst/>
+          </a:prstGeom>
+          <a:noFill/>
+          <a:ln/>
+        </p:spPr>
+        <p:txBody>
+          <a:bodyPr wrap="square" lIns="0" tIns="0" rIns="0" bIns="0" rtlCol="0" anchor="ctr"/>
+          <a:lstStyle/>
+          <a:p>
+            <a:pPr indent="0" marL="0">
+              <a:buNone/>
+            </a:pPr>
+            <a:r>
+              <a:rPr lang="en-US" sz="1700" b="1" dirty="0">
+                <a:solidFill>
+                  <a:srgbClr val="FFFFFF"/>
+                </a:solidFill>
+                <a:latin typeface="Cambria" pitchFamily="34" charset="0"/>
+                <a:ea typeface="Cambria" pitchFamily="34" charset="-122"/>
+                <a:cs typeface="Cambria" pitchFamily="34" charset="-120"/>
+              </a:rPr>
+              <a:t>Docker</a:t>
+            </a:r>
+            <a:endParaRPr lang="en-US" sz="1700" dirty="0"/>
+          </a:p>
+        </p:txBody>
+      </p:sp>
+      <p:sp>
+        <p:nvSpPr>
+          <p:cNvPr id="15" name="Text 13"/>
+          <p:cNvSpPr txBox="1"/>
+          <p:nvPr/>
+        </p:nvSpPr>
+        <p:spPr>
+          <a:xfrm>
+            <a:off x="6415430" y="2688336"/>
+            <a:ext cx="2138096" cy="1920240"/>
+          </a:xfrm>
+          <a:prstGeom prst="rect">
+            <a:avLst/>
+          </a:prstGeom>
+          <a:noFill/>
+          <a:ln/>
+        </p:spPr>
+        <p:txBody>
+          <a:bodyPr wrap="square" lIns="0" tIns="0" rIns="0" bIns="0" rtlCol="0" anchor="t"/>
+          <a:lstStyle/>
+          <a:p>
+            <a:pPr indent="0" marL="0">
+              <a:lnSpc>
+                <a:spcPts val="1900"/>
+              </a:lnSpc>
+              <a:buNone/>
+            </a:pPr>
+            <a:r>
+              <a:rPr lang="en-US" sz="1100" dirty="0">
+                <a:solidFill>
+                  <a:srgbClr val="CFE3DC"/>
+                </a:solidFill>
+                <a:latin typeface="Calibri" pitchFamily="34" charset="0"/>
+                <a:ea typeface="Calibri" pitchFamily="34" charset="-122"/>
+                <a:cs typeface="Calibri" pitchFamily="34" charset="-120"/>
+              </a:rPr>
+              <a:t>php:8.2-apache</a:t>
+            </a:r>
+            <a:endParaRPr lang="en-US" sz="1100" dirty="0"/>
+          </a:p>
+          <a:p>
+            <a:pPr indent="0" marL="0">
+              <a:lnSpc>
+                <a:spcPts val="1900"/>
+              </a:lnSpc>
+              <a:buNone/>
+            </a:pPr>
+            <a:r>
+              <a:rPr lang="en-US" sz="1100" dirty="0">
+                <a:solidFill>
+                  <a:srgbClr val="CFE3DC"/>
+                </a:solidFill>
+                <a:latin typeface="Calibri" pitchFamily="34" charset="0"/>
+                <a:ea typeface="Calibri" pitchFamily="34" charset="-122"/>
+                <a:cs typeface="Calibri" pitchFamily="34" charset="-120"/>
+              </a:rPr>
+              <a:t>mysql:8.0</a:t>
+            </a:r>
+            <a:endParaRPr lang="en-US" sz="1100" dirty="0"/>
+          </a:p>
+          <a:p>
+            <a:pPr indent="0" marL="0">
+              <a:lnSpc>
+                <a:spcPts val="1900"/>
+              </a:lnSpc>
+              <a:buNone/>
+            </a:pPr>
+            <a:r>
+              <a:rPr lang="en-US" sz="1100" dirty="0">
+                <a:solidFill>
+                  <a:srgbClr val="CFE3DC"/>
+                </a:solidFill>
+                <a:latin typeface="Calibri" pitchFamily="34" charset="0"/>
+                <a:ea typeface="Calibri" pitchFamily="34" charset="-122"/>
+                <a:cs typeface="Calibri" pitchFamily="34" charset="-120"/>
+              </a:rPr>
+              <a:t>MailHog</a:t>
+            </a:r>
+            <a:endParaRPr lang="en-US" sz="1100" dirty="0"/>
+          </a:p>
+          <a:p>
+            <a:pPr indent="0" marL="0">
+              <a:lnSpc>
+                <a:spcPts val="1900"/>
+              </a:lnSpc>
+              <a:buNone/>
+            </a:pPr>
+            <a:r>
+              <a:rPr lang="en-US" sz="1100" dirty="0">
+                <a:solidFill>
+                  <a:srgbClr val="CFE3DC"/>
+                </a:solidFill>
+                <a:latin typeface="Calibri" pitchFamily="34" charset="0"/>
+                <a:ea typeface="Calibri" pitchFamily="34" charset="-122"/>
+                <a:cs typeface="Calibri" pitchFamily="34" charset="-120"/>
+              </a:rPr>
+              <a:t>Node 20 y Apache</a:t>
+            </a:r>
+            <a:endParaRPr lang="en-US" sz="1100" dirty="0"/>
+          </a:p>
+        </p:txBody>
+      </p:sp>
+      <p:sp>
+        <p:nvSpPr>
+          <p:cNvPr id="16" name="Shape 14"/>
+          <p:cNvSpPr/>
+          <p:nvPr/>
+        </p:nvSpPr>
+        <p:spPr>
+          <a:xfrm>
+            <a:off x="8973922" y="1719072"/>
+            <a:ext cx="2577008" cy="2395728"/>
+          </a:xfrm>
+          <a:prstGeom prst="roundRect">
+            <a:avLst>
+              <a:gd name="adj" fmla="val 1908"/>
             </a:avLst>
           </a:prstGeom>
           <a:solidFill>
@@ -2554,30 +3143,69 @@
       </p:sp>
       <p:sp>
         <p:nvSpPr>
-          <p:cNvPr id="11" name="Text 9"/>
-          <p:cNvSpPr txBox="1"/>
-          <p:nvPr/>
-        </p:nvSpPr>
-        <p:spPr>
-          <a:xfrm>
-            <a:off x="6187288" y="1773936"/>
-            <a:ext cx="2590724" cy="512064"/>
-          </a:xfrm>
-          <a:prstGeom prst="rect">
-            <a:avLst/>
-          </a:prstGeom>
-          <a:noFill/>
-          <a:ln/>
-        </p:spPr>
-        <p:txBody>
-          <a:bodyPr wrap="square" lIns="0" tIns="0" rIns="0" bIns="0" rtlCol="0" anchor="ctr"/>
-          <a:lstStyle/>
-          <a:p>
-            <a:pPr algn="ctr" indent="0" marL="0">
-              <a:buNone/>
-            </a:pPr>
-            <a:r>
-              <a:rPr lang="en-US" sz="3000" b="1" dirty="0">
+          <p:cNvPr id="17" name="Text 15"/>
+          <p:cNvSpPr txBox="1"/>
+          <p:nvPr/>
+        </p:nvSpPr>
+        <p:spPr>
+          <a:xfrm>
+            <a:off x="9193378" y="1901952"/>
+            <a:ext cx="2138096" cy="256032"/>
+          </a:xfrm>
+          <a:prstGeom prst="rect">
+            <a:avLst/>
+          </a:prstGeom>
+          <a:noFill/>
+          <a:ln/>
+        </p:spPr>
+        <p:txBody>
+          <a:bodyPr wrap="square" lIns="0" tIns="0" rIns="0" bIns="0" rtlCol="0" anchor="ctr"/>
+          <a:lstStyle/>
+          <a:p>
+            <a:pPr indent="0" marL="0">
+              <a:buNone/>
+            </a:pPr>
+            <a:r>
+              <a:rPr lang="en-US" sz="950" b="1" dirty="0">
+                <a:solidFill>
+                  <a:srgbClr val="2C7A6B"/>
+                </a:solidFill>
+                <a:latin typeface="Calibri" pitchFamily="34" charset="0"/>
+                <a:ea typeface="Calibri" pitchFamily="34" charset="-122"/>
+                <a:cs typeface="Calibri" pitchFamily="34" charset="-120"/>
+              </a:rPr>
+              <a:t>CALIDAD Y COBRO</a:t>
+            </a:r>
+            <a:endParaRPr lang="en-US" sz="950" dirty="0"/>
+          </a:p>
+        </p:txBody>
+      </p:sp>
+      <p:sp>
+        <p:nvSpPr>
+          <p:cNvPr id="18" name="Text 16"/>
+          <p:cNvSpPr txBox="1"/>
+          <p:nvPr/>
+        </p:nvSpPr>
+        <p:spPr>
+          <a:xfrm>
+            <a:off x="9193378" y="2176272"/>
+            <a:ext cx="2138096" cy="402336"/>
+          </a:xfrm>
+          <a:prstGeom prst="rect">
+            <a:avLst/>
+          </a:prstGeom>
+          <a:noFill/>
+          <a:ln/>
+        </p:spPr>
+        <p:txBody>
+          <a:bodyPr wrap="square" lIns="0" tIns="0" rIns="0" bIns="0" rtlCol="0" anchor="ctr"/>
+          <a:lstStyle/>
+          <a:p>
+            <a:pPr indent="0" marL="0">
+              <a:buNone/>
+            </a:pPr>
+            <a:r>
+              <a:rPr lang="en-US" sz="1700" b="1" dirty="0">
                 <a:solidFill>
                   <a:srgbClr val="14524A"/>
                 </a:solidFill>
@@ -2585,65 +3213,128 @@
                 <a:ea typeface="Cambria" pitchFamily="34" charset="-122"/>
                 <a:cs typeface="Cambria" pitchFamily="34" charset="-120"/>
               </a:rPr>
-              <a:t>32</a:t>
-            </a:r>
-            <a:endParaRPr lang="en-US" sz="3000" dirty="0"/>
-          </a:p>
-        </p:txBody>
-      </p:sp>
-      <p:sp>
-        <p:nvSpPr>
-          <p:cNvPr id="12" name="Text 10"/>
-          <p:cNvSpPr txBox="1"/>
-          <p:nvPr/>
-        </p:nvSpPr>
-        <p:spPr>
-          <a:xfrm>
-            <a:off x="6187288" y="2286000"/>
-            <a:ext cx="2590724" cy="347472"/>
-          </a:xfrm>
-          <a:prstGeom prst="rect">
-            <a:avLst/>
-          </a:prstGeom>
-          <a:noFill/>
-          <a:ln/>
-        </p:spPr>
-        <p:txBody>
-          <a:bodyPr wrap="square" lIns="0" tIns="0" rIns="0" bIns="0" rtlCol="0" anchor="ctr"/>
-          <a:lstStyle/>
-          <a:p>
-            <a:pPr algn="ctr" indent="0" marL="0">
-              <a:buNone/>
-            </a:pPr>
-            <a:r>
-              <a:rPr lang="en-US" sz="1150" dirty="0">
-                <a:solidFill>
-                  <a:srgbClr val="5D6B66"/>
-                </a:solidFill>
-                <a:latin typeface="Calibri" pitchFamily="34" charset="0"/>
-                <a:ea typeface="Calibri" pitchFamily="34" charset="-122"/>
-                <a:cs typeface="Calibri" pitchFamily="34" charset="-120"/>
-              </a:rPr>
-              <a:t>rutas propias</a:t>
-            </a:r>
-            <a:endParaRPr lang="en-US" sz="1150" dirty="0"/>
-          </a:p>
-        </p:txBody>
-      </p:sp>
-      <p:sp>
-        <p:nvSpPr>
-          <p:cNvPr id="13" name="Shape 11"/>
+              <a:t>PHPUnit 11</a:t>
+            </a:r>
+            <a:endParaRPr lang="en-US" sz="1700" dirty="0"/>
+          </a:p>
+        </p:txBody>
+      </p:sp>
+      <p:sp>
+        <p:nvSpPr>
+          <p:cNvPr id="19" name="Text 17"/>
+          <p:cNvSpPr txBox="1"/>
+          <p:nvPr/>
+        </p:nvSpPr>
+        <p:spPr>
+          <a:xfrm>
+            <a:off x="9193378" y="2688336"/>
+            <a:ext cx="2138096" cy="1920240"/>
+          </a:xfrm>
+          <a:prstGeom prst="rect">
+            <a:avLst/>
+          </a:prstGeom>
+          <a:noFill/>
+          <a:ln/>
+        </p:spPr>
+        <p:txBody>
+          <a:bodyPr wrap="square" lIns="0" tIns="0" rIns="0" bIns="0" rtlCol="0" anchor="t"/>
+          <a:lstStyle/>
+          <a:p>
+            <a:pPr indent="0" marL="0">
+              <a:lnSpc>
+                <a:spcPts val="1900"/>
+              </a:lnSpc>
+              <a:buNone/>
+            </a:pPr>
+            <a:r>
+              <a:rPr lang="en-US" sz="1100" dirty="0">
+                <a:solidFill>
+                  <a:srgbClr val="1C2321"/>
+                </a:solidFill>
+                <a:latin typeface="Calibri" pitchFamily="34" charset="0"/>
+                <a:ea typeface="Calibri" pitchFamily="34" charset="-122"/>
+                <a:cs typeface="Calibri" pitchFamily="34" charset="-120"/>
+              </a:rPr>
+              <a:t>Laravel Pint</a:t>
+            </a:r>
+            <a:endParaRPr lang="en-US" sz="1100" dirty="0"/>
+          </a:p>
+          <a:p>
+            <a:pPr indent="0" marL="0">
+              <a:lnSpc>
+                <a:spcPts val="1900"/>
+              </a:lnSpc>
+              <a:buNone/>
+            </a:pPr>
+            <a:r>
+              <a:rPr lang="en-US" sz="1100" dirty="0">
+                <a:solidFill>
+                  <a:srgbClr val="1C2321"/>
+                </a:solidFill>
+                <a:latin typeface="Calibri" pitchFamily="34" charset="0"/>
+                <a:ea typeface="Calibri" pitchFamily="34" charset="-122"/>
+                <a:cs typeface="Calibri" pitchFamily="34" charset="-120"/>
+              </a:rPr>
+              <a:t>137 pruebas automatizadas</a:t>
+            </a:r>
+            <a:endParaRPr lang="en-US" sz="1100" dirty="0"/>
+          </a:p>
+          <a:p>
+            <a:pPr indent="0" marL="0">
+              <a:lnSpc>
+                <a:spcPts val="1900"/>
+              </a:lnSpc>
+              <a:buNone/>
+            </a:pPr>
+            <a:r>
+              <a:rPr lang="en-US" sz="1100" dirty="0">
+                <a:solidFill>
+                  <a:srgbClr val="1C2321"/>
+                </a:solidFill>
+                <a:latin typeface="Calibri" pitchFamily="34" charset="0"/>
+                <a:ea typeface="Calibri" pitchFamily="34" charset="-122"/>
+                <a:cs typeface="Calibri" pitchFamily="34" charset="-120"/>
+              </a:rPr>
+              <a:t>Culqi como pasarela</a:t>
+            </a:r>
+            <a:endParaRPr lang="en-US" sz="1100" dirty="0"/>
+          </a:p>
+          <a:p>
+            <a:pPr indent="0" marL="0">
+              <a:lnSpc>
+                <a:spcPts val="1900"/>
+              </a:lnSpc>
+              <a:buNone/>
+            </a:pPr>
+            <a:r>
+              <a:rPr lang="en-US" sz="1100" dirty="0">
+                <a:solidFill>
+                  <a:srgbClr val="1C2321"/>
+                </a:solidFill>
+                <a:latin typeface="Calibri" pitchFamily="34" charset="0"/>
+                <a:ea typeface="Calibri" pitchFamily="34" charset="-122"/>
+                <a:cs typeface="Calibri" pitchFamily="34" charset="-120"/>
+              </a:rPr>
+              <a:t>Git con ramas</a:t>
+            </a:r>
+            <a:endParaRPr lang="en-US" sz="1100" dirty="0"/>
+          </a:p>
+        </p:txBody>
+      </p:sp>
+      <p:sp>
+        <p:nvSpPr>
+          <p:cNvPr id="20" name="Shape 18"/>
           <p:cNvSpPr/>
           <p:nvPr/>
         </p:nvSpPr>
         <p:spPr>
           <a:xfrm>
-            <a:off x="8960891" y="1682496"/>
-            <a:ext cx="2590724" cy="1060704"/>
+            <a:off x="640080" y="4462272"/>
+            <a:ext cx="10911535" cy="1097280"/>
           </a:xfrm>
           <a:prstGeom prst="roundRect">
             <a:avLst>
-              <a:gd name="adj" fmla="val 4310"/>
+              <a:gd name="adj" fmla="val 4167"/>
             </a:avLst>
           </a:prstGeom>
           <a:solidFill>
@@ -2659,452 +3350,14 @@
       </p:sp>
       <p:sp>
         <p:nvSpPr>
-          <p:cNvPr id="14" name="Text 12"/>
-          <p:cNvSpPr txBox="1"/>
-          <p:nvPr/>
-        </p:nvSpPr>
-        <p:spPr>
-          <a:xfrm>
-            <a:off x="8960891" y="1773936"/>
-            <a:ext cx="2590724" cy="512064"/>
-          </a:xfrm>
-          <a:prstGeom prst="rect">
-            <a:avLst/>
-          </a:prstGeom>
-          <a:noFill/>
-          <a:ln/>
-        </p:spPr>
-        <p:txBody>
-          <a:bodyPr wrap="square" lIns="0" tIns="0" rIns="0" bIns="0" rtlCol="0" anchor="ctr"/>
-          <a:lstStyle/>
-          <a:p>
-            <a:pPr algn="ctr" indent="0" marL="0">
-              <a:buNone/>
-            </a:pPr>
-            <a:r>
-              <a:rPr lang="en-US" sz="3000" b="1" dirty="0">
-                <a:solidFill>
-                  <a:srgbClr val="14524A"/>
-                </a:solidFill>
-                <a:latin typeface="Cambria" pitchFamily="34" charset="0"/>
-                <a:ea typeface="Cambria" pitchFamily="34" charset="-122"/>
-                <a:cs typeface="Cambria" pitchFamily="34" charset="-120"/>
-              </a:rPr>
-              <a:t>3</a:t>
-            </a:r>
-            <a:endParaRPr lang="en-US" sz="3000" dirty="0"/>
-          </a:p>
-        </p:txBody>
-      </p:sp>
-      <p:sp>
-        <p:nvSpPr>
-          <p:cNvPr id="15" name="Text 13"/>
-          <p:cNvSpPr txBox="1"/>
-          <p:nvPr/>
-        </p:nvSpPr>
-        <p:spPr>
-          <a:xfrm>
-            <a:off x="8960891" y="2286000"/>
-            <a:ext cx="2590724" cy="347472"/>
-          </a:xfrm>
-          <a:prstGeom prst="rect">
-            <a:avLst/>
-          </a:prstGeom>
-          <a:noFill/>
-          <a:ln/>
-        </p:spPr>
-        <p:txBody>
-          <a:bodyPr wrap="square" lIns="0" tIns="0" rIns="0" bIns="0" rtlCol="0" anchor="ctr"/>
-          <a:lstStyle/>
-          <a:p>
-            <a:pPr algn="ctr" indent="0" marL="0">
-              <a:buNone/>
-            </a:pPr>
-            <a:r>
-              <a:rPr lang="en-US" sz="1150" dirty="0">
-                <a:solidFill>
-                  <a:srgbClr val="5D6B66"/>
-                </a:solidFill>
-                <a:latin typeface="Calibri" pitchFamily="34" charset="0"/>
-                <a:ea typeface="Calibri" pitchFamily="34" charset="-122"/>
-                <a:cs typeface="Calibri" pitchFamily="34" charset="-120"/>
-              </a:rPr>
-              <a:t>perfiles de acceso</a:t>
-            </a:r>
-            <a:endParaRPr lang="en-US" sz="1150" dirty="0"/>
-          </a:p>
-        </p:txBody>
-      </p:sp>
-      <p:sp>
-        <p:nvSpPr>
-          <p:cNvPr id="16" name="Text 14"/>
-          <p:cNvSpPr txBox="1"/>
-          <p:nvPr/>
-        </p:nvSpPr>
-        <p:spPr>
-          <a:xfrm>
-            <a:off x="640080" y="2889504"/>
-            <a:ext cx="10911535" cy="365760"/>
-          </a:xfrm>
-          <a:prstGeom prst="rect">
-            <a:avLst/>
-          </a:prstGeom>
-          <a:noFill/>
-          <a:ln/>
-        </p:spPr>
-        <p:txBody>
-          <a:bodyPr wrap="square" lIns="0" tIns="0" rIns="0" bIns="0" rtlCol="0" anchor="ctr"/>
-          <a:lstStyle/>
-          <a:p>
-            <a:pPr indent="0" marL="0">
-              <a:buNone/>
-            </a:pPr>
-            <a:r>
-              <a:rPr lang="en-US" sz="1700" b="1" dirty="0">
-                <a:solidFill>
-                  <a:srgbClr val="14524A"/>
-                </a:solidFill>
-                <a:latin typeface="Cambria" pitchFamily="34" charset="0"/>
-                <a:ea typeface="Cambria" pitchFamily="34" charset="-122"/>
-                <a:cs typeface="Cambria" pitchFamily="34" charset="-120"/>
-              </a:rPr>
-              <a:t>Cada regla se hace cumplir dos veces</a:t>
-            </a:r>
-            <a:endParaRPr lang="en-US" sz="1700" dirty="0"/>
-          </a:p>
-        </p:txBody>
-      </p:sp>
-      <p:sp>
-        <p:nvSpPr>
-          <p:cNvPr id="17" name="Shape 15"/>
-          <p:cNvSpPr/>
-          <p:nvPr/>
-        </p:nvSpPr>
-        <p:spPr>
-          <a:xfrm>
-            <a:off x="640080" y="3346704"/>
-            <a:ext cx="5336896" cy="1481328"/>
-          </a:xfrm>
-          <a:prstGeom prst="roundRect">
-            <a:avLst>
-              <a:gd name="adj" fmla="val 3086"/>
-            </a:avLst>
-          </a:prstGeom>
-          <a:solidFill>
-            <a:srgbClr val="EEF5F1"/>
-          </a:solidFill>
-          <a:ln w="12700">
-            <a:solidFill>
-              <a:srgbClr val="D9E5DF"/>
-            </a:solidFill>
-            <a:prstDash val="solid"/>
-          </a:ln>
-        </p:spPr>
-      </p:sp>
-      <p:sp>
-        <p:nvSpPr>
-          <p:cNvPr id="18" name="Text 16"/>
-          <p:cNvSpPr txBox="1"/>
-          <p:nvPr/>
-        </p:nvSpPr>
-        <p:spPr>
-          <a:xfrm>
-            <a:off x="896112" y="3547872"/>
-            <a:ext cx="4824832" cy="274320"/>
-          </a:xfrm>
-          <a:prstGeom prst="rect">
-            <a:avLst/>
-          </a:prstGeom>
-          <a:noFill/>
-          <a:ln/>
-        </p:spPr>
-        <p:txBody>
-          <a:bodyPr wrap="square" lIns="0" tIns="0" rIns="0" bIns="0" rtlCol="0" anchor="ctr"/>
-          <a:lstStyle/>
-          <a:p>
-            <a:pPr indent="0" marL="0">
-              <a:buNone/>
-            </a:pPr>
-            <a:r>
-              <a:rPr lang="en-US" sz="1050" b="1" dirty="0">
-                <a:solidFill>
-                  <a:srgbClr val="E8A33D"/>
-                </a:solidFill>
-                <a:latin typeface="Calibri" pitchFamily="34" charset="0"/>
-                <a:ea typeface="Calibri" pitchFamily="34" charset="-122"/>
-                <a:cs typeface="Calibri" pitchFamily="34" charset="-120"/>
-              </a:rPr>
-              <a:t>CAPA 1  ·  LA APLICACIÓN</a:t>
-            </a:r>
-            <a:endParaRPr lang="en-US" sz="1050" dirty="0"/>
-          </a:p>
-        </p:txBody>
-      </p:sp>
-      <p:sp>
-        <p:nvSpPr>
-          <p:cNvPr id="19" name="Text 17"/>
-          <p:cNvSpPr txBox="1"/>
-          <p:nvPr/>
-        </p:nvSpPr>
-        <p:spPr>
-          <a:xfrm>
-            <a:off x="896112" y="3840480"/>
-            <a:ext cx="4824832" cy="365760"/>
-          </a:xfrm>
-          <a:prstGeom prst="rect">
-            <a:avLst/>
-          </a:prstGeom>
-          <a:noFill/>
-          <a:ln/>
-        </p:spPr>
-        <p:txBody>
-          <a:bodyPr wrap="square" lIns="0" tIns="0" rIns="0" bIns="0" rtlCol="0" anchor="ctr"/>
-          <a:lstStyle/>
-          <a:p>
-            <a:pPr indent="0" marL="0">
-              <a:buNone/>
-            </a:pPr>
-            <a:r>
-              <a:rPr lang="en-US" sz="1600" b="1" dirty="0">
-                <a:solidFill>
-                  <a:srgbClr val="14524A"/>
-                </a:solidFill>
-                <a:latin typeface="Cambria" pitchFamily="34" charset="0"/>
-                <a:ea typeface="Cambria" pitchFamily="34" charset="-122"/>
-                <a:cs typeface="Cambria" pitchFamily="34" charset="-120"/>
-              </a:rPr>
-              <a:t>El servicio decide y avisa</a:t>
-            </a:r>
-            <a:endParaRPr lang="en-US" sz="1600" dirty="0"/>
-          </a:p>
-        </p:txBody>
-      </p:sp>
-      <p:sp>
-        <p:nvSpPr>
-          <p:cNvPr id="20" name="Text 18"/>
-          <p:cNvSpPr txBox="1"/>
-          <p:nvPr/>
-        </p:nvSpPr>
-        <p:spPr>
-          <a:xfrm>
-            <a:off x="896112" y="4279392"/>
-            <a:ext cx="4824832" cy="347472"/>
-          </a:xfrm>
-          <a:prstGeom prst="rect">
-            <a:avLst/>
-          </a:prstGeom>
-          <a:noFill/>
-          <a:ln/>
-        </p:spPr>
-        <p:txBody>
-          <a:bodyPr wrap="square" lIns="0" tIns="0" rIns="0" bIns="0" rtlCol="0" anchor="t"/>
-          <a:lstStyle/>
-          <a:p>
-            <a:pPr indent="0" marL="0">
-              <a:lnSpc>
-                <a:spcPts val="1740"/>
-              </a:lnSpc>
-              <a:buNone/>
-            </a:pPr>
-            <a:r>
-              <a:rPr lang="en-US" sz="1200" dirty="0">
-                <a:solidFill>
-                  <a:srgbClr val="1C2321"/>
-                </a:solidFill>
-                <a:latin typeface="Calibri" pitchFamily="34" charset="0"/>
-                <a:ea typeface="Calibri" pitchFamily="34" charset="-122"/>
-                <a:cs typeface="Calibri" pitchFamily="34" charset="-120"/>
-              </a:rPr>
-              <a:t>Comprueba la regla y devuelve un mensaje que el cliente entiende: qué producto falta y cuántas unidades quedan.</a:t>
-            </a:r>
-            <a:endParaRPr lang="en-US" sz="1200" dirty="0"/>
-          </a:p>
-        </p:txBody>
-      </p:sp>
-      <p:sp>
-        <p:nvSpPr>
-          <p:cNvPr id="21" name="Shape 19"/>
-          <p:cNvSpPr/>
-          <p:nvPr/>
-        </p:nvSpPr>
-        <p:spPr>
-          <a:xfrm>
-            <a:off x="6214720" y="3346704"/>
-            <a:ext cx="5336896" cy="1481328"/>
-          </a:xfrm>
-          <a:prstGeom prst="roundRect">
-            <a:avLst>
-              <a:gd name="adj" fmla="val 3086"/>
-            </a:avLst>
-          </a:prstGeom>
-          <a:solidFill>
-            <a:srgbClr val="EEF5F1"/>
-          </a:solidFill>
-          <a:ln w="12700">
-            <a:solidFill>
-              <a:srgbClr val="D9E5DF"/>
-            </a:solidFill>
-            <a:prstDash val="solid"/>
-          </a:ln>
-        </p:spPr>
-      </p:sp>
-      <p:sp>
-        <p:nvSpPr>
-          <p:cNvPr id="22" name="Text 20"/>
-          <p:cNvSpPr txBox="1"/>
-          <p:nvPr/>
-        </p:nvSpPr>
-        <p:spPr>
-          <a:xfrm>
-            <a:off x="6470752" y="3547872"/>
-            <a:ext cx="4824832" cy="274320"/>
-          </a:xfrm>
-          <a:prstGeom prst="rect">
-            <a:avLst/>
-          </a:prstGeom>
-          <a:noFill/>
-          <a:ln/>
-        </p:spPr>
-        <p:txBody>
-          <a:bodyPr wrap="square" lIns="0" tIns="0" rIns="0" bIns="0" rtlCol="0" anchor="ctr"/>
-          <a:lstStyle/>
-          <a:p>
-            <a:pPr indent="0" marL="0">
-              <a:buNone/>
-            </a:pPr>
-            <a:r>
-              <a:rPr lang="en-US" sz="1050" b="1" dirty="0">
-                <a:solidFill>
-                  <a:srgbClr val="E8A33D"/>
-                </a:solidFill>
-                <a:latin typeface="Calibri" pitchFamily="34" charset="0"/>
-                <a:ea typeface="Calibri" pitchFamily="34" charset="-122"/>
-                <a:cs typeface="Calibri" pitchFamily="34" charset="-120"/>
-              </a:rPr>
-              <a:t>CAPA 2  ·  LA BASE DE DATOS</a:t>
-            </a:r>
-            <a:endParaRPr lang="en-US" sz="1050" dirty="0"/>
-          </a:p>
-        </p:txBody>
-      </p:sp>
-      <p:sp>
-        <p:nvSpPr>
-          <p:cNvPr id="23" name="Text 21"/>
-          <p:cNvSpPr txBox="1"/>
-          <p:nvPr/>
-        </p:nvSpPr>
-        <p:spPr>
-          <a:xfrm>
-            <a:off x="6470752" y="3840480"/>
-            <a:ext cx="4824832" cy="365760"/>
-          </a:xfrm>
-          <a:prstGeom prst="rect">
-            <a:avLst/>
-          </a:prstGeom>
-          <a:noFill/>
-          <a:ln/>
-        </p:spPr>
-        <p:txBody>
-          <a:bodyPr wrap="square" lIns="0" tIns="0" rIns="0" bIns="0" rtlCol="0" anchor="ctr"/>
-          <a:lstStyle/>
-          <a:p>
-            <a:pPr indent="0" marL="0">
-              <a:buNone/>
-            </a:pPr>
-            <a:r>
-              <a:rPr lang="en-US" sz="1600" b="1" dirty="0">
-                <a:solidFill>
-                  <a:srgbClr val="14524A"/>
-                </a:solidFill>
-                <a:latin typeface="Cambria" pitchFamily="34" charset="0"/>
-                <a:ea typeface="Cambria" pitchFamily="34" charset="-122"/>
-                <a:cs typeface="Cambria" pitchFamily="34" charset="-120"/>
-              </a:rPr>
-              <a:t>El motor la garantiza</a:t>
-            </a:r>
-            <a:endParaRPr lang="en-US" sz="1600" dirty="0"/>
-          </a:p>
-        </p:txBody>
-      </p:sp>
-      <p:sp>
-        <p:nvSpPr>
-          <p:cNvPr id="24" name="Text 22"/>
-          <p:cNvSpPr txBox="1"/>
-          <p:nvPr/>
-        </p:nvSpPr>
-        <p:spPr>
-          <a:xfrm>
-            <a:off x="6470752" y="4279392"/>
-            <a:ext cx="4824832" cy="347472"/>
-          </a:xfrm>
-          <a:prstGeom prst="rect">
-            <a:avLst/>
-          </a:prstGeom>
-          <a:noFill/>
-          <a:ln/>
-        </p:spPr>
-        <p:txBody>
-          <a:bodyPr wrap="square" lIns="0" tIns="0" rIns="0" bIns="0" rtlCol="0" anchor="t"/>
-          <a:lstStyle/>
-          <a:p>
-            <a:pPr indent="0" marL="0">
-              <a:lnSpc>
-                <a:spcPts val="1740"/>
-              </a:lnSpc>
-              <a:buNone/>
-            </a:pPr>
-            <a:r>
-              <a:rPr lang="en-US" sz="1200" dirty="0">
-                <a:solidFill>
-                  <a:srgbClr val="1C2321"/>
-                </a:solidFill>
-                <a:latin typeface="Calibri" pitchFamily="34" charset="0"/>
-                <a:ea typeface="Calibri" pitchFamily="34" charset="-122"/>
-                <a:cs typeface="Calibri" pitchFamily="34" charset="-120"/>
-              </a:rPr>
-              <a:t>Restricciones en las tablas. Aunque un error de programación futuro se salte la capa anterior, el dato inválido no entra.</a:t>
-            </a:r>
-            <a:endParaRPr lang="en-US" sz="1200" dirty="0"/>
-          </a:p>
-        </p:txBody>
-      </p:sp>
-      <p:sp>
-        <p:nvSpPr>
-          <p:cNvPr id="25" name="Shape 23"/>
-          <p:cNvSpPr/>
-          <p:nvPr/>
-        </p:nvSpPr>
-        <p:spPr>
-          <a:xfrm>
-            <a:off x="640080" y="4992624"/>
-            <a:ext cx="10911535" cy="914400"/>
-          </a:xfrm>
-          <a:prstGeom prst="roundRect">
-            <a:avLst>
-              <a:gd name="adj" fmla="val 5000"/>
-            </a:avLst>
-          </a:prstGeom>
-          <a:solidFill>
-            <a:srgbClr val="14524A"/>
-          </a:solidFill>
-          <a:ln w="12700">
-            <a:solidFill>
-              <a:srgbClr val="14524A"/>
-            </a:solidFill>
-            <a:prstDash val="solid"/>
-          </a:ln>
-        </p:spPr>
-      </p:sp>
-      <p:sp>
-        <p:nvSpPr>
-          <p:cNvPr id="26" name="Text 24"/>
-          <p:cNvSpPr txBox="1"/>
-          <p:nvPr/>
-        </p:nvSpPr>
-        <p:spPr>
-          <a:xfrm>
-            <a:off x="950976" y="4992624"/>
-            <a:ext cx="10289743" cy="914400"/>
+          <p:cNvPr id="21" name="Text 19"/>
+          <p:cNvSpPr txBox="1"/>
+          <p:nvPr/>
+        </p:nvSpPr>
+        <p:spPr>
+          <a:xfrm>
+            <a:off x="914400" y="4462272"/>
+            <a:ext cx="10362895" cy="1097280"/>
           </a:xfrm>
           <a:prstGeom prst="rect">
             <a:avLst/>
@@ -3125,13 +3378,13 @@
             <a:r>
               <a:rPr lang="en-US" sz="1200" b="1" dirty="0">
                 <a:solidFill>
-                  <a:srgbClr val="E8A33D"/>
-                </a:solidFill>
-                <a:latin typeface="Calibri" pitchFamily="34" charset="0"/>
-                <a:ea typeface="Calibri" pitchFamily="34" charset="-122"/>
-                <a:cs typeface="Calibri" pitchFamily="34" charset="-120"/>
-              </a:rPr>
-              <a:t xml:space="preserve">Ejemplo, RN-12: si no hay stock completo, no hay pedido.  </a:t>
+                  <a:srgbClr val="14524A"/>
+                </a:solidFill>
+                <a:latin typeface="Calibri" pitchFamily="34" charset="0"/>
+                <a:ea typeface="Calibri" pitchFamily="34" charset="-122"/>
+                <a:cs typeface="Calibri" pitchFamily="34" charset="-120"/>
+              </a:rPr>
+              <a:t xml:space="preserve">Por qué esta pila y no otra.  </a:t>
             </a:r>
             <a:pPr indent="0" marL="0">
               <a:lnSpc>
@@ -3142,13 +3395,13 @@
             <a:r>
               <a:rPr lang="en-US" sz="1200" dirty="0">
                 <a:solidFill>
-                  <a:srgbClr val="FFFFFF"/>
-                </a:solidFill>
-                <a:latin typeface="Calibri" pitchFamily="34" charset="0"/>
-                <a:ea typeface="Calibri" pitchFamily="34" charset="-122"/>
-                <a:cs typeface="Calibri" pitchFamily="34" charset="-120"/>
-              </a:rPr>
-              <a:t>El servicio bloquea el producto, suma todo lo que falta y, si algo no alcanza, no escribe nada. Debajo, la tabla tiene una restricción que impide que el stock baje de cero. La empresa prefiere no vender antes que prometer lo que no tiene.</a:t>
+                  <a:srgbClr val="1C2321"/>
+                </a:solidFill>
+                <a:latin typeface="Calibri" pitchFamily="34" charset="0"/>
+                <a:ea typeface="Calibri" pitchFamily="34" charset="-122"/>
+                <a:cs typeface="Calibri" pitchFamily="34" charset="-120"/>
+              </a:rPr>
+              <a:t>Ninguna pieza es exótica ni de pago: VetPet Surco es una MYPE y tiene que poder contratar a cualquier programador para mantener el sistema, y poder mudarlo de proveedor si el costo sube. Es el requerimiento RNF-11.</a:t>
             </a:r>
             <a:endParaRPr lang="en-US" sz="1200" dirty="0"/>
           </a:p>
@@ -3212,7 +3465,7 @@
                 <a:ea typeface="Cambria" pitchFamily="34" charset="-122"/>
                 <a:cs typeface="Cambria" pitchFamily="34" charset="-120"/>
               </a:rPr>
-              <a:t>Atender al cliente sin sumar personal</a:t>
+              <a:t>El entorno se levanta con un comando</a:t>
             </a:r>
             <a:endParaRPr lang="en-US" sz="3200" dirty="0"/>
           </a:p>
@@ -3251,7 +3504,7 @@
                 <a:ea typeface="Calibri" pitchFamily="34" charset="-122"/>
                 <a:cs typeface="Calibri" pitchFamily="34" charset="-120"/>
               </a:rPr>
-              <a:t>Tres piezas que incorporó el último incremento</a:t>
+              <a:t>Tres contenedores, idénticos en la máquina de cada integrante y en el servidor</a:t>
             </a:r>
             <a:endParaRPr lang="en-US" sz="1400" dirty="0"/>
           </a:p>
@@ -3265,12 +3518,12 @@
         </p:nvSpPr>
         <p:spPr>
           <a:xfrm>
-            <a:off x="640080" y="1719072"/>
-            <a:ext cx="3503066" cy="2432304"/>
+            <a:off x="640080" y="1755648"/>
+            <a:ext cx="3503066" cy="2304288"/>
           </a:xfrm>
           <a:prstGeom prst="roundRect">
             <a:avLst>
-              <a:gd name="adj" fmla="val 1880"/>
+              <a:gd name="adj" fmla="val 1984"/>
             </a:avLst>
           </a:prstGeom>
           <a:solidFill>
@@ -3286,42 +3539,30 @@
       </p:sp>
       <p:sp>
         <p:nvSpPr>
-          <p:cNvPr id="5" name="Text 3"/>
-          <p:cNvSpPr txBox="1"/>
-          <p:nvPr/>
-        </p:nvSpPr>
-        <p:spPr>
-          <a:xfrm>
-            <a:off x="896112" y="1920240"/>
-            <a:ext cx="2991002" cy="274320"/>
-          </a:xfrm>
-          <a:prstGeom prst="rect">
-            <a:avLst/>
-          </a:prstGeom>
-          <a:noFill/>
-          <a:ln/>
-        </p:spPr>
-        <p:txBody>
-          <a:bodyPr wrap="square" lIns="0" tIns="0" rIns="0" bIns="0" rtlCol="0" anchor="ctr"/>
-          <a:lstStyle/>
-          <a:p>
-            <a:pPr indent="0" marL="0">
-              <a:buNone/>
-            </a:pPr>
-            <a:r>
-              <a:rPr lang="en-US" sz="1050" b="1" dirty="0">
-                <a:solidFill>
-                  <a:srgbClr val="2C7A6B"/>
-                </a:solidFill>
-                <a:latin typeface="Calibri" pitchFamily="34" charset="0"/>
-                <a:ea typeface="Calibri" pitchFamily="34" charset="-122"/>
-                <a:cs typeface="Calibri" pitchFamily="34" charset="-120"/>
-              </a:rPr>
-              <a:t>ASISTENTE DEL SITIO</a:t>
-            </a:r>
-            <a:endParaRPr lang="en-US" sz="1050" dirty="0"/>
-          </a:p>
-        </p:txBody>
+          <p:cNvPr id="5" name="Shape 3"/>
+          <p:cNvSpPr/>
+          <p:nvPr/>
+        </p:nvSpPr>
+        <p:spPr>
+          <a:xfrm>
+            <a:off x="877824" y="1956816"/>
+            <a:ext cx="1371600" cy="329184"/>
+          </a:xfrm>
+          <a:prstGeom prst="roundRect">
+            <a:avLst>
+              <a:gd name="adj" fmla="val 138889"/>
+            </a:avLst>
+          </a:prstGeom>
+          <a:solidFill>
+            <a:srgbClr val="14524A"/>
+          </a:solidFill>
+          <a:ln w="12700">
+            <a:solidFill>
+              <a:srgbClr val="14524A"/>
+            </a:solidFill>
+            <a:prstDash val="solid"/>
+          </a:ln>
+        </p:spPr>
       </p:sp>
       <p:sp>
         <p:nvSpPr>
@@ -3331,8 +3572,47 @@
         </p:nvSpPr>
         <p:spPr>
           <a:xfrm>
-            <a:off x="896112" y="2212848"/>
-            <a:ext cx="2991002" cy="365760"/>
+            <a:off x="877824" y="1956816"/>
+            <a:ext cx="1371600" cy="329184"/>
+          </a:xfrm>
+          <a:prstGeom prst="rect">
+            <a:avLst/>
+          </a:prstGeom>
+          <a:noFill/>
+          <a:ln/>
+        </p:spPr>
+        <p:txBody>
+          <a:bodyPr wrap="square" lIns="0" tIns="0" rIns="0" bIns="0" rtlCol="0" anchor="ctr"/>
+          <a:lstStyle/>
+          <a:p>
+            <a:pPr algn="ctr" indent="0" marL="0">
+              <a:buNone/>
+            </a:pPr>
+            <a:r>
+              <a:rPr lang="en-US" sz="1100" b="1" dirty="0">
+                <a:solidFill>
+                  <a:srgbClr val="FFFFFF"/>
+                </a:solidFill>
+                <a:latin typeface="Courier New" pitchFamily="34" charset="0"/>
+                <a:ea typeface="Courier New" pitchFamily="34" charset="-122"/>
+                <a:cs typeface="Courier New" pitchFamily="34" charset="-120"/>
+              </a:rPr>
+              <a:t>app</a:t>
+            </a:r>
+            <a:endParaRPr lang="en-US" sz="1100" dirty="0"/>
+          </a:p>
+        </p:txBody>
+      </p:sp>
+      <p:sp>
+        <p:nvSpPr>
+          <p:cNvPr id="7" name="Text 5"/>
+          <p:cNvSpPr txBox="1"/>
+          <p:nvPr/>
+        </p:nvSpPr>
+        <p:spPr>
+          <a:xfrm>
+            <a:off x="877824" y="2395728"/>
+            <a:ext cx="3027578" cy="384048"/>
           </a:xfrm>
           <a:prstGeom prst="rect">
             <a:avLst/>
@@ -3356,7 +3636,7 @@
                 <a:ea typeface="Cambria" pitchFamily="34" charset="-122"/>
                 <a:cs typeface="Cambria" pitchFamily="34" charset="-120"/>
               </a:rPr>
-              <a:t>Pelusa responde sola</a:t>
+              <a:t>La aplicación</a:t>
             </a:r>
             <a:endParaRPr lang="en-US" sz="1600" dirty="0"/>
           </a:p>
@@ -3364,14 +3644,14 @@
       </p:sp>
       <p:sp>
         <p:nvSpPr>
-          <p:cNvPr id="7" name="Text 5"/>
-          <p:cNvSpPr txBox="1"/>
-          <p:nvPr/>
-        </p:nvSpPr>
-        <p:spPr>
-          <a:xfrm>
-            <a:off x="896112" y="2651760"/>
-            <a:ext cx="2991002" cy="1298448"/>
+          <p:cNvPr id="8" name="Text 6"/>
+          <p:cNvSpPr txBox="1"/>
+          <p:nvPr/>
+        </p:nvSpPr>
+        <p:spPr>
+          <a:xfrm>
+            <a:off x="877824" y="2852928"/>
+            <a:ext cx="3027578" cy="1572768"/>
           </a:xfrm>
           <a:prstGeom prst="rect">
             <a:avLst/>
@@ -3385,12 +3665,12 @@
           <a:p>
             <a:pPr indent="0" marL="0">
               <a:lnSpc>
-                <a:spcPts val="1740"/>
+                <a:spcPts val="1600"/>
               </a:lnSpc>
               <a:buNone/>
             </a:pPr>
             <a:r>
-              <a:rPr lang="en-US" sz="1200" dirty="0">
+              <a:rPr lang="en-US" sz="1150" dirty="0">
                 <a:solidFill>
                   <a:srgbClr val="1C2321"/>
                 </a:solidFill>
@@ -3398,26 +3678,26 @@
                 <a:ea typeface="Calibri" pitchFamily="34" charset="-122"/>
                 <a:cs typeface="Calibri" pitchFamily="34" charset="-120"/>
               </a:rPr>
-              <a:t>Entiende 14 tipos de pregunta en español y contesta con los datos de la propia cuenta: en qué va el pedido, cuándo llega el despacho, qué vacuna toca. Ocho temas de menú para quien prefiere no escribir.</a:t>
-            </a:r>
-            <a:endParaRPr lang="en-US" sz="1200" dirty="0"/>
-          </a:p>
-        </p:txBody>
-      </p:sp>
-      <p:sp>
-        <p:nvSpPr>
-          <p:cNvPr id="8" name="Shape 6"/>
+              <a:t>php:8.2-apache con las extensiones que Laravel necesita. Publica los puertos 80 y 443, con certificado propio para probar en HTTPS.</a:t>
+            </a:r>
+            <a:endParaRPr lang="en-US" sz="1150" dirty="0"/>
+          </a:p>
+        </p:txBody>
+      </p:sp>
+      <p:sp>
+        <p:nvSpPr>
+          <p:cNvPr id="9" name="Shape 7"/>
           <p:cNvSpPr/>
           <p:nvPr/>
         </p:nvSpPr>
         <p:spPr>
           <a:xfrm>
-            <a:off x="4344314" y="1719072"/>
-            <a:ext cx="3503066" cy="2432304"/>
+            <a:off x="4344314" y="1755648"/>
+            <a:ext cx="3503066" cy="2304288"/>
           </a:xfrm>
           <a:prstGeom prst="roundRect">
             <a:avLst>
-              <a:gd name="adj" fmla="val 1880"/>
+              <a:gd name="adj" fmla="val 1984"/>
             </a:avLst>
           </a:prstGeom>
           <a:solidFill>
@@ -3433,285 +3713,18 @@
       </p:sp>
       <p:sp>
         <p:nvSpPr>
-          <p:cNvPr id="9" name="Text 7"/>
-          <p:cNvSpPr txBox="1"/>
-          <p:nvPr/>
-        </p:nvSpPr>
-        <p:spPr>
-          <a:xfrm>
-            <a:off x="4600346" y="1920240"/>
-            <a:ext cx="2991002" cy="274320"/>
-          </a:xfrm>
-          <a:prstGeom prst="rect">
-            <a:avLst/>
-          </a:prstGeom>
-          <a:noFill/>
-          <a:ln/>
-        </p:spPr>
-        <p:txBody>
-          <a:bodyPr wrap="square" lIns="0" tIns="0" rIns="0" bIns="0" rtlCol="0" anchor="ctr"/>
-          <a:lstStyle/>
-          <a:p>
-            <a:pPr indent="0" marL="0">
-              <a:buNone/>
-            </a:pPr>
-            <a:r>
-              <a:rPr lang="en-US" sz="1050" b="1" dirty="0">
-                <a:solidFill>
-                  <a:srgbClr val="E8A33D"/>
-                </a:solidFill>
-                <a:latin typeface="Calibri" pitchFamily="34" charset="0"/>
-                <a:ea typeface="Calibri" pitchFamily="34" charset="-122"/>
-                <a:cs typeface="Calibri" pitchFamily="34" charset="-120"/>
-              </a:rPr>
-              <a:t>CORREOS</a:t>
-            </a:r>
-            <a:endParaRPr lang="en-US" sz="1050" dirty="0"/>
-          </a:p>
-        </p:txBody>
-      </p:sp>
-      <p:sp>
-        <p:nvSpPr>
-          <p:cNvPr id="10" name="Text 8"/>
-          <p:cNvSpPr txBox="1"/>
-          <p:nvPr/>
-        </p:nvSpPr>
-        <p:spPr>
-          <a:xfrm>
-            <a:off x="4600346" y="2212848"/>
-            <a:ext cx="2991002" cy="365760"/>
-          </a:xfrm>
-          <a:prstGeom prst="rect">
-            <a:avLst/>
-          </a:prstGeom>
-          <a:noFill/>
-          <a:ln/>
-        </p:spPr>
-        <p:txBody>
-          <a:bodyPr wrap="square" lIns="0" tIns="0" rIns="0" bIns="0" rtlCol="0" anchor="ctr"/>
-          <a:lstStyle/>
-          <a:p>
-            <a:pPr indent="0" marL="0">
-              <a:buNone/>
-            </a:pPr>
-            <a:r>
-              <a:rPr lang="en-US" sz="1600" b="1" dirty="0">
-                <a:solidFill>
-                  <a:srgbClr val="14524A"/>
-                </a:solidFill>
-                <a:latin typeface="Cambria" pitchFamily="34" charset="0"/>
-                <a:ea typeface="Cambria" pitchFamily="34" charset="-122"/>
-                <a:cs typeface="Cambria" pitchFamily="34" charset="-120"/>
-              </a:rPr>
-              <a:t>Ocho avisos automáticos</a:t>
-            </a:r>
-            <a:endParaRPr lang="en-US" sz="1600" dirty="0"/>
-          </a:p>
-        </p:txBody>
-      </p:sp>
-      <p:sp>
-        <p:nvSpPr>
-          <p:cNvPr id="11" name="Text 9"/>
-          <p:cNvSpPr txBox="1"/>
-          <p:nvPr/>
-        </p:nvSpPr>
-        <p:spPr>
-          <a:xfrm>
-            <a:off x="4600346" y="2651760"/>
-            <a:ext cx="2991002" cy="1298448"/>
-          </a:xfrm>
-          <a:prstGeom prst="rect">
-            <a:avLst/>
-          </a:prstGeom>
-          <a:noFill/>
-          <a:ln/>
-        </p:spPr>
-        <p:txBody>
-          <a:bodyPr wrap="square" lIns="0" tIns="0" rIns="0" bIns="0" rtlCol="0" anchor="t"/>
-          <a:lstStyle/>
-          <a:p>
-            <a:pPr indent="0" marL="0">
-              <a:lnSpc>
-                <a:spcPts val="1740"/>
-              </a:lnSpc>
-              <a:buNone/>
-            </a:pPr>
-            <a:r>
-              <a:rPr lang="en-US" sz="1200" dirty="0">
-                <a:solidFill>
-                  <a:srgbClr val="1C2321"/>
-                </a:solidFill>
-                <a:latin typeface="Calibri" pitchFamily="34" charset="0"/>
-                <a:ea typeface="Calibri" pitchFamily="34" charset="-122"/>
-                <a:cs typeface="Calibri" pitchFamily="34" charset="-120"/>
-              </a:rPr>
-              <a:t>Bienvenida, pedido, factura, cita, despacho, cambio de plan, recordatorio de vacuna y mensaje de contacto. El recordatorio sale cada mañana a las 8:00 sin que nadie lo dispare (RN-20).</a:t>
-            </a:r>
-            <a:endParaRPr lang="en-US" sz="1200" dirty="0"/>
-          </a:p>
-        </p:txBody>
-      </p:sp>
-      <p:sp>
-        <p:nvSpPr>
-          <p:cNvPr id="12" name="Shape 10"/>
+          <p:cNvPr id="10" name="Shape 8"/>
           <p:cNvSpPr/>
           <p:nvPr/>
         </p:nvSpPr>
         <p:spPr>
           <a:xfrm>
-            <a:off x="8048549" y="1719072"/>
-            <a:ext cx="3503066" cy="2432304"/>
+            <a:off x="4582058" y="1956816"/>
+            <a:ext cx="1371600" cy="329184"/>
           </a:xfrm>
           <a:prstGeom prst="roundRect">
             <a:avLst>
-              <a:gd name="adj" fmla="val 1880"/>
-            </a:avLst>
-          </a:prstGeom>
-          <a:solidFill>
-            <a:srgbClr val="EEF5F1"/>
-          </a:solidFill>
-          <a:ln w="12700">
-            <a:solidFill>
-              <a:srgbClr val="D9E5DF"/>
-            </a:solidFill>
-            <a:prstDash val="solid"/>
-          </a:ln>
-        </p:spPr>
-      </p:sp>
-      <p:sp>
-        <p:nvSpPr>
-          <p:cNvPr id="13" name="Text 11"/>
-          <p:cNvSpPr txBox="1"/>
-          <p:nvPr/>
-        </p:nvSpPr>
-        <p:spPr>
-          <a:xfrm>
-            <a:off x="8304581" y="1920240"/>
-            <a:ext cx="2991002" cy="274320"/>
-          </a:xfrm>
-          <a:prstGeom prst="rect">
-            <a:avLst/>
-          </a:prstGeom>
-          <a:noFill/>
-          <a:ln/>
-        </p:spPr>
-        <p:txBody>
-          <a:bodyPr wrap="square" lIns="0" tIns="0" rIns="0" bIns="0" rtlCol="0" anchor="ctr"/>
-          <a:lstStyle/>
-          <a:p>
-            <a:pPr indent="0" marL="0">
-              <a:buNone/>
-            </a:pPr>
-            <a:r>
-              <a:rPr lang="en-US" sz="1050" b="1" dirty="0">
-                <a:solidFill>
-                  <a:srgbClr val="E8A33D"/>
-                </a:solidFill>
-                <a:latin typeface="Calibri" pitchFamily="34" charset="0"/>
-                <a:ea typeface="Calibri" pitchFamily="34" charset="-122"/>
-                <a:cs typeface="Calibri" pitchFamily="34" charset="-120"/>
-              </a:rPr>
-              <a:t>ACCESIBILIDAD</a:t>
-            </a:r>
-            <a:endParaRPr lang="en-US" sz="1050" dirty="0"/>
-          </a:p>
-        </p:txBody>
-      </p:sp>
-      <p:sp>
-        <p:nvSpPr>
-          <p:cNvPr id="14" name="Text 12"/>
-          <p:cNvSpPr txBox="1"/>
-          <p:nvPr/>
-        </p:nvSpPr>
-        <p:spPr>
-          <a:xfrm>
-            <a:off x="8304581" y="2212848"/>
-            <a:ext cx="2991002" cy="365760"/>
-          </a:xfrm>
-          <a:prstGeom prst="rect">
-            <a:avLst/>
-          </a:prstGeom>
-          <a:noFill/>
-          <a:ln/>
-        </p:spPr>
-        <p:txBody>
-          <a:bodyPr wrap="square" lIns="0" tIns="0" rIns="0" bIns="0" rtlCol="0" anchor="ctr"/>
-          <a:lstStyle/>
-          <a:p>
-            <a:pPr indent="0" marL="0">
-              <a:buNone/>
-            </a:pPr>
-            <a:r>
-              <a:rPr lang="en-US" sz="1600" b="1" dirty="0">
-                <a:solidFill>
-                  <a:srgbClr val="14524A"/>
-                </a:solidFill>
-                <a:latin typeface="Cambria" pitchFamily="34" charset="0"/>
-                <a:ea typeface="Cambria" pitchFamily="34" charset="-122"/>
-                <a:cs typeface="Cambria" pitchFamily="34" charset="-120"/>
-              </a:rPr>
-              <a:t>Usable en el celular</a:t>
-            </a:r>
-            <a:endParaRPr lang="en-US" sz="1600" dirty="0"/>
-          </a:p>
-        </p:txBody>
-      </p:sp>
-      <p:sp>
-        <p:nvSpPr>
-          <p:cNvPr id="15" name="Text 13"/>
-          <p:cNvSpPr txBox="1"/>
-          <p:nvPr/>
-        </p:nvSpPr>
-        <p:spPr>
-          <a:xfrm>
-            <a:off x="8304581" y="2651760"/>
-            <a:ext cx="2991002" cy="1298448"/>
-          </a:xfrm>
-          <a:prstGeom prst="rect">
-            <a:avLst/>
-          </a:prstGeom>
-          <a:noFill/>
-          <a:ln/>
-        </p:spPr>
-        <p:txBody>
-          <a:bodyPr wrap="square" lIns="0" tIns="0" rIns="0" bIns="0" rtlCol="0" anchor="t"/>
-          <a:lstStyle/>
-          <a:p>
-            <a:pPr indent="0" marL="0">
-              <a:lnSpc>
-                <a:spcPts val="1740"/>
-              </a:lnSpc>
-              <a:buNone/>
-            </a:pPr>
-            <a:r>
-              <a:rPr lang="en-US" sz="1200" dirty="0">
-                <a:solidFill>
-                  <a:srgbClr val="1C2321"/>
-                </a:solidFill>
-                <a:latin typeface="Calibri" pitchFamily="34" charset="0"/>
-                <a:ea typeface="Calibri" pitchFamily="34" charset="-122"/>
-                <a:cs typeface="Calibri" pitchFamily="34" charset="-120"/>
-              </a:rPr>
-              <a:t>Las tablas se reordenan en tarjetas en pantalla chica y cada dato conserva su etiqueta para el lector de pantalla. El chat anuncia su estado con atributos ARIA (RNF-01 y RNF-06).</a:t>
-            </a:r>
-            <a:endParaRPr lang="en-US" sz="1200" dirty="0"/>
-          </a:p>
-        </p:txBody>
-      </p:sp>
-      <p:sp>
-        <p:nvSpPr>
-          <p:cNvPr id="16" name="Shape 14"/>
-          <p:cNvSpPr/>
-          <p:nvPr/>
-        </p:nvSpPr>
-        <p:spPr>
-          <a:xfrm>
-            <a:off x="640080" y="4480560"/>
-            <a:ext cx="10911535" cy="1188720"/>
-          </a:xfrm>
-          <a:prstGeom prst="roundRect">
-            <a:avLst>
-              <a:gd name="adj" fmla="val 3846"/>
+              <a:gd name="adj" fmla="val 138889"/>
             </a:avLst>
           </a:prstGeom>
           <a:solidFill>
@@ -3727,60 +3740,453 @@
       </p:sp>
       <p:sp>
         <p:nvSpPr>
+          <p:cNvPr id="11" name="Text 9"/>
+          <p:cNvSpPr txBox="1"/>
+          <p:nvPr/>
+        </p:nvSpPr>
+        <p:spPr>
+          <a:xfrm>
+            <a:off x="4582058" y="1956816"/>
+            <a:ext cx="1371600" cy="329184"/>
+          </a:xfrm>
+          <a:prstGeom prst="rect">
+            <a:avLst/>
+          </a:prstGeom>
+          <a:noFill/>
+          <a:ln/>
+        </p:spPr>
+        <p:txBody>
+          <a:bodyPr wrap="square" lIns="0" tIns="0" rIns="0" bIns="0" rtlCol="0" anchor="ctr"/>
+          <a:lstStyle/>
+          <a:p>
+            <a:pPr algn="ctr" indent="0" marL="0">
+              <a:buNone/>
+            </a:pPr>
+            <a:r>
+              <a:rPr lang="en-US" sz="1100" b="1" dirty="0">
+                <a:solidFill>
+                  <a:srgbClr val="FFFFFF"/>
+                </a:solidFill>
+                <a:latin typeface="Courier New" pitchFamily="34" charset="0"/>
+                <a:ea typeface="Courier New" pitchFamily="34" charset="-122"/>
+                <a:cs typeface="Courier New" pitchFamily="34" charset="-120"/>
+              </a:rPr>
+              <a:t>db</a:t>
+            </a:r>
+            <a:endParaRPr lang="en-US" sz="1100" dirty="0"/>
+          </a:p>
+        </p:txBody>
+      </p:sp>
+      <p:sp>
+        <p:nvSpPr>
+          <p:cNvPr id="12" name="Text 10"/>
+          <p:cNvSpPr txBox="1"/>
+          <p:nvPr/>
+        </p:nvSpPr>
+        <p:spPr>
+          <a:xfrm>
+            <a:off x="4582058" y="2395728"/>
+            <a:ext cx="3027578" cy="384048"/>
+          </a:xfrm>
+          <a:prstGeom prst="rect">
+            <a:avLst/>
+          </a:prstGeom>
+          <a:noFill/>
+          <a:ln/>
+        </p:spPr>
+        <p:txBody>
+          <a:bodyPr wrap="square" lIns="0" tIns="0" rIns="0" bIns="0" rtlCol="0" anchor="ctr"/>
+          <a:lstStyle/>
+          <a:p>
+            <a:pPr indent="0" marL="0">
+              <a:buNone/>
+            </a:pPr>
+            <a:r>
+              <a:rPr lang="en-US" sz="1600" b="1" dirty="0">
+                <a:solidFill>
+                  <a:srgbClr val="14524A"/>
+                </a:solidFill>
+                <a:latin typeface="Cambria" pitchFamily="34" charset="0"/>
+                <a:ea typeface="Cambria" pitchFamily="34" charset="-122"/>
+                <a:cs typeface="Cambria" pitchFamily="34" charset="-120"/>
+              </a:rPr>
+              <a:t>La base de datos</a:t>
+            </a:r>
+            <a:endParaRPr lang="en-US" sz="1600" dirty="0"/>
+          </a:p>
+        </p:txBody>
+      </p:sp>
+      <p:sp>
+        <p:nvSpPr>
+          <p:cNvPr id="13" name="Text 11"/>
+          <p:cNvSpPr txBox="1"/>
+          <p:nvPr/>
+        </p:nvSpPr>
+        <p:spPr>
+          <a:xfrm>
+            <a:off x="4582058" y="2852928"/>
+            <a:ext cx="3027578" cy="1572768"/>
+          </a:xfrm>
+          <a:prstGeom prst="rect">
+            <a:avLst/>
+          </a:prstGeom>
+          <a:noFill/>
+          <a:ln/>
+        </p:spPr>
+        <p:txBody>
+          <a:bodyPr wrap="square" lIns="0" tIns="0" rIns="0" bIns="0" rtlCol="0" anchor="t"/>
+          <a:lstStyle/>
+          <a:p>
+            <a:pPr indent="0" marL="0">
+              <a:lnSpc>
+                <a:spcPts val="1600"/>
+              </a:lnSpc>
+              <a:buNone/>
+            </a:pPr>
+            <a:r>
+              <a:rPr lang="en-US" sz="1150" dirty="0">
+                <a:solidFill>
+                  <a:srgbClr val="1C2321"/>
+                </a:solidFill>
+                <a:latin typeface="Calibri" pitchFamily="34" charset="0"/>
+                <a:ea typeface="Calibri" pitchFamily="34" charset="-122"/>
+                <a:cs typeface="Calibri" pitchFamily="34" charset="-120"/>
+              </a:rPr>
+              <a:t>mysql:8.0 con volumen propio y verificación de salud: la aplicación no arranca hasta que el motor responde.</a:t>
+            </a:r>
+            <a:endParaRPr lang="en-US" sz="1150" dirty="0"/>
+          </a:p>
+        </p:txBody>
+      </p:sp>
+      <p:sp>
+        <p:nvSpPr>
+          <p:cNvPr id="14" name="Shape 12"/>
+          <p:cNvSpPr/>
+          <p:nvPr/>
+        </p:nvSpPr>
+        <p:spPr>
+          <a:xfrm>
+            <a:off x="8048549" y="1755648"/>
+            <a:ext cx="3503066" cy="2304288"/>
+          </a:xfrm>
+          <a:prstGeom prst="roundRect">
+            <a:avLst>
+              <a:gd name="adj" fmla="val 1984"/>
+            </a:avLst>
+          </a:prstGeom>
+          <a:solidFill>
+            <a:srgbClr val="14524A"/>
+          </a:solidFill>
+          <a:ln w="12700">
+            <a:solidFill>
+              <a:srgbClr val="14524A"/>
+            </a:solidFill>
+            <a:prstDash val="solid"/>
+          </a:ln>
+        </p:spPr>
+      </p:sp>
+      <p:sp>
+        <p:nvSpPr>
+          <p:cNvPr id="15" name="Shape 13"/>
+          <p:cNvSpPr/>
+          <p:nvPr/>
+        </p:nvSpPr>
+        <p:spPr>
+          <a:xfrm>
+            <a:off x="8286293" y="1956816"/>
+            <a:ext cx="1371600" cy="329184"/>
+          </a:xfrm>
+          <a:prstGeom prst="roundRect">
+            <a:avLst>
+              <a:gd name="adj" fmla="val 138889"/>
+            </a:avLst>
+          </a:prstGeom>
+          <a:solidFill>
+            <a:srgbClr val="E8A33D"/>
+          </a:solidFill>
+          <a:ln w="12700">
+            <a:solidFill>
+              <a:srgbClr val="E8A33D"/>
+            </a:solidFill>
+            <a:prstDash val="solid"/>
+          </a:ln>
+        </p:spPr>
+      </p:sp>
+      <p:sp>
+        <p:nvSpPr>
+          <p:cNvPr id="16" name="Text 14"/>
+          <p:cNvSpPr txBox="1"/>
+          <p:nvPr/>
+        </p:nvSpPr>
+        <p:spPr>
+          <a:xfrm>
+            <a:off x="8286293" y="1956816"/>
+            <a:ext cx="1371600" cy="329184"/>
+          </a:xfrm>
+          <a:prstGeom prst="rect">
+            <a:avLst/>
+          </a:prstGeom>
+          <a:noFill/>
+          <a:ln/>
+        </p:spPr>
+        <p:txBody>
+          <a:bodyPr wrap="square" lIns="0" tIns="0" rIns="0" bIns="0" rtlCol="0" anchor="ctr"/>
+          <a:lstStyle/>
+          <a:p>
+            <a:pPr algn="ctr" indent="0" marL="0">
+              <a:buNone/>
+            </a:pPr>
+            <a:r>
+              <a:rPr lang="en-US" sz="1100" b="1" dirty="0">
+                <a:solidFill>
+                  <a:srgbClr val="14524A"/>
+                </a:solidFill>
+                <a:latin typeface="Courier New" pitchFamily="34" charset="0"/>
+                <a:ea typeface="Courier New" pitchFamily="34" charset="-122"/>
+                <a:cs typeface="Courier New" pitchFamily="34" charset="-120"/>
+              </a:rPr>
+              <a:t>mailhog</a:t>
+            </a:r>
+            <a:endParaRPr lang="en-US" sz="1100" dirty="0"/>
+          </a:p>
+        </p:txBody>
+      </p:sp>
+      <p:sp>
+        <p:nvSpPr>
           <p:cNvPr id="17" name="Text 15"/>
           <p:cNvSpPr txBox="1"/>
           <p:nvPr/>
         </p:nvSpPr>
         <p:spPr>
           <a:xfrm>
-            <a:off x="950976" y="4480560"/>
-            <a:ext cx="10289743" cy="1188720"/>
-          </a:xfrm>
-          <a:prstGeom prst="rect">
-            <a:avLst/>
-          </a:prstGeom>
-          <a:noFill/>
-          <a:ln/>
-        </p:spPr>
-        <p:txBody>
-          <a:bodyPr wrap="square" lIns="0" tIns="0" rIns="0" bIns="0" rtlCol="0" anchor="ctr"/>
+            <a:off x="8286293" y="2395728"/>
+            <a:ext cx="3027578" cy="384048"/>
+          </a:xfrm>
+          <a:prstGeom prst="rect">
+            <a:avLst/>
+          </a:prstGeom>
+          <a:noFill/>
+          <a:ln/>
+        </p:spPr>
+        <p:txBody>
+          <a:bodyPr wrap="square" lIns="0" tIns="0" rIns="0" bIns="0" rtlCol="0" anchor="ctr"/>
+          <a:lstStyle/>
+          <a:p>
+            <a:pPr indent="0" marL="0">
+              <a:buNone/>
+            </a:pPr>
+            <a:r>
+              <a:rPr lang="en-US" sz="1600" b="1" dirty="0">
+                <a:solidFill>
+                  <a:srgbClr val="FFFFFF"/>
+                </a:solidFill>
+                <a:latin typeface="Cambria" pitchFamily="34" charset="0"/>
+                <a:ea typeface="Cambria" pitchFamily="34" charset="-122"/>
+                <a:cs typeface="Cambria" pitchFamily="34" charset="-120"/>
+              </a:rPr>
+              <a:t>El buzón de pruebas</a:t>
+            </a:r>
+            <a:endParaRPr lang="en-US" sz="1600" dirty="0"/>
+          </a:p>
+        </p:txBody>
+      </p:sp>
+      <p:sp>
+        <p:nvSpPr>
+          <p:cNvPr id="18" name="Text 16"/>
+          <p:cNvSpPr txBox="1"/>
+          <p:nvPr/>
+        </p:nvSpPr>
+        <p:spPr>
+          <a:xfrm>
+            <a:off x="8286293" y="2852928"/>
+            <a:ext cx="3027578" cy="1572768"/>
+          </a:xfrm>
+          <a:prstGeom prst="rect">
+            <a:avLst/>
+          </a:prstGeom>
+          <a:noFill/>
+          <a:ln/>
+        </p:spPr>
+        <p:txBody>
+          <a:bodyPr wrap="square" lIns="0" tIns="0" rIns="0" bIns="0" rtlCol="0" anchor="t"/>
           <a:lstStyle/>
           <a:p>
             <a:pPr indent="0" marL="0">
               <a:lnSpc>
-                <a:spcPts val="1700"/>
+                <a:spcPts val="1600"/>
               </a:lnSpc>
               <a:buNone/>
             </a:pPr>
             <a:r>
-              <a:rPr lang="en-US" sz="1200" b="1" dirty="0">
+              <a:rPr lang="en-US" sz="1150" dirty="0">
+                <a:solidFill>
+                  <a:srgbClr val="CFE3DC"/>
+                </a:solidFill>
+                <a:latin typeface="Calibri" pitchFamily="34" charset="0"/>
+                <a:ea typeface="Calibri" pitchFamily="34" charset="-122"/>
+                <a:cs typeface="Calibri" pitchFamily="34" charset="-120"/>
+              </a:rPr>
+              <a:t>Atrapa todos los correos que el sistema envía y los muestra en el navegador. Se demuestra el aviso real sin escribirle a un cliente.</a:t>
+            </a:r>
+            <a:endParaRPr lang="en-US" sz="1150" dirty="0"/>
+          </a:p>
+        </p:txBody>
+      </p:sp>
+      <p:sp>
+        <p:nvSpPr>
+          <p:cNvPr id="19" name="Shape 17"/>
+          <p:cNvSpPr/>
+          <p:nvPr/>
+        </p:nvSpPr>
+        <p:spPr>
+          <a:xfrm>
+            <a:off x="640080" y="4315968"/>
+            <a:ext cx="10911535" cy="621792"/>
+          </a:xfrm>
+          <a:prstGeom prst="roundRect">
+            <a:avLst>
+              <a:gd name="adj" fmla="val 7353"/>
+            </a:avLst>
+          </a:prstGeom>
+          <a:solidFill>
+            <a:srgbClr val="14524A"/>
+          </a:solidFill>
+          <a:ln w="12700">
+            <a:solidFill>
+              <a:srgbClr val="14524A"/>
+            </a:solidFill>
+            <a:prstDash val="solid"/>
+          </a:ln>
+        </p:spPr>
+      </p:sp>
+      <p:sp>
+        <p:nvSpPr>
+          <p:cNvPr id="20" name="Text 18"/>
+          <p:cNvSpPr txBox="1"/>
+          <p:nvPr/>
+        </p:nvSpPr>
+        <p:spPr>
+          <a:xfrm>
+            <a:off x="914400" y="4315968"/>
+            <a:ext cx="3657600" cy="621792"/>
+          </a:xfrm>
+          <a:prstGeom prst="rect">
+            <a:avLst/>
+          </a:prstGeom>
+          <a:noFill/>
+          <a:ln/>
+        </p:spPr>
+        <p:txBody>
+          <a:bodyPr wrap="square" lIns="0" tIns="0" rIns="0" bIns="0" rtlCol="0" anchor="ctr"/>
+          <a:lstStyle/>
+          <a:p>
+            <a:pPr indent="0" marL="0">
+              <a:buNone/>
+            </a:pPr>
+            <a:r>
+              <a:rPr lang="en-US" sz="1400" b="1" dirty="0">
                 <a:solidFill>
                   <a:srgbClr val="E8A33D"/>
                 </a:solidFill>
-                <a:latin typeface="Calibri" pitchFamily="34" charset="0"/>
-                <a:ea typeface="Calibri" pitchFamily="34" charset="-122"/>
-                <a:cs typeface="Calibri" pitchFamily="34" charset="-120"/>
-              </a:rPr>
-              <a:t xml:space="preserve">El asistente no es una caja negra.  </a:t>
-            </a:r>
-            <a:pPr indent="0" marL="0">
-              <a:lnSpc>
-                <a:spcPts val="1700"/>
-              </a:lnSpc>
+                <a:latin typeface="Courier New" pitchFamily="34" charset="0"/>
+                <a:ea typeface="Courier New" pitchFamily="34" charset="-122"/>
+                <a:cs typeface="Courier New" pitchFamily="34" charset="-120"/>
+              </a:rPr>
+              <a:t>docker compose up -d</a:t>
+            </a:r>
+            <a:endParaRPr lang="en-US" sz="1400" dirty="0"/>
+          </a:p>
+        </p:txBody>
+      </p:sp>
+      <p:sp>
+        <p:nvSpPr>
+          <p:cNvPr id="21" name="Text 19"/>
+          <p:cNvSpPr txBox="1"/>
+          <p:nvPr/>
+        </p:nvSpPr>
+        <p:spPr>
+          <a:xfrm>
+            <a:off x="4663440" y="4315968"/>
+            <a:ext cx="6613855" cy="621792"/>
+          </a:xfrm>
+          <a:prstGeom prst="rect">
+            <a:avLst/>
+          </a:prstGeom>
+          <a:noFill/>
+          <a:ln/>
+        </p:spPr>
+        <p:txBody>
+          <a:bodyPr wrap="square" lIns="0" tIns="0" rIns="0" bIns="0" rtlCol="0" anchor="ctr"/>
+          <a:lstStyle/>
+          <a:p>
+            <a:pPr indent="0" marL="0">
               <a:buNone/>
             </a:pPr>
             <a:r>
               <a:rPr lang="en-US" sz="1200" dirty="0">
                 <a:solidFill>
-                  <a:srgbClr val="FFFFFF"/>
-                </a:solidFill>
-                <a:latin typeface="Calibri" pitchFamily="34" charset="0"/>
-                <a:ea typeface="Calibri" pitchFamily="34" charset="-122"/>
-                <a:cs typeface="Calibri" pitchFamily="34" charset="-120"/>
-              </a:rPr>
-              <a:t>No usa inteligencia artificial externa ni servicios pagados: clasifica la pregunta con palabras clave y responde desde un único archivo de configuración. Y solo consulta los datos del cliente que está conectado, nunca los de otro (RN-01 y RN-04).</a:t>
+                  <a:srgbClr val="CFE3DC"/>
+                </a:solidFill>
+                <a:latin typeface="Calibri" pitchFamily="34" charset="0"/>
+                <a:ea typeface="Calibri" pitchFamily="34" charset="-122"/>
+                <a:cs typeface="Calibri" pitchFamily="34" charset="-120"/>
+              </a:rPr>
+              <a:t>Un solo comando deja el sistema corriendo, con la base creada y el buzón escuchando.</a:t>
             </a:r>
             <a:endParaRPr lang="en-US" sz="1200" dirty="0"/>
+          </a:p>
+        </p:txBody>
+      </p:sp>
+      <p:sp>
+        <p:nvSpPr>
+          <p:cNvPr id="22" name="Text 20"/>
+          <p:cNvSpPr txBox="1"/>
+          <p:nvPr/>
+        </p:nvSpPr>
+        <p:spPr>
+          <a:xfrm>
+            <a:off x="640080" y="5084064"/>
+            <a:ext cx="10911535" cy="512064"/>
+          </a:xfrm>
+          <a:prstGeom prst="rect">
+            <a:avLst/>
+          </a:prstGeom>
+          <a:noFill/>
+          <a:ln/>
+        </p:spPr>
+        <p:txBody>
+          <a:bodyPr wrap="square" lIns="0" tIns="0" rIns="0" bIns="0" rtlCol="0" anchor="ctr"/>
+          <a:lstStyle/>
+          <a:p>
+            <a:pPr indent="0" marL="0">
+              <a:buNone/>
+            </a:pPr>
+            <a:r>
+              <a:rPr lang="en-US" sz="1150" b="1" dirty="0">
+                <a:solidFill>
+                  <a:srgbClr val="5D6B66"/>
+                </a:solidFill>
+                <a:latin typeface="Calibri" pitchFamily="34" charset="0"/>
+                <a:ea typeface="Calibri" pitchFamily="34" charset="-122"/>
+                <a:cs typeface="Calibri" pitchFamily="34" charset="-120"/>
+              </a:rPr>
+              <a:t xml:space="preserve">La aplicación vive en public_html/ y la infraestructura fuera, en docker/. </a:t>
+            </a:r>
+            <a:pPr indent="0" marL="0">
+              <a:buNone/>
+            </a:pPr>
+            <a:r>
+              <a:rPr lang="en-US" sz="1150" dirty="0">
+                <a:solidFill>
+                  <a:srgbClr val="5D6B66"/>
+                </a:solidFill>
+                <a:latin typeface="Calibri" pitchFamily="34" charset="0"/>
+                <a:ea typeface="Calibri" pitchFamily="34" charset="-122"/>
+                <a:cs typeface="Calibri" pitchFamily="34" charset="-120"/>
+              </a:rPr>
+              <a:t>Es la convención de carpetas que ya se usa en la empresa, así que el proyecto se despliega igual que los demás.</a:t>
+            </a:r>
+            <a:endParaRPr lang="en-US" sz="1150" dirty="0"/>
           </a:p>
         </p:txBody>
       </p:sp>
@@ -3842,7 +4248,7 @@
                 <a:ea typeface="Cambria" pitchFamily="34" charset="-122"/>
                 <a:cs typeface="Cambria" pitchFamily="34" charset="-120"/>
               </a:rPr>
-              <a:t>Lo que se puede comprobar hoy</a:t>
+              <a:t>Cómo se hacen cumplir las reglas</a:t>
             </a:r>
             <a:endParaRPr lang="en-US" sz="3200" dirty="0"/>
           </a:p>
@@ -3881,7 +4287,7 @@
                 <a:ea typeface="Calibri" pitchFamily="34" charset="-122"/>
                 <a:cs typeface="Calibri" pitchFamily="34" charset="-120"/>
               </a:rPr>
-              <a:t>No es una maqueta: es una aplicación que se ejecuta y se prueba</a:t>
+              <a:t>La decisión técnica que sostiene todo el modelo de negocio</a:t>
             </a:r>
             <a:endParaRPr lang="en-US" sz="1400" dirty="0"/>
           </a:p>
@@ -3896,11 +4302,764 @@
         <p:spPr>
           <a:xfrm>
             <a:off x="640080" y="1682496"/>
-            <a:ext cx="5336896" cy="1828800"/>
+            <a:ext cx="2590724" cy="1060704"/>
           </a:xfrm>
           <a:prstGeom prst="roundRect">
             <a:avLst>
-              <a:gd name="adj" fmla="val 2500"/>
+              <a:gd name="adj" fmla="val 4310"/>
+            </a:avLst>
+          </a:prstGeom>
+          <a:solidFill>
+            <a:srgbClr val="EEF5F1"/>
+          </a:solidFill>
+          <a:ln w="12700">
+            <a:solidFill>
+              <a:srgbClr val="D9E5DF"/>
+            </a:solidFill>
+            <a:prstDash val="solid"/>
+          </a:ln>
+        </p:spPr>
+      </p:sp>
+      <p:sp>
+        <p:nvSpPr>
+          <p:cNvPr id="5" name="Text 3"/>
+          <p:cNvSpPr txBox="1"/>
+          <p:nvPr/>
+        </p:nvSpPr>
+        <p:spPr>
+          <a:xfrm>
+            <a:off x="640080" y="1773936"/>
+            <a:ext cx="2590724" cy="512064"/>
+          </a:xfrm>
+          <a:prstGeom prst="rect">
+            <a:avLst/>
+          </a:prstGeom>
+          <a:noFill/>
+          <a:ln/>
+        </p:spPr>
+        <p:txBody>
+          <a:bodyPr wrap="square" lIns="0" tIns="0" rIns="0" bIns="0" rtlCol="0" anchor="ctr"/>
+          <a:lstStyle/>
+          <a:p>
+            <a:pPr algn="ctr" indent="0" marL="0">
+              <a:buNone/>
+            </a:pPr>
+            <a:r>
+              <a:rPr lang="en-US" sz="3000" b="1" dirty="0">
+                <a:solidFill>
+                  <a:srgbClr val="14524A"/>
+                </a:solidFill>
+                <a:latin typeface="Cambria" pitchFamily="34" charset="0"/>
+                <a:ea typeface="Cambria" pitchFamily="34" charset="-122"/>
+                <a:cs typeface="Cambria" pitchFamily="34" charset="-120"/>
+              </a:rPr>
+              <a:t>9</a:t>
+            </a:r>
+            <a:endParaRPr lang="en-US" sz="3000" dirty="0"/>
+          </a:p>
+        </p:txBody>
+      </p:sp>
+      <p:sp>
+        <p:nvSpPr>
+          <p:cNvPr id="6" name="Text 4"/>
+          <p:cNvSpPr txBox="1"/>
+          <p:nvPr/>
+        </p:nvSpPr>
+        <p:spPr>
+          <a:xfrm>
+            <a:off x="640080" y="2286000"/>
+            <a:ext cx="2590724" cy="347472"/>
+          </a:xfrm>
+          <a:prstGeom prst="rect">
+            <a:avLst/>
+          </a:prstGeom>
+          <a:noFill/>
+          <a:ln/>
+        </p:spPr>
+        <p:txBody>
+          <a:bodyPr wrap="square" lIns="0" tIns="0" rIns="0" bIns="0" rtlCol="0" anchor="ctr"/>
+          <a:lstStyle/>
+          <a:p>
+            <a:pPr algn="ctr" indent="0" marL="0">
+              <a:buNone/>
+            </a:pPr>
+            <a:r>
+              <a:rPr lang="en-US" sz="1150" dirty="0">
+                <a:solidFill>
+                  <a:srgbClr val="5D6B66"/>
+                </a:solidFill>
+                <a:latin typeface="Calibri" pitchFamily="34" charset="0"/>
+                <a:ea typeface="Calibri" pitchFamily="34" charset="-122"/>
+                <a:cs typeface="Calibri" pitchFamily="34" charset="-120"/>
+              </a:rPr>
+              <a:t>tablas</a:t>
+            </a:r>
+            <a:endParaRPr lang="en-US" sz="1150" dirty="0"/>
+          </a:p>
+        </p:txBody>
+      </p:sp>
+      <p:sp>
+        <p:nvSpPr>
+          <p:cNvPr id="7" name="Shape 5"/>
+          <p:cNvSpPr/>
+          <p:nvPr/>
+        </p:nvSpPr>
+        <p:spPr>
+          <a:xfrm>
+            <a:off x="3413684" y="1682496"/>
+            <a:ext cx="2590724" cy="1060704"/>
+          </a:xfrm>
+          <a:prstGeom prst="roundRect">
+            <a:avLst>
+              <a:gd name="adj" fmla="val 4310"/>
+            </a:avLst>
+          </a:prstGeom>
+          <a:solidFill>
+            <a:srgbClr val="EEF5F1"/>
+          </a:solidFill>
+          <a:ln w="12700">
+            <a:solidFill>
+              <a:srgbClr val="D9E5DF"/>
+            </a:solidFill>
+            <a:prstDash val="solid"/>
+          </a:ln>
+        </p:spPr>
+      </p:sp>
+      <p:sp>
+        <p:nvSpPr>
+          <p:cNvPr id="8" name="Text 6"/>
+          <p:cNvSpPr txBox="1"/>
+          <p:nvPr/>
+        </p:nvSpPr>
+        <p:spPr>
+          <a:xfrm>
+            <a:off x="3413684" y="1773936"/>
+            <a:ext cx="2590724" cy="512064"/>
+          </a:xfrm>
+          <a:prstGeom prst="rect">
+            <a:avLst/>
+          </a:prstGeom>
+          <a:noFill/>
+          <a:ln/>
+        </p:spPr>
+        <p:txBody>
+          <a:bodyPr wrap="square" lIns="0" tIns="0" rIns="0" bIns="0" rtlCol="0" anchor="ctr"/>
+          <a:lstStyle/>
+          <a:p>
+            <a:pPr algn="ctr" indent="0" marL="0">
+              <a:buNone/>
+            </a:pPr>
+            <a:r>
+              <a:rPr lang="en-US" sz="3000" b="1" dirty="0">
+                <a:solidFill>
+                  <a:srgbClr val="14524A"/>
+                </a:solidFill>
+                <a:latin typeface="Cambria" pitchFamily="34" charset="0"/>
+                <a:ea typeface="Cambria" pitchFamily="34" charset="-122"/>
+                <a:cs typeface="Cambria" pitchFamily="34" charset="-120"/>
+              </a:rPr>
+              <a:t>14</a:t>
+            </a:r>
+            <a:endParaRPr lang="en-US" sz="3000" dirty="0"/>
+          </a:p>
+        </p:txBody>
+      </p:sp>
+      <p:sp>
+        <p:nvSpPr>
+          <p:cNvPr id="9" name="Text 7"/>
+          <p:cNvSpPr txBox="1"/>
+          <p:nvPr/>
+        </p:nvSpPr>
+        <p:spPr>
+          <a:xfrm>
+            <a:off x="3413684" y="2286000"/>
+            <a:ext cx="2590724" cy="347472"/>
+          </a:xfrm>
+          <a:prstGeom prst="rect">
+            <a:avLst/>
+          </a:prstGeom>
+          <a:noFill/>
+          <a:ln/>
+        </p:spPr>
+        <p:txBody>
+          <a:bodyPr wrap="square" lIns="0" tIns="0" rIns="0" bIns="0" rtlCol="0" anchor="ctr"/>
+          <a:lstStyle/>
+          <a:p>
+            <a:pPr algn="ctr" indent="0" marL="0">
+              <a:buNone/>
+            </a:pPr>
+            <a:r>
+              <a:rPr lang="en-US" sz="1150" dirty="0">
+                <a:solidFill>
+                  <a:srgbClr val="5D6B66"/>
+                </a:solidFill>
+                <a:latin typeface="Calibri" pitchFamily="34" charset="0"/>
+                <a:ea typeface="Calibri" pitchFamily="34" charset="-122"/>
+                <a:cs typeface="Calibri" pitchFamily="34" charset="-120"/>
+              </a:rPr>
+              <a:t>servicios de dominio</a:t>
+            </a:r>
+            <a:endParaRPr lang="en-US" sz="1150" dirty="0"/>
+          </a:p>
+        </p:txBody>
+      </p:sp>
+      <p:sp>
+        <p:nvSpPr>
+          <p:cNvPr id="10" name="Shape 8"/>
+          <p:cNvSpPr/>
+          <p:nvPr/>
+        </p:nvSpPr>
+        <p:spPr>
+          <a:xfrm>
+            <a:off x="6187288" y="1682496"/>
+            <a:ext cx="2590724" cy="1060704"/>
+          </a:xfrm>
+          <a:prstGeom prst="roundRect">
+            <a:avLst>
+              <a:gd name="adj" fmla="val 4310"/>
+            </a:avLst>
+          </a:prstGeom>
+          <a:solidFill>
+            <a:srgbClr val="EEF5F1"/>
+          </a:solidFill>
+          <a:ln w="12700">
+            <a:solidFill>
+              <a:srgbClr val="D9E5DF"/>
+            </a:solidFill>
+            <a:prstDash val="solid"/>
+          </a:ln>
+        </p:spPr>
+      </p:sp>
+      <p:sp>
+        <p:nvSpPr>
+          <p:cNvPr id="11" name="Text 9"/>
+          <p:cNvSpPr txBox="1"/>
+          <p:nvPr/>
+        </p:nvSpPr>
+        <p:spPr>
+          <a:xfrm>
+            <a:off x="6187288" y="1773936"/>
+            <a:ext cx="2590724" cy="512064"/>
+          </a:xfrm>
+          <a:prstGeom prst="rect">
+            <a:avLst/>
+          </a:prstGeom>
+          <a:noFill/>
+          <a:ln/>
+        </p:spPr>
+        <p:txBody>
+          <a:bodyPr wrap="square" lIns="0" tIns="0" rIns="0" bIns="0" rtlCol="0" anchor="ctr"/>
+          <a:lstStyle/>
+          <a:p>
+            <a:pPr algn="ctr" indent="0" marL="0">
+              <a:buNone/>
+            </a:pPr>
+            <a:r>
+              <a:rPr lang="en-US" sz="3000" b="1" dirty="0">
+                <a:solidFill>
+                  <a:srgbClr val="14524A"/>
+                </a:solidFill>
+                <a:latin typeface="Cambria" pitchFamily="34" charset="0"/>
+                <a:ea typeface="Cambria" pitchFamily="34" charset="-122"/>
+                <a:cs typeface="Cambria" pitchFamily="34" charset="-120"/>
+              </a:rPr>
+              <a:t>32</a:t>
+            </a:r>
+            <a:endParaRPr lang="en-US" sz="3000" dirty="0"/>
+          </a:p>
+        </p:txBody>
+      </p:sp>
+      <p:sp>
+        <p:nvSpPr>
+          <p:cNvPr id="12" name="Text 10"/>
+          <p:cNvSpPr txBox="1"/>
+          <p:nvPr/>
+        </p:nvSpPr>
+        <p:spPr>
+          <a:xfrm>
+            <a:off x="6187288" y="2286000"/>
+            <a:ext cx="2590724" cy="347472"/>
+          </a:xfrm>
+          <a:prstGeom prst="rect">
+            <a:avLst/>
+          </a:prstGeom>
+          <a:noFill/>
+          <a:ln/>
+        </p:spPr>
+        <p:txBody>
+          <a:bodyPr wrap="square" lIns="0" tIns="0" rIns="0" bIns="0" rtlCol="0" anchor="ctr"/>
+          <a:lstStyle/>
+          <a:p>
+            <a:pPr algn="ctr" indent="0" marL="0">
+              <a:buNone/>
+            </a:pPr>
+            <a:r>
+              <a:rPr lang="en-US" sz="1150" dirty="0">
+                <a:solidFill>
+                  <a:srgbClr val="5D6B66"/>
+                </a:solidFill>
+                <a:latin typeface="Calibri" pitchFamily="34" charset="0"/>
+                <a:ea typeface="Calibri" pitchFamily="34" charset="-122"/>
+                <a:cs typeface="Calibri" pitchFamily="34" charset="-120"/>
+              </a:rPr>
+              <a:t>rutas propias</a:t>
+            </a:r>
+            <a:endParaRPr lang="en-US" sz="1150" dirty="0"/>
+          </a:p>
+        </p:txBody>
+      </p:sp>
+      <p:sp>
+        <p:nvSpPr>
+          <p:cNvPr id="13" name="Shape 11"/>
+          <p:cNvSpPr/>
+          <p:nvPr/>
+        </p:nvSpPr>
+        <p:spPr>
+          <a:xfrm>
+            <a:off x="8960891" y="1682496"/>
+            <a:ext cx="2590724" cy="1060704"/>
+          </a:xfrm>
+          <a:prstGeom prst="roundRect">
+            <a:avLst>
+              <a:gd name="adj" fmla="val 4310"/>
+            </a:avLst>
+          </a:prstGeom>
+          <a:solidFill>
+            <a:srgbClr val="EEF5F1"/>
+          </a:solidFill>
+          <a:ln w="12700">
+            <a:solidFill>
+              <a:srgbClr val="D9E5DF"/>
+            </a:solidFill>
+            <a:prstDash val="solid"/>
+          </a:ln>
+        </p:spPr>
+      </p:sp>
+      <p:sp>
+        <p:nvSpPr>
+          <p:cNvPr id="14" name="Text 12"/>
+          <p:cNvSpPr txBox="1"/>
+          <p:nvPr/>
+        </p:nvSpPr>
+        <p:spPr>
+          <a:xfrm>
+            <a:off x="8960891" y="1773936"/>
+            <a:ext cx="2590724" cy="512064"/>
+          </a:xfrm>
+          <a:prstGeom prst="rect">
+            <a:avLst/>
+          </a:prstGeom>
+          <a:noFill/>
+          <a:ln/>
+        </p:spPr>
+        <p:txBody>
+          <a:bodyPr wrap="square" lIns="0" tIns="0" rIns="0" bIns="0" rtlCol="0" anchor="ctr"/>
+          <a:lstStyle/>
+          <a:p>
+            <a:pPr algn="ctr" indent="0" marL="0">
+              <a:buNone/>
+            </a:pPr>
+            <a:r>
+              <a:rPr lang="en-US" sz="3000" b="1" dirty="0">
+                <a:solidFill>
+                  <a:srgbClr val="14524A"/>
+                </a:solidFill>
+                <a:latin typeface="Cambria" pitchFamily="34" charset="0"/>
+                <a:ea typeface="Cambria" pitchFamily="34" charset="-122"/>
+                <a:cs typeface="Cambria" pitchFamily="34" charset="-120"/>
+              </a:rPr>
+              <a:t>3</a:t>
+            </a:r>
+            <a:endParaRPr lang="en-US" sz="3000" dirty="0"/>
+          </a:p>
+        </p:txBody>
+      </p:sp>
+      <p:sp>
+        <p:nvSpPr>
+          <p:cNvPr id="15" name="Text 13"/>
+          <p:cNvSpPr txBox="1"/>
+          <p:nvPr/>
+        </p:nvSpPr>
+        <p:spPr>
+          <a:xfrm>
+            <a:off x="8960891" y="2286000"/>
+            <a:ext cx="2590724" cy="347472"/>
+          </a:xfrm>
+          <a:prstGeom prst="rect">
+            <a:avLst/>
+          </a:prstGeom>
+          <a:noFill/>
+          <a:ln/>
+        </p:spPr>
+        <p:txBody>
+          <a:bodyPr wrap="square" lIns="0" tIns="0" rIns="0" bIns="0" rtlCol="0" anchor="ctr"/>
+          <a:lstStyle/>
+          <a:p>
+            <a:pPr algn="ctr" indent="0" marL="0">
+              <a:buNone/>
+            </a:pPr>
+            <a:r>
+              <a:rPr lang="en-US" sz="1150" dirty="0">
+                <a:solidFill>
+                  <a:srgbClr val="5D6B66"/>
+                </a:solidFill>
+                <a:latin typeface="Calibri" pitchFamily="34" charset="0"/>
+                <a:ea typeface="Calibri" pitchFamily="34" charset="-122"/>
+                <a:cs typeface="Calibri" pitchFamily="34" charset="-120"/>
+              </a:rPr>
+              <a:t>perfiles de acceso</a:t>
+            </a:r>
+            <a:endParaRPr lang="en-US" sz="1150" dirty="0"/>
+          </a:p>
+        </p:txBody>
+      </p:sp>
+      <p:sp>
+        <p:nvSpPr>
+          <p:cNvPr id="16" name="Text 14"/>
+          <p:cNvSpPr txBox="1"/>
+          <p:nvPr/>
+        </p:nvSpPr>
+        <p:spPr>
+          <a:xfrm>
+            <a:off x="640080" y="2889504"/>
+            <a:ext cx="10911535" cy="365760"/>
+          </a:xfrm>
+          <a:prstGeom prst="rect">
+            <a:avLst/>
+          </a:prstGeom>
+          <a:noFill/>
+          <a:ln/>
+        </p:spPr>
+        <p:txBody>
+          <a:bodyPr wrap="square" lIns="0" tIns="0" rIns="0" bIns="0" rtlCol="0" anchor="ctr"/>
+          <a:lstStyle/>
+          <a:p>
+            <a:pPr indent="0" marL="0">
+              <a:buNone/>
+            </a:pPr>
+            <a:r>
+              <a:rPr lang="en-US" sz="1700" b="1" dirty="0">
+                <a:solidFill>
+                  <a:srgbClr val="14524A"/>
+                </a:solidFill>
+                <a:latin typeface="Cambria" pitchFamily="34" charset="0"/>
+                <a:ea typeface="Cambria" pitchFamily="34" charset="-122"/>
+                <a:cs typeface="Cambria" pitchFamily="34" charset="-120"/>
+              </a:rPr>
+              <a:t>Cada regla se hace cumplir dos veces</a:t>
+            </a:r>
+            <a:endParaRPr lang="en-US" sz="1700" dirty="0"/>
+          </a:p>
+        </p:txBody>
+      </p:sp>
+      <p:sp>
+        <p:nvSpPr>
+          <p:cNvPr id="17" name="Shape 15"/>
+          <p:cNvSpPr/>
+          <p:nvPr/>
+        </p:nvSpPr>
+        <p:spPr>
+          <a:xfrm>
+            <a:off x="640080" y="3346704"/>
+            <a:ext cx="5336896" cy="1481328"/>
+          </a:xfrm>
+          <a:prstGeom prst="roundRect">
+            <a:avLst>
+              <a:gd name="adj" fmla="val 3086"/>
+            </a:avLst>
+          </a:prstGeom>
+          <a:solidFill>
+            <a:srgbClr val="EEF5F1"/>
+          </a:solidFill>
+          <a:ln w="12700">
+            <a:solidFill>
+              <a:srgbClr val="D9E5DF"/>
+            </a:solidFill>
+            <a:prstDash val="solid"/>
+          </a:ln>
+        </p:spPr>
+      </p:sp>
+      <p:sp>
+        <p:nvSpPr>
+          <p:cNvPr id="18" name="Text 16"/>
+          <p:cNvSpPr txBox="1"/>
+          <p:nvPr/>
+        </p:nvSpPr>
+        <p:spPr>
+          <a:xfrm>
+            <a:off x="896112" y="3547872"/>
+            <a:ext cx="4824832" cy="274320"/>
+          </a:xfrm>
+          <a:prstGeom prst="rect">
+            <a:avLst/>
+          </a:prstGeom>
+          <a:noFill/>
+          <a:ln/>
+        </p:spPr>
+        <p:txBody>
+          <a:bodyPr wrap="square" lIns="0" tIns="0" rIns="0" bIns="0" rtlCol="0" anchor="ctr"/>
+          <a:lstStyle/>
+          <a:p>
+            <a:pPr indent="0" marL="0">
+              <a:buNone/>
+            </a:pPr>
+            <a:r>
+              <a:rPr lang="en-US" sz="1050" b="1" dirty="0">
+                <a:solidFill>
+                  <a:srgbClr val="E8A33D"/>
+                </a:solidFill>
+                <a:latin typeface="Calibri" pitchFamily="34" charset="0"/>
+                <a:ea typeface="Calibri" pitchFamily="34" charset="-122"/>
+                <a:cs typeface="Calibri" pitchFamily="34" charset="-120"/>
+              </a:rPr>
+              <a:t>CAPA 1  ·  LA APLICACIÓN</a:t>
+            </a:r>
+            <a:endParaRPr lang="en-US" sz="1050" dirty="0"/>
+          </a:p>
+        </p:txBody>
+      </p:sp>
+      <p:sp>
+        <p:nvSpPr>
+          <p:cNvPr id="19" name="Text 17"/>
+          <p:cNvSpPr txBox="1"/>
+          <p:nvPr/>
+        </p:nvSpPr>
+        <p:spPr>
+          <a:xfrm>
+            <a:off x="896112" y="3840480"/>
+            <a:ext cx="4824832" cy="365760"/>
+          </a:xfrm>
+          <a:prstGeom prst="rect">
+            <a:avLst/>
+          </a:prstGeom>
+          <a:noFill/>
+          <a:ln/>
+        </p:spPr>
+        <p:txBody>
+          <a:bodyPr wrap="square" lIns="0" tIns="0" rIns="0" bIns="0" rtlCol="0" anchor="ctr"/>
+          <a:lstStyle/>
+          <a:p>
+            <a:pPr indent="0" marL="0">
+              <a:buNone/>
+            </a:pPr>
+            <a:r>
+              <a:rPr lang="en-US" sz="1600" b="1" dirty="0">
+                <a:solidFill>
+                  <a:srgbClr val="14524A"/>
+                </a:solidFill>
+                <a:latin typeface="Cambria" pitchFamily="34" charset="0"/>
+                <a:ea typeface="Cambria" pitchFamily="34" charset="-122"/>
+                <a:cs typeface="Cambria" pitchFamily="34" charset="-120"/>
+              </a:rPr>
+              <a:t>El servicio decide y avisa</a:t>
+            </a:r>
+            <a:endParaRPr lang="en-US" sz="1600" dirty="0"/>
+          </a:p>
+        </p:txBody>
+      </p:sp>
+      <p:sp>
+        <p:nvSpPr>
+          <p:cNvPr id="20" name="Text 18"/>
+          <p:cNvSpPr txBox="1"/>
+          <p:nvPr/>
+        </p:nvSpPr>
+        <p:spPr>
+          <a:xfrm>
+            <a:off x="896112" y="4279392"/>
+            <a:ext cx="4824832" cy="347472"/>
+          </a:xfrm>
+          <a:prstGeom prst="rect">
+            <a:avLst/>
+          </a:prstGeom>
+          <a:noFill/>
+          <a:ln/>
+        </p:spPr>
+        <p:txBody>
+          <a:bodyPr wrap="square" lIns="0" tIns="0" rIns="0" bIns="0" rtlCol="0" anchor="t"/>
+          <a:lstStyle/>
+          <a:p>
+            <a:pPr indent="0" marL="0">
+              <a:lnSpc>
+                <a:spcPts val="1740"/>
+              </a:lnSpc>
+              <a:buNone/>
+            </a:pPr>
+            <a:r>
+              <a:rPr lang="en-US" sz="1200" dirty="0">
+                <a:solidFill>
+                  <a:srgbClr val="1C2321"/>
+                </a:solidFill>
+                <a:latin typeface="Calibri" pitchFamily="34" charset="0"/>
+                <a:ea typeface="Calibri" pitchFamily="34" charset="-122"/>
+                <a:cs typeface="Calibri" pitchFamily="34" charset="-120"/>
+              </a:rPr>
+              <a:t>Comprueba la regla y devuelve un mensaje que el cliente entiende: qué producto falta y cuántas unidades quedan.</a:t>
+            </a:r>
+            <a:endParaRPr lang="en-US" sz="1200" dirty="0"/>
+          </a:p>
+        </p:txBody>
+      </p:sp>
+      <p:sp>
+        <p:nvSpPr>
+          <p:cNvPr id="21" name="Shape 19"/>
+          <p:cNvSpPr/>
+          <p:nvPr/>
+        </p:nvSpPr>
+        <p:spPr>
+          <a:xfrm>
+            <a:off x="6214720" y="3346704"/>
+            <a:ext cx="5336896" cy="1481328"/>
+          </a:xfrm>
+          <a:prstGeom prst="roundRect">
+            <a:avLst>
+              <a:gd name="adj" fmla="val 3086"/>
+            </a:avLst>
+          </a:prstGeom>
+          <a:solidFill>
+            <a:srgbClr val="EEF5F1"/>
+          </a:solidFill>
+          <a:ln w="12700">
+            <a:solidFill>
+              <a:srgbClr val="D9E5DF"/>
+            </a:solidFill>
+            <a:prstDash val="solid"/>
+          </a:ln>
+        </p:spPr>
+      </p:sp>
+      <p:sp>
+        <p:nvSpPr>
+          <p:cNvPr id="22" name="Text 20"/>
+          <p:cNvSpPr txBox="1"/>
+          <p:nvPr/>
+        </p:nvSpPr>
+        <p:spPr>
+          <a:xfrm>
+            <a:off x="6470752" y="3547872"/>
+            <a:ext cx="4824832" cy="274320"/>
+          </a:xfrm>
+          <a:prstGeom prst="rect">
+            <a:avLst/>
+          </a:prstGeom>
+          <a:noFill/>
+          <a:ln/>
+        </p:spPr>
+        <p:txBody>
+          <a:bodyPr wrap="square" lIns="0" tIns="0" rIns="0" bIns="0" rtlCol="0" anchor="ctr"/>
+          <a:lstStyle/>
+          <a:p>
+            <a:pPr indent="0" marL="0">
+              <a:buNone/>
+            </a:pPr>
+            <a:r>
+              <a:rPr lang="en-US" sz="1050" b="1" dirty="0">
+                <a:solidFill>
+                  <a:srgbClr val="E8A33D"/>
+                </a:solidFill>
+                <a:latin typeface="Calibri" pitchFamily="34" charset="0"/>
+                <a:ea typeface="Calibri" pitchFamily="34" charset="-122"/>
+                <a:cs typeface="Calibri" pitchFamily="34" charset="-120"/>
+              </a:rPr>
+              <a:t>CAPA 2  ·  LA BASE DE DATOS</a:t>
+            </a:r>
+            <a:endParaRPr lang="en-US" sz="1050" dirty="0"/>
+          </a:p>
+        </p:txBody>
+      </p:sp>
+      <p:sp>
+        <p:nvSpPr>
+          <p:cNvPr id="23" name="Text 21"/>
+          <p:cNvSpPr txBox="1"/>
+          <p:nvPr/>
+        </p:nvSpPr>
+        <p:spPr>
+          <a:xfrm>
+            <a:off x="6470752" y="3840480"/>
+            <a:ext cx="4824832" cy="365760"/>
+          </a:xfrm>
+          <a:prstGeom prst="rect">
+            <a:avLst/>
+          </a:prstGeom>
+          <a:noFill/>
+          <a:ln/>
+        </p:spPr>
+        <p:txBody>
+          <a:bodyPr wrap="square" lIns="0" tIns="0" rIns="0" bIns="0" rtlCol="0" anchor="ctr"/>
+          <a:lstStyle/>
+          <a:p>
+            <a:pPr indent="0" marL="0">
+              <a:buNone/>
+            </a:pPr>
+            <a:r>
+              <a:rPr lang="en-US" sz="1600" b="1" dirty="0">
+                <a:solidFill>
+                  <a:srgbClr val="14524A"/>
+                </a:solidFill>
+                <a:latin typeface="Cambria" pitchFamily="34" charset="0"/>
+                <a:ea typeface="Cambria" pitchFamily="34" charset="-122"/>
+                <a:cs typeface="Cambria" pitchFamily="34" charset="-120"/>
+              </a:rPr>
+              <a:t>El motor la garantiza</a:t>
+            </a:r>
+            <a:endParaRPr lang="en-US" sz="1600" dirty="0"/>
+          </a:p>
+        </p:txBody>
+      </p:sp>
+      <p:sp>
+        <p:nvSpPr>
+          <p:cNvPr id="24" name="Text 22"/>
+          <p:cNvSpPr txBox="1"/>
+          <p:nvPr/>
+        </p:nvSpPr>
+        <p:spPr>
+          <a:xfrm>
+            <a:off x="6470752" y="4279392"/>
+            <a:ext cx="4824832" cy="347472"/>
+          </a:xfrm>
+          <a:prstGeom prst="rect">
+            <a:avLst/>
+          </a:prstGeom>
+          <a:noFill/>
+          <a:ln/>
+        </p:spPr>
+        <p:txBody>
+          <a:bodyPr wrap="square" lIns="0" tIns="0" rIns="0" bIns="0" rtlCol="0" anchor="t"/>
+          <a:lstStyle/>
+          <a:p>
+            <a:pPr indent="0" marL="0">
+              <a:lnSpc>
+                <a:spcPts val="1740"/>
+              </a:lnSpc>
+              <a:buNone/>
+            </a:pPr>
+            <a:r>
+              <a:rPr lang="en-US" sz="1200" dirty="0">
+                <a:solidFill>
+                  <a:srgbClr val="1C2321"/>
+                </a:solidFill>
+                <a:latin typeface="Calibri" pitchFamily="34" charset="0"/>
+                <a:ea typeface="Calibri" pitchFamily="34" charset="-122"/>
+                <a:cs typeface="Calibri" pitchFamily="34" charset="-120"/>
+              </a:rPr>
+              <a:t>Restricciones en las tablas. Aunque un error de programación futuro se salte la capa anterior, el dato inválido no entra.</a:t>
+            </a:r>
+            <a:endParaRPr lang="en-US" sz="1200" dirty="0"/>
+          </a:p>
+        </p:txBody>
+      </p:sp>
+      <p:sp>
+        <p:nvSpPr>
+          <p:cNvPr id="25" name="Shape 23"/>
+          <p:cNvSpPr/>
+          <p:nvPr/>
+        </p:nvSpPr>
+        <p:spPr>
+          <a:xfrm>
+            <a:off x="640080" y="4992624"/>
+            <a:ext cx="10911535" cy="914400"/>
+          </a:xfrm>
+          <a:prstGeom prst="roundRect">
+            <a:avLst>
+              <a:gd name="adj" fmla="val 5000"/>
             </a:avLst>
           </a:prstGeom>
           <a:solidFill>
@@ -3916,353 +5075,60 @@
       </p:sp>
       <p:sp>
         <p:nvSpPr>
-          <p:cNvPr id="5" name="Text 3"/>
-          <p:cNvSpPr txBox="1"/>
-          <p:nvPr/>
-        </p:nvSpPr>
-        <p:spPr>
-          <a:xfrm>
-            <a:off x="914400" y="1792224"/>
-            <a:ext cx="1828800" cy="877824"/>
-          </a:xfrm>
-          <a:prstGeom prst="rect">
-            <a:avLst/>
-          </a:prstGeom>
-          <a:noFill/>
-          <a:ln/>
-        </p:spPr>
-        <p:txBody>
-          <a:bodyPr wrap="square" lIns="0" tIns="0" rIns="0" bIns="0" rtlCol="0" anchor="ctr"/>
-          <a:lstStyle/>
-          <a:p>
-            <a:pPr indent="0" marL="0">
-              <a:buNone/>
-            </a:pPr>
-            <a:r>
-              <a:rPr lang="en-US" sz="5200" b="1" dirty="0">
+          <p:cNvPr id="26" name="Text 24"/>
+          <p:cNvSpPr txBox="1"/>
+          <p:nvPr/>
+        </p:nvSpPr>
+        <p:spPr>
+          <a:xfrm>
+            <a:off x="950976" y="4992624"/>
+            <a:ext cx="10289743" cy="914400"/>
+          </a:xfrm>
+          <a:prstGeom prst="rect">
+            <a:avLst/>
+          </a:prstGeom>
+          <a:noFill/>
+          <a:ln/>
+        </p:spPr>
+        <p:txBody>
+          <a:bodyPr wrap="square" lIns="0" tIns="0" rIns="0" bIns="0" rtlCol="0" anchor="ctr"/>
+          <a:lstStyle/>
+          <a:p>
+            <a:pPr indent="0" marL="0">
+              <a:lnSpc>
+                <a:spcPts val="1700"/>
+              </a:lnSpc>
+              <a:buNone/>
+            </a:pPr>
+            <a:r>
+              <a:rPr lang="en-US" sz="1200" b="1" dirty="0">
                 <a:solidFill>
                   <a:srgbClr val="E8A33D"/>
                 </a:solidFill>
-                <a:latin typeface="Cambria" pitchFamily="34" charset="0"/>
-                <a:ea typeface="Cambria" pitchFamily="34" charset="-122"/>
-                <a:cs typeface="Cambria" pitchFamily="34" charset="-120"/>
-              </a:rPr>
-              <a:t>137</a:t>
-            </a:r>
-            <a:endParaRPr lang="en-US" sz="5200" dirty="0"/>
-          </a:p>
-        </p:txBody>
-      </p:sp>
-      <p:sp>
-        <p:nvSpPr>
-          <p:cNvPr id="6" name="Text 4"/>
-          <p:cNvSpPr txBox="1"/>
-          <p:nvPr/>
-        </p:nvSpPr>
-        <p:spPr>
-          <a:xfrm>
-            <a:off x="2743200" y="1792224"/>
-            <a:ext cx="2959456" cy="877824"/>
-          </a:xfrm>
-          <a:prstGeom prst="rect">
-            <a:avLst/>
-          </a:prstGeom>
-          <a:noFill/>
-          <a:ln/>
-        </p:spPr>
-        <p:txBody>
-          <a:bodyPr wrap="square" lIns="0" tIns="0" rIns="0" bIns="0" rtlCol="0" anchor="ctr"/>
-          <a:lstStyle/>
-          <a:p>
-            <a:pPr indent="0" marL="0">
-              <a:buNone/>
-            </a:pPr>
-            <a:r>
-              <a:rPr lang="en-US" sz="1500" b="1" dirty="0">
+                <a:latin typeface="Calibri" pitchFamily="34" charset="0"/>
+                <a:ea typeface="Calibri" pitchFamily="34" charset="-122"/>
+                <a:cs typeface="Calibri" pitchFamily="34" charset="-120"/>
+              </a:rPr>
+              <a:t xml:space="preserve">Ejemplo, RN-12: si no hay stock completo, no hay pedido.  </a:t>
+            </a:r>
+            <a:pPr indent="0" marL="0">
+              <a:lnSpc>
+                <a:spcPts val="1700"/>
+              </a:lnSpc>
+              <a:buNone/>
+            </a:pPr>
+            <a:r>
+              <a:rPr lang="en-US" sz="1200" dirty="0">
                 <a:solidFill>
                   <a:srgbClr val="FFFFFF"/>
                 </a:solidFill>
-                <a:latin typeface="Cambria" pitchFamily="34" charset="0"/>
-                <a:ea typeface="Cambria" pitchFamily="34" charset="-122"/>
-                <a:cs typeface="Cambria" pitchFamily="34" charset="-120"/>
-              </a:rPr>
-              <a:t>pruebas automatizadas</a:t>
-            </a:r>
-            <a:endParaRPr lang="en-US" sz="1500" dirty="0"/>
-          </a:p>
-        </p:txBody>
-      </p:sp>
-      <p:sp>
-        <p:nvSpPr>
-          <p:cNvPr id="7" name="Text 5"/>
-          <p:cNvSpPr txBox="1"/>
-          <p:nvPr/>
-        </p:nvSpPr>
-        <p:spPr>
-          <a:xfrm>
-            <a:off x="914400" y="2706624"/>
-            <a:ext cx="4788256" cy="676656"/>
-          </a:xfrm>
-          <a:prstGeom prst="rect">
-            <a:avLst/>
-          </a:prstGeom>
-          <a:noFill/>
-          <a:ln/>
-        </p:spPr>
-        <p:txBody>
-          <a:bodyPr wrap="square" lIns="0" tIns="0" rIns="0" bIns="0" rtlCol="0" anchor="t"/>
-          <a:lstStyle/>
-          <a:p>
-            <a:pPr indent="0" marL="0">
-              <a:lnSpc>
-                <a:spcPts val="1600"/>
-              </a:lnSpc>
-              <a:buNone/>
-            </a:pPr>
-            <a:r>
-              <a:rPr lang="en-US" sz="1150" dirty="0">
-                <a:solidFill>
-                  <a:srgbClr val="CFE3DC"/>
-                </a:solidFill>
-                <a:latin typeface="Calibri" pitchFamily="34" charset="0"/>
-                <a:ea typeface="Calibri" pitchFamily="34" charset="-122"/>
-                <a:cs typeface="Calibri" pitchFamily="34" charset="-120"/>
-              </a:rPr>
-              <a:t>346 aserciones, ejecutadas contra base de datos real y no contra una simulación. Al menos una prueba por cada una de las 22 reglas de negocio.</a:t>
-            </a:r>
-            <a:endParaRPr lang="en-US" sz="1150" dirty="0"/>
-          </a:p>
-        </p:txBody>
-      </p:sp>
-      <p:sp>
-        <p:nvSpPr>
-          <p:cNvPr id="8" name="Shape 6"/>
-          <p:cNvSpPr/>
-          <p:nvPr/>
-        </p:nvSpPr>
-        <p:spPr>
-          <a:xfrm>
-            <a:off x="6214720" y="1682496"/>
-            <a:ext cx="5336896" cy="1828800"/>
-          </a:xfrm>
-          <a:prstGeom prst="roundRect">
-            <a:avLst>
-              <a:gd name="adj" fmla="val 2500"/>
-            </a:avLst>
-          </a:prstGeom>
-          <a:solidFill>
-            <a:srgbClr val="EEF5F1"/>
-          </a:solidFill>
-          <a:ln w="12700">
-            <a:solidFill>
-              <a:srgbClr val="D9E5DF"/>
-            </a:solidFill>
-            <a:prstDash val="solid"/>
-          </a:ln>
-        </p:spPr>
-      </p:sp>
-      <p:sp>
-        <p:nvSpPr>
-          <p:cNvPr id="9" name="Text 7"/>
-          <p:cNvSpPr txBox="1"/>
-          <p:nvPr/>
-        </p:nvSpPr>
-        <p:spPr>
-          <a:xfrm>
-            <a:off x="6470752" y="1883664"/>
-            <a:ext cx="4824832" cy="274320"/>
-          </a:xfrm>
-          <a:prstGeom prst="rect">
-            <a:avLst/>
-          </a:prstGeom>
-          <a:noFill/>
-          <a:ln/>
-        </p:spPr>
-        <p:txBody>
-          <a:bodyPr wrap="square" lIns="0" tIns="0" rIns="0" bIns="0" rtlCol="0" anchor="ctr"/>
-          <a:lstStyle/>
-          <a:p>
-            <a:pPr indent="0" marL="0">
-              <a:buNone/>
-            </a:pPr>
-            <a:r>
-              <a:rPr lang="en-US" sz="1050" b="1" dirty="0">
-                <a:solidFill>
-                  <a:srgbClr val="E8A33D"/>
-                </a:solidFill>
-                <a:latin typeface="Calibri" pitchFamily="34" charset="0"/>
-                <a:ea typeface="Calibri" pitchFamily="34" charset="-122"/>
-                <a:cs typeface="Calibri" pitchFamily="34" charset="-120"/>
-              </a:rPr>
-              <a:t>POR QUÉ IMPORTA</a:t>
-            </a:r>
-            <a:endParaRPr lang="en-US" sz="1050" dirty="0"/>
-          </a:p>
-        </p:txBody>
-      </p:sp>
-      <p:sp>
-        <p:nvSpPr>
-          <p:cNvPr id="10" name="Text 8"/>
-          <p:cNvSpPr txBox="1"/>
-          <p:nvPr/>
-        </p:nvSpPr>
-        <p:spPr>
-          <a:xfrm>
-            <a:off x="6470752" y="2176272"/>
-            <a:ext cx="4824832" cy="365760"/>
-          </a:xfrm>
-          <a:prstGeom prst="rect">
-            <a:avLst/>
-          </a:prstGeom>
-          <a:noFill/>
-          <a:ln/>
-        </p:spPr>
-        <p:txBody>
-          <a:bodyPr wrap="square" lIns="0" tIns="0" rIns="0" bIns="0" rtlCol="0" anchor="ctr"/>
-          <a:lstStyle/>
-          <a:p>
-            <a:pPr indent="0" marL="0">
-              <a:buNone/>
-            </a:pPr>
-            <a:r>
-              <a:rPr lang="en-US" sz="1600" b="1" dirty="0">
-                <a:solidFill>
-                  <a:srgbClr val="14524A"/>
-                </a:solidFill>
-                <a:latin typeface="Cambria" pitchFamily="34" charset="0"/>
-                <a:ea typeface="Cambria" pitchFamily="34" charset="-122"/>
-                <a:cs typeface="Cambria" pitchFamily="34" charset="-120"/>
-              </a:rPr>
-              <a:t>La regla se vuelve a comprobar sola</a:t>
-            </a:r>
-            <a:endParaRPr lang="en-US" sz="1600" dirty="0"/>
-          </a:p>
-        </p:txBody>
-      </p:sp>
-      <p:sp>
-        <p:nvSpPr>
-          <p:cNvPr id="11" name="Text 9"/>
-          <p:cNvSpPr txBox="1"/>
-          <p:nvPr/>
-        </p:nvSpPr>
-        <p:spPr>
-          <a:xfrm>
-            <a:off x="6470752" y="2615184"/>
-            <a:ext cx="4824832" cy="694944"/>
-          </a:xfrm>
-          <a:prstGeom prst="rect">
-            <a:avLst/>
-          </a:prstGeom>
-          <a:noFill/>
-          <a:ln/>
-        </p:spPr>
-        <p:txBody>
-          <a:bodyPr wrap="square" lIns="0" tIns="0" rIns="0" bIns="0" rtlCol="0" anchor="t"/>
-          <a:lstStyle/>
-          <a:p>
-            <a:pPr indent="0" marL="0">
-              <a:lnSpc>
-                <a:spcPts val="1740"/>
-              </a:lnSpc>
-              <a:buNone/>
-            </a:pPr>
-            <a:r>
-              <a:rPr lang="en-US" sz="1200" dirty="0">
-                <a:solidFill>
-                  <a:srgbClr val="1C2321"/>
-                </a:solidFill>
-                <a:latin typeface="Calibri" pitchFamily="34" charset="0"/>
-                <a:ea typeface="Calibri" pitchFamily="34" charset="-122"/>
-                <a:cs typeface="Calibri" pitchFamily="34" charset="-120"/>
-              </a:rPr>
-              <a:t>Antes de cada entrega se ejecuta la suite completa. Si un cambio rompe una regla del negocio, se sabe en el momento y no en el reclamo del cliente.</a:t>
+                <a:latin typeface="Calibri" pitchFamily="34" charset="0"/>
+                <a:ea typeface="Calibri" pitchFamily="34" charset="-122"/>
+                <a:cs typeface="Calibri" pitchFamily="34" charset="-120"/>
+              </a:rPr>
+              <a:t>El servicio bloquea el producto, suma todo lo que falta y, si algo no alcanza, no escribe nada. Debajo, la tabla tiene una restricción que impide que el stock baje de cero. La empresa prefiere no vender antes que prometer lo que no tiene.</a:t>
             </a:r>
             <a:endParaRPr lang="en-US" sz="1200" dirty="0"/>
-          </a:p>
-        </p:txBody>
-      </p:sp>
-      <p:pic>
-        <p:nvPicPr>
-          <p:cNvPr id="12" name="Image 0" descr="/home/user/VetPetSurco/docs/capturas-reglas/05-carrito-bloqueado.png">    </p:cNvPr>
-          <p:cNvPicPr>
-            <a:picLocks noChangeAspect="1"/>
-          </p:cNvPicPr>
-          <p:nvPr/>
-        </p:nvPicPr>
-        <p:blipFill>
-          <a:blip r:embed="rId1"/>
-          <a:srcRect l="0" r="0" t="0" b="0"/>
-          <a:stretch/>
-        </p:blipFill>
-        <p:spPr>
-          <a:xfrm>
-            <a:off x="640080" y="3694176"/>
-            <a:ext cx="5336896" cy="2048256"/>
-          </a:xfrm>
-          <a:prstGeom prst="rect">
-            <a:avLst/>
-          </a:prstGeom>
-        </p:spPr>
-      </p:pic>
-      <p:pic>
-        <p:nvPicPr>
-          <p:cNvPr id="13" name="Image 1" descr="/home/user/VetPetSurco/docs/capturas-reglas/09-inventario.png">    </p:cNvPr>
-          <p:cNvPicPr>
-            <a:picLocks noChangeAspect="1"/>
-          </p:cNvPicPr>
-          <p:nvPr/>
-        </p:nvPicPr>
-        <p:blipFill>
-          <a:blip r:embed="rId2"/>
-          <a:srcRect l="0" r="0" t="0" b="0"/>
-          <a:stretch/>
-        </p:blipFill>
-        <p:spPr>
-          <a:xfrm>
-            <a:off x="6214720" y="3694176"/>
-            <a:ext cx="5336896" cy="2048256"/>
-          </a:xfrm>
-          <a:prstGeom prst="rect">
-            <a:avLst/>
-          </a:prstGeom>
-        </p:spPr>
-      </p:pic>
-      <p:sp>
-        <p:nvSpPr>
-          <p:cNvPr id="14" name="Text 10"/>
-          <p:cNvSpPr txBox="1"/>
-          <p:nvPr/>
-        </p:nvSpPr>
-        <p:spPr>
-          <a:xfrm>
-            <a:off x="640080" y="6327648"/>
-            <a:ext cx="10911535" cy="292608"/>
-          </a:xfrm>
-          <a:prstGeom prst="rect">
-            <a:avLst/>
-          </a:prstGeom>
-          <a:noFill/>
-          <a:ln/>
-        </p:spPr>
-        <p:txBody>
-          <a:bodyPr wrap="square" lIns="0" tIns="0" rIns="0" bIns="0" rtlCol="0" anchor="ctr"/>
-          <a:lstStyle/>
-          <a:p>
-            <a:pPr indent="0" marL="0">
-              <a:buNone/>
-            </a:pPr>
-            <a:r>
-              <a:rPr lang="en-US" sz="1000" i="1" dirty="0">
-                <a:solidFill>
-                  <a:srgbClr val="5D6B66"/>
-                </a:solidFill>
-                <a:latin typeface="Calibri" pitchFamily="34" charset="0"/>
-                <a:ea typeface="Calibri" pitchFamily="34" charset="-122"/>
-                <a:cs typeface="Calibri" pitchFamily="34" charset="-120"/>
-              </a:rPr>
-              <a:t>Capturas del sistema con la regla señalada sobre el control que la aplica: a la izquierda RN-12 bloqueando la compra sin stock, a la derecha el semáforo de reposición (RN-08).</a:t>
-            </a:r>
-            <a:endParaRPr lang="en-US" sz="1000" dirty="0"/>
           </a:p>
         </p:txBody>
       </p:sp>
@@ -4324,6 +5190,1118 @@
                 <a:ea typeface="Cambria" pitchFamily="34" charset="-122"/>
                 <a:cs typeface="Cambria" pitchFamily="34" charset="-120"/>
               </a:rPr>
+              <a:t>Atender al cliente sin sumar personal</a:t>
+            </a:r>
+            <a:endParaRPr lang="en-US" sz="3200" dirty="0"/>
+          </a:p>
+        </p:txBody>
+      </p:sp>
+      <p:sp>
+        <p:nvSpPr>
+          <p:cNvPr id="3" name="Text 1"/>
+          <p:cNvSpPr txBox="1"/>
+          <p:nvPr/>
+        </p:nvSpPr>
+        <p:spPr>
+          <a:xfrm>
+            <a:off x="640080" y="1042416"/>
+            <a:ext cx="10911535" cy="384048"/>
+          </a:xfrm>
+          <a:prstGeom prst="rect">
+            <a:avLst/>
+          </a:prstGeom>
+          <a:noFill/>
+          <a:ln/>
+        </p:spPr>
+        <p:txBody>
+          <a:bodyPr wrap="square" lIns="0" tIns="0" rIns="0" bIns="0" rtlCol="0" anchor="ctr"/>
+          <a:lstStyle/>
+          <a:p>
+            <a:pPr indent="0" marL="0">
+              <a:buNone/>
+            </a:pPr>
+            <a:r>
+              <a:rPr lang="en-US" sz="1400" dirty="0">
+                <a:solidFill>
+                  <a:srgbClr val="5D6B66"/>
+                </a:solidFill>
+                <a:latin typeface="Calibri" pitchFamily="34" charset="0"/>
+                <a:ea typeface="Calibri" pitchFamily="34" charset="-122"/>
+                <a:cs typeface="Calibri" pitchFamily="34" charset="-120"/>
+              </a:rPr>
+              <a:t>Tres piezas que incorporó el último incremento</a:t>
+            </a:r>
+            <a:endParaRPr lang="en-US" sz="1400" dirty="0"/>
+          </a:p>
+        </p:txBody>
+      </p:sp>
+      <p:sp>
+        <p:nvSpPr>
+          <p:cNvPr id="4" name="Shape 2"/>
+          <p:cNvSpPr/>
+          <p:nvPr/>
+        </p:nvSpPr>
+        <p:spPr>
+          <a:xfrm>
+            <a:off x="640080" y="1719072"/>
+            <a:ext cx="3503066" cy="2432304"/>
+          </a:xfrm>
+          <a:prstGeom prst="roundRect">
+            <a:avLst>
+              <a:gd name="adj" fmla="val 1880"/>
+            </a:avLst>
+          </a:prstGeom>
+          <a:solidFill>
+            <a:srgbClr val="EEF5F1"/>
+          </a:solidFill>
+          <a:ln w="12700">
+            <a:solidFill>
+              <a:srgbClr val="D9E5DF"/>
+            </a:solidFill>
+            <a:prstDash val="solid"/>
+          </a:ln>
+        </p:spPr>
+      </p:sp>
+      <p:sp>
+        <p:nvSpPr>
+          <p:cNvPr id="5" name="Text 3"/>
+          <p:cNvSpPr txBox="1"/>
+          <p:nvPr/>
+        </p:nvSpPr>
+        <p:spPr>
+          <a:xfrm>
+            <a:off x="896112" y="1920240"/>
+            <a:ext cx="2991002" cy="274320"/>
+          </a:xfrm>
+          <a:prstGeom prst="rect">
+            <a:avLst/>
+          </a:prstGeom>
+          <a:noFill/>
+          <a:ln/>
+        </p:spPr>
+        <p:txBody>
+          <a:bodyPr wrap="square" lIns="0" tIns="0" rIns="0" bIns="0" rtlCol="0" anchor="ctr"/>
+          <a:lstStyle/>
+          <a:p>
+            <a:pPr indent="0" marL="0">
+              <a:buNone/>
+            </a:pPr>
+            <a:r>
+              <a:rPr lang="en-US" sz="1050" b="1" dirty="0">
+                <a:solidFill>
+                  <a:srgbClr val="2C7A6B"/>
+                </a:solidFill>
+                <a:latin typeface="Calibri" pitchFamily="34" charset="0"/>
+                <a:ea typeface="Calibri" pitchFamily="34" charset="-122"/>
+                <a:cs typeface="Calibri" pitchFamily="34" charset="-120"/>
+              </a:rPr>
+              <a:t>ASISTENTE DEL SITIO</a:t>
+            </a:r>
+            <a:endParaRPr lang="en-US" sz="1050" dirty="0"/>
+          </a:p>
+        </p:txBody>
+      </p:sp>
+      <p:sp>
+        <p:nvSpPr>
+          <p:cNvPr id="6" name="Text 4"/>
+          <p:cNvSpPr txBox="1"/>
+          <p:nvPr/>
+        </p:nvSpPr>
+        <p:spPr>
+          <a:xfrm>
+            <a:off x="896112" y="2212848"/>
+            <a:ext cx="2991002" cy="365760"/>
+          </a:xfrm>
+          <a:prstGeom prst="rect">
+            <a:avLst/>
+          </a:prstGeom>
+          <a:noFill/>
+          <a:ln/>
+        </p:spPr>
+        <p:txBody>
+          <a:bodyPr wrap="square" lIns="0" tIns="0" rIns="0" bIns="0" rtlCol="0" anchor="ctr"/>
+          <a:lstStyle/>
+          <a:p>
+            <a:pPr indent="0" marL="0">
+              <a:buNone/>
+            </a:pPr>
+            <a:r>
+              <a:rPr lang="en-US" sz="1600" b="1" dirty="0">
+                <a:solidFill>
+                  <a:srgbClr val="14524A"/>
+                </a:solidFill>
+                <a:latin typeface="Cambria" pitchFamily="34" charset="0"/>
+                <a:ea typeface="Cambria" pitchFamily="34" charset="-122"/>
+                <a:cs typeface="Cambria" pitchFamily="34" charset="-120"/>
+              </a:rPr>
+              <a:t>Pelusa responde sola</a:t>
+            </a:r>
+            <a:endParaRPr lang="en-US" sz="1600" dirty="0"/>
+          </a:p>
+        </p:txBody>
+      </p:sp>
+      <p:sp>
+        <p:nvSpPr>
+          <p:cNvPr id="7" name="Text 5"/>
+          <p:cNvSpPr txBox="1"/>
+          <p:nvPr/>
+        </p:nvSpPr>
+        <p:spPr>
+          <a:xfrm>
+            <a:off x="896112" y="2651760"/>
+            <a:ext cx="2991002" cy="1298448"/>
+          </a:xfrm>
+          <a:prstGeom prst="rect">
+            <a:avLst/>
+          </a:prstGeom>
+          <a:noFill/>
+          <a:ln/>
+        </p:spPr>
+        <p:txBody>
+          <a:bodyPr wrap="square" lIns="0" tIns="0" rIns="0" bIns="0" rtlCol="0" anchor="t"/>
+          <a:lstStyle/>
+          <a:p>
+            <a:pPr indent="0" marL="0">
+              <a:lnSpc>
+                <a:spcPts val="1740"/>
+              </a:lnSpc>
+              <a:buNone/>
+            </a:pPr>
+            <a:r>
+              <a:rPr lang="en-US" sz="1200" dirty="0">
+                <a:solidFill>
+                  <a:srgbClr val="1C2321"/>
+                </a:solidFill>
+                <a:latin typeface="Calibri" pitchFamily="34" charset="0"/>
+                <a:ea typeface="Calibri" pitchFamily="34" charset="-122"/>
+                <a:cs typeface="Calibri" pitchFamily="34" charset="-120"/>
+              </a:rPr>
+              <a:t>Entiende 14 tipos de pregunta en español y contesta con los datos de la propia cuenta: en qué va el pedido, cuándo llega el despacho, qué vacuna toca. Ocho temas de menú para quien prefiere no escribir.</a:t>
+            </a:r>
+            <a:endParaRPr lang="en-US" sz="1200" dirty="0"/>
+          </a:p>
+        </p:txBody>
+      </p:sp>
+      <p:sp>
+        <p:nvSpPr>
+          <p:cNvPr id="8" name="Shape 6"/>
+          <p:cNvSpPr/>
+          <p:nvPr/>
+        </p:nvSpPr>
+        <p:spPr>
+          <a:xfrm>
+            <a:off x="4344314" y="1719072"/>
+            <a:ext cx="3503066" cy="2432304"/>
+          </a:xfrm>
+          <a:prstGeom prst="roundRect">
+            <a:avLst>
+              <a:gd name="adj" fmla="val 1880"/>
+            </a:avLst>
+          </a:prstGeom>
+          <a:solidFill>
+            <a:srgbClr val="EEF5F1"/>
+          </a:solidFill>
+          <a:ln w="12700">
+            <a:solidFill>
+              <a:srgbClr val="D9E5DF"/>
+            </a:solidFill>
+            <a:prstDash val="solid"/>
+          </a:ln>
+        </p:spPr>
+      </p:sp>
+      <p:sp>
+        <p:nvSpPr>
+          <p:cNvPr id="9" name="Text 7"/>
+          <p:cNvSpPr txBox="1"/>
+          <p:nvPr/>
+        </p:nvSpPr>
+        <p:spPr>
+          <a:xfrm>
+            <a:off x="4600346" y="1920240"/>
+            <a:ext cx="2991002" cy="274320"/>
+          </a:xfrm>
+          <a:prstGeom prst="rect">
+            <a:avLst/>
+          </a:prstGeom>
+          <a:noFill/>
+          <a:ln/>
+        </p:spPr>
+        <p:txBody>
+          <a:bodyPr wrap="square" lIns="0" tIns="0" rIns="0" bIns="0" rtlCol="0" anchor="ctr"/>
+          <a:lstStyle/>
+          <a:p>
+            <a:pPr indent="0" marL="0">
+              <a:buNone/>
+            </a:pPr>
+            <a:r>
+              <a:rPr lang="en-US" sz="1050" b="1" dirty="0">
+                <a:solidFill>
+                  <a:srgbClr val="E8A33D"/>
+                </a:solidFill>
+                <a:latin typeface="Calibri" pitchFamily="34" charset="0"/>
+                <a:ea typeface="Calibri" pitchFamily="34" charset="-122"/>
+                <a:cs typeface="Calibri" pitchFamily="34" charset="-120"/>
+              </a:rPr>
+              <a:t>CORREOS</a:t>
+            </a:r>
+            <a:endParaRPr lang="en-US" sz="1050" dirty="0"/>
+          </a:p>
+        </p:txBody>
+      </p:sp>
+      <p:sp>
+        <p:nvSpPr>
+          <p:cNvPr id="10" name="Text 8"/>
+          <p:cNvSpPr txBox="1"/>
+          <p:nvPr/>
+        </p:nvSpPr>
+        <p:spPr>
+          <a:xfrm>
+            <a:off x="4600346" y="2212848"/>
+            <a:ext cx="2991002" cy="365760"/>
+          </a:xfrm>
+          <a:prstGeom prst="rect">
+            <a:avLst/>
+          </a:prstGeom>
+          <a:noFill/>
+          <a:ln/>
+        </p:spPr>
+        <p:txBody>
+          <a:bodyPr wrap="square" lIns="0" tIns="0" rIns="0" bIns="0" rtlCol="0" anchor="ctr"/>
+          <a:lstStyle/>
+          <a:p>
+            <a:pPr indent="0" marL="0">
+              <a:buNone/>
+            </a:pPr>
+            <a:r>
+              <a:rPr lang="en-US" sz="1600" b="1" dirty="0">
+                <a:solidFill>
+                  <a:srgbClr val="14524A"/>
+                </a:solidFill>
+                <a:latin typeface="Cambria" pitchFamily="34" charset="0"/>
+                <a:ea typeface="Cambria" pitchFamily="34" charset="-122"/>
+                <a:cs typeface="Cambria" pitchFamily="34" charset="-120"/>
+              </a:rPr>
+              <a:t>Ocho avisos automáticos</a:t>
+            </a:r>
+            <a:endParaRPr lang="en-US" sz="1600" dirty="0"/>
+          </a:p>
+        </p:txBody>
+      </p:sp>
+      <p:sp>
+        <p:nvSpPr>
+          <p:cNvPr id="11" name="Text 9"/>
+          <p:cNvSpPr txBox="1"/>
+          <p:nvPr/>
+        </p:nvSpPr>
+        <p:spPr>
+          <a:xfrm>
+            <a:off x="4600346" y="2651760"/>
+            <a:ext cx="2991002" cy="1298448"/>
+          </a:xfrm>
+          <a:prstGeom prst="rect">
+            <a:avLst/>
+          </a:prstGeom>
+          <a:noFill/>
+          <a:ln/>
+        </p:spPr>
+        <p:txBody>
+          <a:bodyPr wrap="square" lIns="0" tIns="0" rIns="0" bIns="0" rtlCol="0" anchor="t"/>
+          <a:lstStyle/>
+          <a:p>
+            <a:pPr indent="0" marL="0">
+              <a:lnSpc>
+                <a:spcPts val="1740"/>
+              </a:lnSpc>
+              <a:buNone/>
+            </a:pPr>
+            <a:r>
+              <a:rPr lang="en-US" sz="1200" dirty="0">
+                <a:solidFill>
+                  <a:srgbClr val="1C2321"/>
+                </a:solidFill>
+                <a:latin typeface="Calibri" pitchFamily="34" charset="0"/>
+                <a:ea typeface="Calibri" pitchFamily="34" charset="-122"/>
+                <a:cs typeface="Calibri" pitchFamily="34" charset="-120"/>
+              </a:rPr>
+              <a:t>Bienvenida, pedido, factura, cita, despacho, cambio de plan, recordatorio de vacuna y mensaje de contacto. El recordatorio sale cada mañana a las 8:00 sin que nadie lo dispare (RN-20).</a:t>
+            </a:r>
+            <a:endParaRPr lang="en-US" sz="1200" dirty="0"/>
+          </a:p>
+        </p:txBody>
+      </p:sp>
+      <p:sp>
+        <p:nvSpPr>
+          <p:cNvPr id="12" name="Shape 10"/>
+          <p:cNvSpPr/>
+          <p:nvPr/>
+        </p:nvSpPr>
+        <p:spPr>
+          <a:xfrm>
+            <a:off x="8048549" y="1719072"/>
+            <a:ext cx="3503066" cy="2432304"/>
+          </a:xfrm>
+          <a:prstGeom prst="roundRect">
+            <a:avLst>
+              <a:gd name="adj" fmla="val 1880"/>
+            </a:avLst>
+          </a:prstGeom>
+          <a:solidFill>
+            <a:srgbClr val="EEF5F1"/>
+          </a:solidFill>
+          <a:ln w="12700">
+            <a:solidFill>
+              <a:srgbClr val="D9E5DF"/>
+            </a:solidFill>
+            <a:prstDash val="solid"/>
+          </a:ln>
+        </p:spPr>
+      </p:sp>
+      <p:sp>
+        <p:nvSpPr>
+          <p:cNvPr id="13" name="Text 11"/>
+          <p:cNvSpPr txBox="1"/>
+          <p:nvPr/>
+        </p:nvSpPr>
+        <p:spPr>
+          <a:xfrm>
+            <a:off x="8304581" y="1920240"/>
+            <a:ext cx="2991002" cy="274320"/>
+          </a:xfrm>
+          <a:prstGeom prst="rect">
+            <a:avLst/>
+          </a:prstGeom>
+          <a:noFill/>
+          <a:ln/>
+        </p:spPr>
+        <p:txBody>
+          <a:bodyPr wrap="square" lIns="0" tIns="0" rIns="0" bIns="0" rtlCol="0" anchor="ctr"/>
+          <a:lstStyle/>
+          <a:p>
+            <a:pPr indent="0" marL="0">
+              <a:buNone/>
+            </a:pPr>
+            <a:r>
+              <a:rPr lang="en-US" sz="1050" b="1" dirty="0">
+                <a:solidFill>
+                  <a:srgbClr val="E8A33D"/>
+                </a:solidFill>
+                <a:latin typeface="Calibri" pitchFamily="34" charset="0"/>
+                <a:ea typeface="Calibri" pitchFamily="34" charset="-122"/>
+                <a:cs typeface="Calibri" pitchFamily="34" charset="-120"/>
+              </a:rPr>
+              <a:t>ACCESIBILIDAD</a:t>
+            </a:r>
+            <a:endParaRPr lang="en-US" sz="1050" dirty="0"/>
+          </a:p>
+        </p:txBody>
+      </p:sp>
+      <p:sp>
+        <p:nvSpPr>
+          <p:cNvPr id="14" name="Text 12"/>
+          <p:cNvSpPr txBox="1"/>
+          <p:nvPr/>
+        </p:nvSpPr>
+        <p:spPr>
+          <a:xfrm>
+            <a:off x="8304581" y="2212848"/>
+            <a:ext cx="2991002" cy="365760"/>
+          </a:xfrm>
+          <a:prstGeom prst="rect">
+            <a:avLst/>
+          </a:prstGeom>
+          <a:noFill/>
+          <a:ln/>
+        </p:spPr>
+        <p:txBody>
+          <a:bodyPr wrap="square" lIns="0" tIns="0" rIns="0" bIns="0" rtlCol="0" anchor="ctr"/>
+          <a:lstStyle/>
+          <a:p>
+            <a:pPr indent="0" marL="0">
+              <a:buNone/>
+            </a:pPr>
+            <a:r>
+              <a:rPr lang="en-US" sz="1600" b="1" dirty="0">
+                <a:solidFill>
+                  <a:srgbClr val="14524A"/>
+                </a:solidFill>
+                <a:latin typeface="Cambria" pitchFamily="34" charset="0"/>
+                <a:ea typeface="Cambria" pitchFamily="34" charset="-122"/>
+                <a:cs typeface="Cambria" pitchFamily="34" charset="-120"/>
+              </a:rPr>
+              <a:t>Usable en el celular</a:t>
+            </a:r>
+            <a:endParaRPr lang="en-US" sz="1600" dirty="0"/>
+          </a:p>
+        </p:txBody>
+      </p:sp>
+      <p:sp>
+        <p:nvSpPr>
+          <p:cNvPr id="15" name="Text 13"/>
+          <p:cNvSpPr txBox="1"/>
+          <p:nvPr/>
+        </p:nvSpPr>
+        <p:spPr>
+          <a:xfrm>
+            <a:off x="8304581" y="2651760"/>
+            <a:ext cx="2991002" cy="1298448"/>
+          </a:xfrm>
+          <a:prstGeom prst="rect">
+            <a:avLst/>
+          </a:prstGeom>
+          <a:noFill/>
+          <a:ln/>
+        </p:spPr>
+        <p:txBody>
+          <a:bodyPr wrap="square" lIns="0" tIns="0" rIns="0" bIns="0" rtlCol="0" anchor="t"/>
+          <a:lstStyle/>
+          <a:p>
+            <a:pPr indent="0" marL="0">
+              <a:lnSpc>
+                <a:spcPts val="1740"/>
+              </a:lnSpc>
+              <a:buNone/>
+            </a:pPr>
+            <a:r>
+              <a:rPr lang="en-US" sz="1200" dirty="0">
+                <a:solidFill>
+                  <a:srgbClr val="1C2321"/>
+                </a:solidFill>
+                <a:latin typeface="Calibri" pitchFamily="34" charset="0"/>
+                <a:ea typeface="Calibri" pitchFamily="34" charset="-122"/>
+                <a:cs typeface="Calibri" pitchFamily="34" charset="-120"/>
+              </a:rPr>
+              <a:t>Las tablas se reordenan en tarjetas en pantalla chica y cada dato conserva su etiqueta para el lector de pantalla. El chat anuncia su estado con atributos ARIA (RNF-01 y RNF-06).</a:t>
+            </a:r>
+            <a:endParaRPr lang="en-US" sz="1200" dirty="0"/>
+          </a:p>
+        </p:txBody>
+      </p:sp>
+      <p:sp>
+        <p:nvSpPr>
+          <p:cNvPr id="16" name="Shape 14"/>
+          <p:cNvSpPr/>
+          <p:nvPr/>
+        </p:nvSpPr>
+        <p:spPr>
+          <a:xfrm>
+            <a:off x="640080" y="4480560"/>
+            <a:ext cx="10911535" cy="1188720"/>
+          </a:xfrm>
+          <a:prstGeom prst="roundRect">
+            <a:avLst>
+              <a:gd name="adj" fmla="val 3846"/>
+            </a:avLst>
+          </a:prstGeom>
+          <a:solidFill>
+            <a:srgbClr val="14524A"/>
+          </a:solidFill>
+          <a:ln w="12700">
+            <a:solidFill>
+              <a:srgbClr val="14524A"/>
+            </a:solidFill>
+            <a:prstDash val="solid"/>
+          </a:ln>
+        </p:spPr>
+      </p:sp>
+      <p:sp>
+        <p:nvSpPr>
+          <p:cNvPr id="17" name="Text 15"/>
+          <p:cNvSpPr txBox="1"/>
+          <p:nvPr/>
+        </p:nvSpPr>
+        <p:spPr>
+          <a:xfrm>
+            <a:off x="950976" y="4480560"/>
+            <a:ext cx="10289743" cy="1188720"/>
+          </a:xfrm>
+          <a:prstGeom prst="rect">
+            <a:avLst/>
+          </a:prstGeom>
+          <a:noFill/>
+          <a:ln/>
+        </p:spPr>
+        <p:txBody>
+          <a:bodyPr wrap="square" lIns="0" tIns="0" rIns="0" bIns="0" rtlCol="0" anchor="ctr"/>
+          <a:lstStyle/>
+          <a:p>
+            <a:pPr indent="0" marL="0">
+              <a:lnSpc>
+                <a:spcPts val="1700"/>
+              </a:lnSpc>
+              <a:buNone/>
+            </a:pPr>
+            <a:r>
+              <a:rPr lang="en-US" sz="1200" b="1" dirty="0">
+                <a:solidFill>
+                  <a:srgbClr val="E8A33D"/>
+                </a:solidFill>
+                <a:latin typeface="Calibri" pitchFamily="34" charset="0"/>
+                <a:ea typeface="Calibri" pitchFamily="34" charset="-122"/>
+                <a:cs typeface="Calibri" pitchFamily="34" charset="-120"/>
+              </a:rPr>
+              <a:t xml:space="preserve">El asistente no es una caja negra.  </a:t>
+            </a:r>
+            <a:pPr indent="0" marL="0">
+              <a:lnSpc>
+                <a:spcPts val="1700"/>
+              </a:lnSpc>
+              <a:buNone/>
+            </a:pPr>
+            <a:r>
+              <a:rPr lang="en-US" sz="1200" dirty="0">
+                <a:solidFill>
+                  <a:srgbClr val="FFFFFF"/>
+                </a:solidFill>
+                <a:latin typeface="Calibri" pitchFamily="34" charset="0"/>
+                <a:ea typeface="Calibri" pitchFamily="34" charset="-122"/>
+                <a:cs typeface="Calibri" pitchFamily="34" charset="-120"/>
+              </a:rPr>
+              <a:t>No usa inteligencia artificial externa ni servicios pagados: clasifica la pregunta con palabras clave y responde desde un único archivo de configuración. Y solo consulta los datos del cliente que está conectado, nunca los de otro (RN-01 y RN-04).</a:t>
+            </a:r>
+            <a:endParaRPr lang="en-US" sz="1200" dirty="0"/>
+          </a:p>
+        </p:txBody>
+      </p:sp>
+    </p:spTree>
+  </p:cSld>
+  <p:clrMapOvr>
+    <a:masterClrMapping/>
+  </p:clrMapOvr>
+</p:sld>
+</file>
+
+<file path=ppt/slides/slide14.xml><?xml version="1.0" encoding="utf-8"?>
+<p:sld xmlns:a="http://schemas.openxmlformats.org/drawingml/2006/main" xmlns:r="http://schemas.openxmlformats.org/officeDocument/2006/relationships" xmlns:p="http://schemas.openxmlformats.org/presentationml/2006/main">
+  <p:cSld name="Slide 14">
+    <p:spTree>
+      <p:nvGrpSpPr>
+        <p:cNvPr id="1" name=""/>
+        <p:cNvGrpSpPr/>
+        <p:nvPr/>
+      </p:nvGrpSpPr>
+      <p:grpSpPr>
+        <a:xfrm>
+          <a:off x="0" y="0"/>
+          <a:ext cx="0" cy="0"/>
+          <a:chOff x="0" y="0"/>
+          <a:chExt cx="0" cy="0"/>
+        </a:xfrm>
+      </p:grpSpPr>
+      <p:sp>
+        <p:nvSpPr>
+          <p:cNvPr id="2" name="Text 0"/>
+          <p:cNvSpPr txBox="1"/>
+          <p:nvPr/>
+        </p:nvSpPr>
+        <p:spPr>
+          <a:xfrm>
+            <a:off x="640080" y="384048"/>
+            <a:ext cx="10911535" cy="658368"/>
+          </a:xfrm>
+          <a:prstGeom prst="rect">
+            <a:avLst/>
+          </a:prstGeom>
+          <a:noFill/>
+          <a:ln/>
+        </p:spPr>
+        <p:txBody>
+          <a:bodyPr wrap="square" lIns="0" tIns="0" rIns="0" bIns="0" rtlCol="0" anchor="ctr"/>
+          <a:lstStyle/>
+          <a:p>
+            <a:pPr indent="0" marL="0">
+              <a:buNone/>
+            </a:pPr>
+            <a:r>
+              <a:rPr lang="en-US" sz="3200" b="1" dirty="0">
+                <a:solidFill>
+                  <a:srgbClr val="14524A"/>
+                </a:solidFill>
+                <a:latin typeface="Cambria" pitchFamily="34" charset="0"/>
+                <a:ea typeface="Cambria" pitchFamily="34" charset="-122"/>
+                <a:cs typeface="Cambria" pitchFamily="34" charset="-120"/>
+              </a:rPr>
+              <a:t>Lo que se puede comprobar hoy</a:t>
+            </a:r>
+            <a:endParaRPr lang="en-US" sz="3200" dirty="0"/>
+          </a:p>
+        </p:txBody>
+      </p:sp>
+      <p:sp>
+        <p:nvSpPr>
+          <p:cNvPr id="3" name="Text 1"/>
+          <p:cNvSpPr txBox="1"/>
+          <p:nvPr/>
+        </p:nvSpPr>
+        <p:spPr>
+          <a:xfrm>
+            <a:off x="640080" y="1042416"/>
+            <a:ext cx="10911535" cy="384048"/>
+          </a:xfrm>
+          <a:prstGeom prst="rect">
+            <a:avLst/>
+          </a:prstGeom>
+          <a:noFill/>
+          <a:ln/>
+        </p:spPr>
+        <p:txBody>
+          <a:bodyPr wrap="square" lIns="0" tIns="0" rIns="0" bIns="0" rtlCol="0" anchor="ctr"/>
+          <a:lstStyle/>
+          <a:p>
+            <a:pPr indent="0" marL="0">
+              <a:buNone/>
+            </a:pPr>
+            <a:r>
+              <a:rPr lang="en-US" sz="1400" dirty="0">
+                <a:solidFill>
+                  <a:srgbClr val="5D6B66"/>
+                </a:solidFill>
+                <a:latin typeface="Calibri" pitchFamily="34" charset="0"/>
+                <a:ea typeface="Calibri" pitchFamily="34" charset="-122"/>
+                <a:cs typeface="Calibri" pitchFamily="34" charset="-120"/>
+              </a:rPr>
+              <a:t>No es una maqueta: es una aplicación que se ejecuta y se prueba</a:t>
+            </a:r>
+            <a:endParaRPr lang="en-US" sz="1400" dirty="0"/>
+          </a:p>
+        </p:txBody>
+      </p:sp>
+      <p:sp>
+        <p:nvSpPr>
+          <p:cNvPr id="4" name="Shape 2"/>
+          <p:cNvSpPr/>
+          <p:nvPr/>
+        </p:nvSpPr>
+        <p:spPr>
+          <a:xfrm>
+            <a:off x="640080" y="1682496"/>
+            <a:ext cx="5336896" cy="1828800"/>
+          </a:xfrm>
+          <a:prstGeom prst="roundRect">
+            <a:avLst>
+              <a:gd name="adj" fmla="val 2500"/>
+            </a:avLst>
+          </a:prstGeom>
+          <a:solidFill>
+            <a:srgbClr val="14524A"/>
+          </a:solidFill>
+          <a:ln w="12700">
+            <a:solidFill>
+              <a:srgbClr val="14524A"/>
+            </a:solidFill>
+            <a:prstDash val="solid"/>
+          </a:ln>
+        </p:spPr>
+      </p:sp>
+      <p:sp>
+        <p:nvSpPr>
+          <p:cNvPr id="5" name="Text 3"/>
+          <p:cNvSpPr txBox="1"/>
+          <p:nvPr/>
+        </p:nvSpPr>
+        <p:spPr>
+          <a:xfrm>
+            <a:off x="914400" y="1792224"/>
+            <a:ext cx="1828800" cy="877824"/>
+          </a:xfrm>
+          <a:prstGeom prst="rect">
+            <a:avLst/>
+          </a:prstGeom>
+          <a:noFill/>
+          <a:ln/>
+        </p:spPr>
+        <p:txBody>
+          <a:bodyPr wrap="square" lIns="0" tIns="0" rIns="0" bIns="0" rtlCol="0" anchor="ctr"/>
+          <a:lstStyle/>
+          <a:p>
+            <a:pPr indent="0" marL="0">
+              <a:buNone/>
+            </a:pPr>
+            <a:r>
+              <a:rPr lang="en-US" sz="5200" b="1" dirty="0">
+                <a:solidFill>
+                  <a:srgbClr val="E8A33D"/>
+                </a:solidFill>
+                <a:latin typeface="Cambria" pitchFamily="34" charset="0"/>
+                <a:ea typeface="Cambria" pitchFamily="34" charset="-122"/>
+                <a:cs typeface="Cambria" pitchFamily="34" charset="-120"/>
+              </a:rPr>
+              <a:t>137</a:t>
+            </a:r>
+            <a:endParaRPr lang="en-US" sz="5200" dirty="0"/>
+          </a:p>
+        </p:txBody>
+      </p:sp>
+      <p:sp>
+        <p:nvSpPr>
+          <p:cNvPr id="6" name="Text 4"/>
+          <p:cNvSpPr txBox="1"/>
+          <p:nvPr/>
+        </p:nvSpPr>
+        <p:spPr>
+          <a:xfrm>
+            <a:off x="2743200" y="1792224"/>
+            <a:ext cx="2959456" cy="877824"/>
+          </a:xfrm>
+          <a:prstGeom prst="rect">
+            <a:avLst/>
+          </a:prstGeom>
+          <a:noFill/>
+          <a:ln/>
+        </p:spPr>
+        <p:txBody>
+          <a:bodyPr wrap="square" lIns="0" tIns="0" rIns="0" bIns="0" rtlCol="0" anchor="ctr"/>
+          <a:lstStyle/>
+          <a:p>
+            <a:pPr indent="0" marL="0">
+              <a:buNone/>
+            </a:pPr>
+            <a:r>
+              <a:rPr lang="en-US" sz="1500" b="1" dirty="0">
+                <a:solidFill>
+                  <a:srgbClr val="FFFFFF"/>
+                </a:solidFill>
+                <a:latin typeface="Cambria" pitchFamily="34" charset="0"/>
+                <a:ea typeface="Cambria" pitchFamily="34" charset="-122"/>
+                <a:cs typeface="Cambria" pitchFamily="34" charset="-120"/>
+              </a:rPr>
+              <a:t>pruebas automatizadas</a:t>
+            </a:r>
+            <a:endParaRPr lang="en-US" sz="1500" dirty="0"/>
+          </a:p>
+        </p:txBody>
+      </p:sp>
+      <p:sp>
+        <p:nvSpPr>
+          <p:cNvPr id="7" name="Text 5"/>
+          <p:cNvSpPr txBox="1"/>
+          <p:nvPr/>
+        </p:nvSpPr>
+        <p:spPr>
+          <a:xfrm>
+            <a:off x="914400" y="2706624"/>
+            <a:ext cx="4788256" cy="676656"/>
+          </a:xfrm>
+          <a:prstGeom prst="rect">
+            <a:avLst/>
+          </a:prstGeom>
+          <a:noFill/>
+          <a:ln/>
+        </p:spPr>
+        <p:txBody>
+          <a:bodyPr wrap="square" lIns="0" tIns="0" rIns="0" bIns="0" rtlCol="0" anchor="t"/>
+          <a:lstStyle/>
+          <a:p>
+            <a:pPr indent="0" marL="0">
+              <a:lnSpc>
+                <a:spcPts val="1600"/>
+              </a:lnSpc>
+              <a:buNone/>
+            </a:pPr>
+            <a:r>
+              <a:rPr lang="en-US" sz="1150" dirty="0">
+                <a:solidFill>
+                  <a:srgbClr val="CFE3DC"/>
+                </a:solidFill>
+                <a:latin typeface="Calibri" pitchFamily="34" charset="0"/>
+                <a:ea typeface="Calibri" pitchFamily="34" charset="-122"/>
+                <a:cs typeface="Calibri" pitchFamily="34" charset="-120"/>
+              </a:rPr>
+              <a:t>346 aserciones, ejecutadas contra base de datos real y no contra una simulación. Al menos una prueba por cada una de las 22 reglas de negocio.</a:t>
+            </a:r>
+            <a:endParaRPr lang="en-US" sz="1150" dirty="0"/>
+          </a:p>
+        </p:txBody>
+      </p:sp>
+      <p:sp>
+        <p:nvSpPr>
+          <p:cNvPr id="8" name="Shape 6"/>
+          <p:cNvSpPr/>
+          <p:nvPr/>
+        </p:nvSpPr>
+        <p:spPr>
+          <a:xfrm>
+            <a:off x="6214720" y="1682496"/>
+            <a:ext cx="5336896" cy="1828800"/>
+          </a:xfrm>
+          <a:prstGeom prst="roundRect">
+            <a:avLst>
+              <a:gd name="adj" fmla="val 2500"/>
+            </a:avLst>
+          </a:prstGeom>
+          <a:solidFill>
+            <a:srgbClr val="EEF5F1"/>
+          </a:solidFill>
+          <a:ln w="12700">
+            <a:solidFill>
+              <a:srgbClr val="D9E5DF"/>
+            </a:solidFill>
+            <a:prstDash val="solid"/>
+          </a:ln>
+        </p:spPr>
+      </p:sp>
+      <p:sp>
+        <p:nvSpPr>
+          <p:cNvPr id="9" name="Text 7"/>
+          <p:cNvSpPr txBox="1"/>
+          <p:nvPr/>
+        </p:nvSpPr>
+        <p:spPr>
+          <a:xfrm>
+            <a:off x="6470752" y="1883664"/>
+            <a:ext cx="4824832" cy="274320"/>
+          </a:xfrm>
+          <a:prstGeom prst="rect">
+            <a:avLst/>
+          </a:prstGeom>
+          <a:noFill/>
+          <a:ln/>
+        </p:spPr>
+        <p:txBody>
+          <a:bodyPr wrap="square" lIns="0" tIns="0" rIns="0" bIns="0" rtlCol="0" anchor="ctr"/>
+          <a:lstStyle/>
+          <a:p>
+            <a:pPr indent="0" marL="0">
+              <a:buNone/>
+            </a:pPr>
+            <a:r>
+              <a:rPr lang="en-US" sz="1050" b="1" dirty="0">
+                <a:solidFill>
+                  <a:srgbClr val="E8A33D"/>
+                </a:solidFill>
+                <a:latin typeface="Calibri" pitchFamily="34" charset="0"/>
+                <a:ea typeface="Calibri" pitchFamily="34" charset="-122"/>
+                <a:cs typeface="Calibri" pitchFamily="34" charset="-120"/>
+              </a:rPr>
+              <a:t>POR QUÉ IMPORTA</a:t>
+            </a:r>
+            <a:endParaRPr lang="en-US" sz="1050" dirty="0"/>
+          </a:p>
+        </p:txBody>
+      </p:sp>
+      <p:sp>
+        <p:nvSpPr>
+          <p:cNvPr id="10" name="Text 8"/>
+          <p:cNvSpPr txBox="1"/>
+          <p:nvPr/>
+        </p:nvSpPr>
+        <p:spPr>
+          <a:xfrm>
+            <a:off x="6470752" y="2176272"/>
+            <a:ext cx="4824832" cy="365760"/>
+          </a:xfrm>
+          <a:prstGeom prst="rect">
+            <a:avLst/>
+          </a:prstGeom>
+          <a:noFill/>
+          <a:ln/>
+        </p:spPr>
+        <p:txBody>
+          <a:bodyPr wrap="square" lIns="0" tIns="0" rIns="0" bIns="0" rtlCol="0" anchor="ctr"/>
+          <a:lstStyle/>
+          <a:p>
+            <a:pPr indent="0" marL="0">
+              <a:buNone/>
+            </a:pPr>
+            <a:r>
+              <a:rPr lang="en-US" sz="1600" b="1" dirty="0">
+                <a:solidFill>
+                  <a:srgbClr val="14524A"/>
+                </a:solidFill>
+                <a:latin typeface="Cambria" pitchFamily="34" charset="0"/>
+                <a:ea typeface="Cambria" pitchFamily="34" charset="-122"/>
+                <a:cs typeface="Cambria" pitchFamily="34" charset="-120"/>
+              </a:rPr>
+              <a:t>La regla se vuelve a comprobar sola</a:t>
+            </a:r>
+            <a:endParaRPr lang="en-US" sz="1600" dirty="0"/>
+          </a:p>
+        </p:txBody>
+      </p:sp>
+      <p:sp>
+        <p:nvSpPr>
+          <p:cNvPr id="11" name="Text 9"/>
+          <p:cNvSpPr txBox="1"/>
+          <p:nvPr/>
+        </p:nvSpPr>
+        <p:spPr>
+          <a:xfrm>
+            <a:off x="6470752" y="2615184"/>
+            <a:ext cx="4824832" cy="694944"/>
+          </a:xfrm>
+          <a:prstGeom prst="rect">
+            <a:avLst/>
+          </a:prstGeom>
+          <a:noFill/>
+          <a:ln/>
+        </p:spPr>
+        <p:txBody>
+          <a:bodyPr wrap="square" lIns="0" tIns="0" rIns="0" bIns="0" rtlCol="0" anchor="t"/>
+          <a:lstStyle/>
+          <a:p>
+            <a:pPr indent="0" marL="0">
+              <a:lnSpc>
+                <a:spcPts val="1740"/>
+              </a:lnSpc>
+              <a:buNone/>
+            </a:pPr>
+            <a:r>
+              <a:rPr lang="en-US" sz="1200" dirty="0">
+                <a:solidFill>
+                  <a:srgbClr val="1C2321"/>
+                </a:solidFill>
+                <a:latin typeface="Calibri" pitchFamily="34" charset="0"/>
+                <a:ea typeface="Calibri" pitchFamily="34" charset="-122"/>
+                <a:cs typeface="Calibri" pitchFamily="34" charset="-120"/>
+              </a:rPr>
+              <a:t>Antes de cada entrega se ejecuta la suite completa. Si un cambio rompe una regla del negocio, se sabe en el momento y no en el reclamo del cliente.</a:t>
+            </a:r>
+            <a:endParaRPr lang="en-US" sz="1200" dirty="0"/>
+          </a:p>
+        </p:txBody>
+      </p:sp>
+      <p:pic>
+        <p:nvPicPr>
+          <p:cNvPr id="12" name="Image 0" descr="/home/user/VetPetSurco/docs/capturas-reglas/05-carrito-bloqueado.png">    </p:cNvPr>
+          <p:cNvPicPr>
+            <a:picLocks noChangeAspect="1"/>
+          </p:cNvPicPr>
+          <p:nvPr/>
+        </p:nvPicPr>
+        <p:blipFill>
+          <a:blip r:embed="rId1"/>
+          <a:srcRect l="0" r="0" t="0" b="0"/>
+          <a:stretch/>
+        </p:blipFill>
+        <p:spPr>
+          <a:xfrm>
+            <a:off x="640080" y="3694176"/>
+            <a:ext cx="5336896" cy="2048256"/>
+          </a:xfrm>
+          <a:prstGeom prst="rect">
+            <a:avLst/>
+          </a:prstGeom>
+        </p:spPr>
+      </p:pic>
+      <p:pic>
+        <p:nvPicPr>
+          <p:cNvPr id="13" name="Image 1" descr="/home/user/VetPetSurco/docs/capturas-reglas/09-inventario.png">    </p:cNvPr>
+          <p:cNvPicPr>
+            <a:picLocks noChangeAspect="1"/>
+          </p:cNvPicPr>
+          <p:nvPr/>
+        </p:nvPicPr>
+        <p:blipFill>
+          <a:blip r:embed="rId2"/>
+          <a:srcRect l="0" r="0" t="0" b="0"/>
+          <a:stretch/>
+        </p:blipFill>
+        <p:spPr>
+          <a:xfrm>
+            <a:off x="6214720" y="3694176"/>
+            <a:ext cx="5336896" cy="2048256"/>
+          </a:xfrm>
+          <a:prstGeom prst="rect">
+            <a:avLst/>
+          </a:prstGeom>
+        </p:spPr>
+      </p:pic>
+      <p:sp>
+        <p:nvSpPr>
+          <p:cNvPr id="14" name="Text 10"/>
+          <p:cNvSpPr txBox="1"/>
+          <p:nvPr/>
+        </p:nvSpPr>
+        <p:spPr>
+          <a:xfrm>
+            <a:off x="640080" y="6327648"/>
+            <a:ext cx="10911535" cy="292608"/>
+          </a:xfrm>
+          <a:prstGeom prst="rect">
+            <a:avLst/>
+          </a:prstGeom>
+          <a:noFill/>
+          <a:ln/>
+        </p:spPr>
+        <p:txBody>
+          <a:bodyPr wrap="square" lIns="0" tIns="0" rIns="0" bIns="0" rtlCol="0" anchor="ctr"/>
+          <a:lstStyle/>
+          <a:p>
+            <a:pPr indent="0" marL="0">
+              <a:buNone/>
+            </a:pPr>
+            <a:r>
+              <a:rPr lang="en-US" sz="1000" i="1" dirty="0">
+                <a:solidFill>
+                  <a:srgbClr val="5D6B66"/>
+                </a:solidFill>
+                <a:latin typeface="Calibri" pitchFamily="34" charset="0"/>
+                <a:ea typeface="Calibri" pitchFamily="34" charset="-122"/>
+                <a:cs typeface="Calibri" pitchFamily="34" charset="-120"/>
+              </a:rPr>
+              <a:t>Capturas del sistema con la regla señalada sobre el control que la aplica: a la izquierda RN-12 bloqueando la compra sin stock, a la derecha el semáforo de reposición (RN-08).</a:t>
+            </a:r>
+            <a:endParaRPr lang="en-US" sz="1000" dirty="0"/>
+          </a:p>
+        </p:txBody>
+      </p:sp>
+    </p:spTree>
+  </p:cSld>
+  <p:clrMapOvr>
+    <a:masterClrMapping/>
+  </p:clrMapOvr>
+</p:sld>
+</file>
+
+<file path=ppt/slides/slide15.xml><?xml version="1.0" encoding="utf-8"?>
+<p:sld xmlns:a="http://schemas.openxmlformats.org/drawingml/2006/main" xmlns:r="http://schemas.openxmlformats.org/officeDocument/2006/relationships" xmlns:p="http://schemas.openxmlformats.org/presentationml/2006/main">
+  <p:cSld name="Slide 15">
+    <p:spTree>
+      <p:nvGrpSpPr>
+        <p:cNvPr id="1" name=""/>
+        <p:cNvGrpSpPr/>
+        <p:nvPr/>
+      </p:nvGrpSpPr>
+      <p:grpSpPr>
+        <a:xfrm>
+          <a:off x="0" y="0"/>
+          <a:ext cx="0" cy="0"/>
+          <a:chOff x="0" y="0"/>
+          <a:chExt cx="0" cy="0"/>
+        </a:xfrm>
+      </p:grpSpPr>
+      <p:sp>
+        <p:nvSpPr>
+          <p:cNvPr id="2" name="Text 0"/>
+          <p:cNvSpPr txBox="1"/>
+          <p:nvPr/>
+        </p:nvSpPr>
+        <p:spPr>
+          <a:xfrm>
+            <a:off x="640080" y="384048"/>
+            <a:ext cx="10911535" cy="658368"/>
+          </a:xfrm>
+          <a:prstGeom prst="rect">
+            <a:avLst/>
+          </a:prstGeom>
+          <a:noFill/>
+          <a:ln/>
+        </p:spPr>
+        <p:txBody>
+          <a:bodyPr wrap="square" lIns="0" tIns="0" rIns="0" bIns="0" rtlCol="0" anchor="ctr"/>
+          <a:lstStyle/>
+          <a:p>
+            <a:pPr indent="0" marL="0">
+              <a:buNone/>
+            </a:pPr>
+            <a:r>
+              <a:rPr lang="en-US" sz="3200" b="1" dirty="0">
+                <a:solidFill>
+                  <a:srgbClr val="14524A"/>
+                </a:solidFill>
+                <a:latin typeface="Cambria" pitchFamily="34" charset="0"/>
+                <a:ea typeface="Cambria" pitchFamily="34" charset="-122"/>
+                <a:cs typeface="Cambria" pitchFamily="34" charset="-120"/>
+              </a:rPr>
               <a:t>Estado del proyecto y lo que sigue</a:t>
             </a:r>
             <a:endParaRPr lang="en-US" sz="3200" dirty="0"/>
@@ -5652,7 +7630,7 @@
                 <a:ea typeface="Cambria" pitchFamily="34" charset="-122"/>
                 <a:cs typeface="Cambria" pitchFamily="34" charset="-120"/>
               </a:rPr>
-              <a:t>Requerimientos y arquitectura</a:t>
+              <a:t>Requerimientos y tecnología</a:t>
             </a:r>
             <a:endParaRPr lang="en-US" sz="1500" dirty="0"/>
           </a:p>
@@ -5691,7 +7669,7 @@
                 <a:ea typeface="Calibri" pitchFamily="34" charset="-122"/>
                 <a:cs typeface="Calibri" pitchFamily="34" charset="-120"/>
               </a:rPr>
-              <a:t>17 funcionales, 22 reglas de negocio y cómo se hacen cumplir</a:t>
+              <a:t>Qué pide el negocio, con qué está construido y cómo se hacen cumplir las reglas</a:t>
             </a:r>
             <a:endParaRPr lang="en-US" sz="1150" dirty="0"/>
           </a:p>
